--- a/presentation/ProSpot.pptx
+++ b/presentation/ProSpot.pptx
@@ -2,7 +2,7 @@
 <file path=ppt/presentation.xml><?xml version="1.0" encoding="utf-8"?>
 <p:presentation xmlns:a="http://schemas.openxmlformats.org/drawingml/2006/main" xmlns:r="http://schemas.openxmlformats.org/officeDocument/2006/relationships" xmlns:p="http://schemas.openxmlformats.org/presentationml/2006/main" saveSubsetFonts="1">
   <p:sldMasterIdLst>
-    <p:sldMasterId id="2147483648" r:id="rId1"/>
+    <p:sldMasterId id="2147483732" r:id="rId1"/>
   </p:sldMasterIdLst>
   <p:sldIdLst>
     <p:sldId id="256" r:id="rId2"/>
@@ -12,8 +12,7 @@
     <p:sldId id="260" r:id="rId6"/>
     <p:sldId id="261" r:id="rId7"/>
     <p:sldId id="262" r:id="rId8"/>
-    <p:sldId id="264" r:id="rId9"/>
-    <p:sldId id="263" r:id="rId10"/>
+    <p:sldId id="263" r:id="rId9"/>
   </p:sldIdLst>
   <p:sldSz cx="12192000" cy="6858000"/>
   <p:notesSz cx="6858000" cy="9144000"/>
@@ -114,7 +113,7 @@
   </p:defaultTextStyle>
   <p:extLst>
     <p:ext uri="{EFAFB233-063F-42B5-8137-9DF3F51BA10A}">
-      <p15:sldGuideLst xmlns:p15="http://schemas.microsoft.com/office/powerpoint/2012/main"/>
+      <p15:sldGuideLst xmlns:p15="http://schemas.microsoft.com/office/powerpoint/2012/main" xmlns=""/>
     </p:ext>
   </p:extLst>
 </p:presentation>
@@ -139,13 +138,78 @@
       </p:grpSpPr>
       <p:sp>
         <p:nvSpPr>
-          <p:cNvPr id="2" name="Заголовок 1">
-            <a:extLst>
-              <a:ext uri="{FF2B5EF4-FFF2-40B4-BE49-F238E27FC236}">
-                <a16:creationId xmlns:a16="http://schemas.microsoft.com/office/drawing/2014/main" id="{032744AB-9813-4061-B018-ACBE5D8F8EAA}"/>
-              </a:ext>
-            </a:extLst>
-          </p:cNvPr>
+          <p:cNvPr id="7" name="Равнобедренный треугольник 6"/>
+          <p:cNvSpPr/>
+          <p:nvPr/>
+        </p:nvSpPr>
+        <p:spPr>
+          <a:xfrm rot="16200000">
+            <a:off x="10387963" y="5038579"/>
+            <a:ext cx="1892949" cy="1725637"/>
+          </a:xfrm>
+          <a:prstGeom prst="triangle">
+            <a:avLst>
+              <a:gd name="adj" fmla="val 51323"/>
+            </a:avLst>
+          </a:prstGeom>
+          <a:gradFill flip="none" rotWithShape="1">
+            <a:gsLst>
+              <a:gs pos="0">
+                <a:schemeClr val="accent1">
+                  <a:shade val="30000"/>
+                  <a:satMod val="155000"/>
+                  <a:alpha val="100000"/>
+                </a:schemeClr>
+              </a:gs>
+              <a:gs pos="60000">
+                <a:schemeClr val="accent1">
+                  <a:satMod val="160000"/>
+                  <a:alpha val="100000"/>
+                </a:schemeClr>
+              </a:gs>
+              <a:gs pos="100000">
+                <a:schemeClr val="accent1">
+                  <a:tint val="70000"/>
+                  <a:satMod val="200000"/>
+                  <a:alpha val="100000"/>
+                </a:schemeClr>
+              </a:gs>
+            </a:gsLst>
+            <a:lin ang="15500000" scaled="1"/>
+            <a:tileRect/>
+          </a:gradFill>
+          <a:ln w="38100" cap="rnd" cmpd="sng" algn="ctr">
+            <a:noFill/>
+            <a:prstDash val="solid"/>
+          </a:ln>
+          <a:effectLst/>
+        </p:spPr>
+        <p:style>
+          <a:lnRef idx="3">
+            <a:schemeClr val="lt1"/>
+          </a:lnRef>
+          <a:fillRef idx="1">
+            <a:schemeClr val="accent1"/>
+          </a:fillRef>
+          <a:effectRef idx="1">
+            <a:schemeClr val="accent1"/>
+          </a:effectRef>
+          <a:fontRef idx="minor">
+            <a:schemeClr val="lt1"/>
+          </a:fontRef>
+        </p:style>
+        <p:txBody>
+          <a:bodyPr anchor="ctr"/>
+          <a:lstStyle/>
+          <a:p>
+            <a:pPr algn="ctr" eaLnBrk="1" latinLnBrk="0" hangingPunct="1"/>
+            <a:endParaRPr kumimoji="0" lang="en-US"/>
+          </a:p>
+        </p:txBody>
+      </p:sp>
+      <p:sp>
+        <p:nvSpPr>
+          <p:cNvPr id="8" name="Заголовок 7"/>
           <p:cNvSpPr>
             <a:spLocks noGrp="1"/>
           </p:cNvSpPr>
@@ -155,34 +219,31 @@
         </p:nvSpPr>
         <p:spPr>
           <a:xfrm>
-            <a:off x="1524000" y="1122363"/>
-            <a:ext cx="9144000" cy="2387600"/>
-          </a:xfrm>
-        </p:spPr>
-        <p:txBody>
-          <a:bodyPr anchor="b"/>
+            <a:off x="720726" y="776289"/>
+            <a:ext cx="10750549" cy="1470025"/>
+          </a:xfrm>
+        </p:spPr>
+        <p:txBody>
+          <a:bodyPr anchor="b">
+            <a:normAutofit/>
+          </a:bodyPr>
           <a:lstStyle>
-            <a:lvl1pPr algn="ctr">
-              <a:defRPr sz="6000"/>
+            <a:lvl1pPr algn="r">
+              <a:defRPr sz="4400"/>
             </a:lvl1pPr>
           </a:lstStyle>
           <a:p>
             <a:r>
-              <a:rPr lang="ru-RU"/>
+              <a:rPr kumimoji="0" lang="ru-RU" smtClean="0"/>
               <a:t>Образец заголовка</a:t>
             </a:r>
-          </a:p>
-        </p:txBody>
-      </p:sp>
-      <p:sp>
-        <p:nvSpPr>
-          <p:cNvPr id="3" name="Подзаголовок 2">
-            <a:extLst>
-              <a:ext uri="{FF2B5EF4-FFF2-40B4-BE49-F238E27FC236}">
-                <a16:creationId xmlns:a16="http://schemas.microsoft.com/office/drawing/2014/main" id="{9CCDEF8F-BFF6-4A75-8C19-D1828E1E5CF1}"/>
-              </a:ext>
-            </a:extLst>
-          </p:cNvPr>
+            <a:endParaRPr kumimoji="0" lang="en-US"/>
+          </a:p>
+        </p:txBody>
+      </p:sp>
+      <p:sp>
+        <p:nvSpPr>
+          <p:cNvPr id="9" name="Подзаголовок 8"/>
           <p:cNvSpPr>
             <a:spLocks noGrp="1"/>
           </p:cNvSpPr>
@@ -192,67 +253,68 @@
         </p:nvSpPr>
         <p:spPr>
           <a:xfrm>
-            <a:off x="1524000" y="3602038"/>
-            <a:ext cx="9144000" cy="1655762"/>
+            <a:off x="720726" y="2250280"/>
+            <a:ext cx="10750549" cy="1752600"/>
           </a:xfrm>
         </p:spPr>
         <p:txBody>
           <a:bodyPr/>
           <a:lstStyle>
-            <a:lvl1pPr marL="0" indent="0" algn="ctr">
+            <a:lvl1pPr marL="0" marR="36576" indent="0" algn="r">
+              <a:spcBef>
+                <a:spcPts val="0"/>
+              </a:spcBef>
               <a:buNone/>
-              <a:defRPr sz="2400"/>
+              <a:defRPr>
+                <a:ln>
+                  <a:solidFill>
+                    <a:schemeClr val="bg2"/>
+                  </a:solidFill>
+                </a:ln>
+                <a:solidFill>
+                  <a:schemeClr val="tx1">
+                    <a:tint val="75000"/>
+                  </a:schemeClr>
+                </a:solidFill>
+              </a:defRPr>
             </a:lvl1pPr>
             <a:lvl2pPr marL="457200" indent="0" algn="ctr">
               <a:buNone/>
-              <a:defRPr sz="2000"/>
             </a:lvl2pPr>
             <a:lvl3pPr marL="914400" indent="0" algn="ctr">
               <a:buNone/>
-              <a:defRPr sz="1800"/>
             </a:lvl3pPr>
             <a:lvl4pPr marL="1371600" indent="0" algn="ctr">
               <a:buNone/>
-              <a:defRPr sz="1600"/>
             </a:lvl4pPr>
             <a:lvl5pPr marL="1828800" indent="0" algn="ctr">
               <a:buNone/>
-              <a:defRPr sz="1600"/>
             </a:lvl5pPr>
             <a:lvl6pPr marL="2286000" indent="0" algn="ctr">
               <a:buNone/>
-              <a:defRPr sz="1600"/>
             </a:lvl6pPr>
             <a:lvl7pPr marL="2743200" indent="0" algn="ctr">
               <a:buNone/>
-              <a:defRPr sz="1600"/>
             </a:lvl7pPr>
             <a:lvl8pPr marL="3200400" indent="0" algn="ctr">
               <a:buNone/>
-              <a:defRPr sz="1600"/>
             </a:lvl8pPr>
             <a:lvl9pPr marL="3657600" indent="0" algn="ctr">
               <a:buNone/>
-              <a:defRPr sz="1600"/>
             </a:lvl9pPr>
           </a:lstStyle>
           <a:p>
             <a:r>
-              <a:rPr lang="ru-RU"/>
+              <a:rPr kumimoji="0" lang="ru-RU" smtClean="0"/>
               <a:t>Образец подзаголовка</a:t>
             </a:r>
-          </a:p>
-        </p:txBody>
-      </p:sp>
-      <p:sp>
-        <p:nvSpPr>
-          <p:cNvPr id="4" name="Дата 3">
-            <a:extLst>
-              <a:ext uri="{FF2B5EF4-FFF2-40B4-BE49-F238E27FC236}">
-                <a16:creationId xmlns:a16="http://schemas.microsoft.com/office/drawing/2014/main" id="{C77BB802-A177-41EF-8DAD-97A7C71F3B39}"/>
-              </a:ext>
-            </a:extLst>
-          </p:cNvPr>
+            <a:endParaRPr kumimoji="0" lang="en-US"/>
+          </a:p>
+        </p:txBody>
+      </p:sp>
+      <p:sp>
+        <p:nvSpPr>
+          <p:cNvPr id="28" name="Дата 27"/>
           <p:cNvSpPr>
             <a:spLocks noGrp="1"/>
           </p:cNvSpPr>
@@ -260,13 +322,23 @@
             <p:ph type="dt" sz="half" idx="10"/>
           </p:nvPr>
         </p:nvSpPr>
-        <p:spPr/>
-        <p:txBody>
-          <a:bodyPr/>
-          <a:lstStyle/>
+        <p:spPr>
+          <a:xfrm>
+            <a:off x="1828800" y="6012657"/>
+            <a:ext cx="7721600" cy="365125"/>
+          </a:xfrm>
+        </p:spPr>
+        <p:txBody>
+          <a:bodyPr tIns="0" bIns="0" anchor="t"/>
+          <a:lstStyle>
+            <a:lvl1pPr algn="r">
+              <a:defRPr sz="1000"/>
+            </a:lvl1pPr>
+          </a:lstStyle>
           <a:p>
             <a:fld id="{FED9941D-7481-4412-9593-AE3B98A14048}" type="datetimeFigureOut">
               <a:rPr lang="ru-RU" smtClean="0"/>
+              <a:pPr/>
               <a:t>28.04.2026</a:t>
             </a:fld>
             <a:endParaRPr lang="ru-RU"/>
@@ -275,13 +347,7 @@
       </p:sp>
       <p:sp>
         <p:nvSpPr>
-          <p:cNvPr id="5" name="Нижний колонтитул 4">
-            <a:extLst>
-              <a:ext uri="{FF2B5EF4-FFF2-40B4-BE49-F238E27FC236}">
-                <a16:creationId xmlns:a16="http://schemas.microsoft.com/office/drawing/2014/main" id="{5988AB60-9AF6-4FE6-84F8-486DC3FB2BBD}"/>
-              </a:ext>
-            </a:extLst>
-          </p:cNvPr>
+          <p:cNvPr id="17" name="Нижний колонтитул 16"/>
           <p:cNvSpPr>
             <a:spLocks noGrp="1"/>
           </p:cNvSpPr>
@@ -289,10 +355,19 @@
             <p:ph type="ftr" sz="quarter" idx="11"/>
           </p:nvPr>
         </p:nvSpPr>
-        <p:spPr/>
-        <p:txBody>
-          <a:bodyPr/>
-          <a:lstStyle/>
+        <p:spPr>
+          <a:xfrm>
+            <a:off x="1828800" y="5650705"/>
+            <a:ext cx="7721600" cy="365125"/>
+          </a:xfrm>
+        </p:spPr>
+        <p:txBody>
+          <a:bodyPr tIns="0" bIns="0" anchor="b"/>
+          <a:lstStyle>
+            <a:lvl1pPr algn="r">
+              <a:defRPr sz="1100"/>
+            </a:lvl1pPr>
+          </a:lstStyle>
           <a:p>
             <a:endParaRPr lang="ru-RU"/>
           </a:p>
@@ -300,13 +375,7 @@
       </p:sp>
       <p:sp>
         <p:nvSpPr>
-          <p:cNvPr id="6" name="Номер слайда 5">
-            <a:extLst>
-              <a:ext uri="{FF2B5EF4-FFF2-40B4-BE49-F238E27FC236}">
-                <a16:creationId xmlns:a16="http://schemas.microsoft.com/office/drawing/2014/main" id="{7652052B-258A-4980-A426-2CABE3A052DE}"/>
-              </a:ext>
-            </a:extLst>
-          </p:cNvPr>
+          <p:cNvPr id="29" name="Номер слайда 28"/>
           <p:cNvSpPr>
             <a:spLocks noGrp="1"/>
           </p:cNvSpPr>
@@ -314,13 +383,27 @@
             <p:ph type="sldNum" sz="quarter" idx="12"/>
           </p:nvPr>
         </p:nvSpPr>
-        <p:spPr/>
-        <p:txBody>
-          <a:bodyPr/>
-          <a:lstStyle/>
+        <p:spPr>
+          <a:xfrm>
+            <a:off x="11189663" y="5752308"/>
+            <a:ext cx="670560" cy="365125"/>
+          </a:xfrm>
+        </p:spPr>
+        <p:txBody>
+          <a:bodyPr anchor="ctr"/>
+          <a:lstStyle>
+            <a:lvl1pPr algn="ctr">
+              <a:defRPr sz="1300">
+                <a:solidFill>
+                  <a:srgbClr val="FFFFFF"/>
+                </a:solidFill>
+              </a:defRPr>
+            </a:lvl1pPr>
+          </a:lstStyle>
           <a:p>
             <a:fld id="{44E593DF-646F-45EB-B2B7-C2091C7E091D}" type="slidenum">
               <a:rPr lang="ru-RU" smtClean="0"/>
+              <a:pPr/>
               <a:t>‹#›</a:t>
             </a:fld>
             <a:endParaRPr lang="ru-RU"/>
@@ -328,11 +411,6 @@
         </p:txBody>
       </p:sp>
     </p:spTree>
-    <p:extLst>
-      <p:ext uri="{BB962C8B-B14F-4D97-AF65-F5344CB8AC3E}">
-        <p14:creationId xmlns:p14="http://schemas.microsoft.com/office/powerpoint/2010/main" val="3986059284"/>
-      </p:ext>
-    </p:extLst>
   </p:cSld>
   <p:clrMapOvr>
     <a:masterClrMapping/>
@@ -359,13 +437,7 @@
       </p:grpSpPr>
       <p:sp>
         <p:nvSpPr>
-          <p:cNvPr id="2" name="Заголовок 1">
-            <a:extLst>
-              <a:ext uri="{FF2B5EF4-FFF2-40B4-BE49-F238E27FC236}">
-                <a16:creationId xmlns:a16="http://schemas.microsoft.com/office/drawing/2014/main" id="{5F77A78C-8B14-4A6A-AB45-1C9DD6AC15C1}"/>
-              </a:ext>
-            </a:extLst>
-          </p:cNvPr>
+          <p:cNvPr id="2" name="Заголовок 1"/>
           <p:cNvSpPr>
             <a:spLocks noGrp="1"/>
           </p:cNvSpPr>
@@ -379,21 +451,16 @@
           <a:lstStyle/>
           <a:p>
             <a:r>
-              <a:rPr lang="ru-RU"/>
+              <a:rPr kumimoji="0" lang="ru-RU" smtClean="0"/>
               <a:t>Образец заголовка</a:t>
             </a:r>
-          </a:p>
-        </p:txBody>
-      </p:sp>
-      <p:sp>
-        <p:nvSpPr>
-          <p:cNvPr id="3" name="Вертикальный текст 2">
-            <a:extLst>
-              <a:ext uri="{FF2B5EF4-FFF2-40B4-BE49-F238E27FC236}">
-                <a16:creationId xmlns:a16="http://schemas.microsoft.com/office/drawing/2014/main" id="{ED985C0E-1A6A-451F-974D-E870955FCA42}"/>
-              </a:ext>
-            </a:extLst>
-          </p:cNvPr>
+            <a:endParaRPr kumimoji="0" lang="en-US"/>
+          </a:p>
+        </p:txBody>
+      </p:sp>
+      <p:sp>
+        <p:nvSpPr>
+          <p:cNvPr id="3" name="Вертикальный текст 2"/>
           <p:cNvSpPr>
             <a:spLocks noGrp="1"/>
           </p:cNvSpPr>
@@ -406,51 +473,46 @@
           <a:bodyPr vert="eaVert"/>
           <a:lstStyle/>
           <a:p>
-            <a:pPr lvl="0"/>
-            <a:r>
-              <a:rPr lang="ru-RU"/>
+            <a:pPr lvl="0" eaLnBrk="1" latinLnBrk="0" hangingPunct="1"/>
+            <a:r>
+              <a:rPr lang="ru-RU" smtClean="0"/>
               <a:t>Образец текста</a:t>
             </a:r>
           </a:p>
           <a:p>
-            <a:pPr lvl="1"/>
-            <a:r>
-              <a:rPr lang="ru-RU"/>
+            <a:pPr lvl="1" eaLnBrk="1" latinLnBrk="0" hangingPunct="1"/>
+            <a:r>
+              <a:rPr lang="ru-RU" smtClean="0"/>
               <a:t>Второй уровень</a:t>
             </a:r>
           </a:p>
           <a:p>
-            <a:pPr lvl="2"/>
-            <a:r>
-              <a:rPr lang="ru-RU"/>
+            <a:pPr lvl="2" eaLnBrk="1" latinLnBrk="0" hangingPunct="1"/>
+            <a:r>
+              <a:rPr lang="ru-RU" smtClean="0"/>
               <a:t>Третий уровень</a:t>
             </a:r>
           </a:p>
           <a:p>
-            <a:pPr lvl="3"/>
-            <a:r>
-              <a:rPr lang="ru-RU"/>
+            <a:pPr lvl="3" eaLnBrk="1" latinLnBrk="0" hangingPunct="1"/>
+            <a:r>
+              <a:rPr lang="ru-RU" smtClean="0"/>
               <a:t>Четвертый уровень</a:t>
             </a:r>
           </a:p>
           <a:p>
-            <a:pPr lvl="4"/>
-            <a:r>
-              <a:rPr lang="ru-RU"/>
+            <a:pPr lvl="4" eaLnBrk="1" latinLnBrk="0" hangingPunct="1"/>
+            <a:r>
+              <a:rPr lang="ru-RU" smtClean="0"/>
               <a:t>Пятый уровень</a:t>
             </a:r>
-          </a:p>
-        </p:txBody>
-      </p:sp>
-      <p:sp>
-        <p:nvSpPr>
-          <p:cNvPr id="4" name="Дата 3">
-            <a:extLst>
-              <a:ext uri="{FF2B5EF4-FFF2-40B4-BE49-F238E27FC236}">
-                <a16:creationId xmlns:a16="http://schemas.microsoft.com/office/drawing/2014/main" id="{E227015A-EE4B-422B-ADF5-9538997F3F90}"/>
-              </a:ext>
-            </a:extLst>
-          </p:cNvPr>
+            <a:endParaRPr kumimoji="0" lang="en-US"/>
+          </a:p>
+        </p:txBody>
+      </p:sp>
+      <p:sp>
+        <p:nvSpPr>
+          <p:cNvPr id="4" name="Дата 3"/>
           <p:cNvSpPr>
             <a:spLocks noGrp="1"/>
           </p:cNvSpPr>
@@ -465,6 +527,7 @@
           <a:p>
             <a:fld id="{FED9941D-7481-4412-9593-AE3B98A14048}" type="datetimeFigureOut">
               <a:rPr lang="ru-RU" smtClean="0"/>
+              <a:pPr/>
               <a:t>28.04.2026</a:t>
             </a:fld>
             <a:endParaRPr lang="ru-RU"/>
@@ -473,13 +536,7 @@
       </p:sp>
       <p:sp>
         <p:nvSpPr>
-          <p:cNvPr id="5" name="Нижний колонтитул 4">
-            <a:extLst>
-              <a:ext uri="{FF2B5EF4-FFF2-40B4-BE49-F238E27FC236}">
-                <a16:creationId xmlns:a16="http://schemas.microsoft.com/office/drawing/2014/main" id="{755B90E5-61A0-4F16-A857-44657DB2F560}"/>
-              </a:ext>
-            </a:extLst>
-          </p:cNvPr>
+          <p:cNvPr id="5" name="Нижний колонтитул 4"/>
           <p:cNvSpPr>
             <a:spLocks noGrp="1"/>
           </p:cNvSpPr>
@@ -498,13 +555,7 @@
       </p:sp>
       <p:sp>
         <p:nvSpPr>
-          <p:cNvPr id="6" name="Номер слайда 5">
-            <a:extLst>
-              <a:ext uri="{FF2B5EF4-FFF2-40B4-BE49-F238E27FC236}">
-                <a16:creationId xmlns:a16="http://schemas.microsoft.com/office/drawing/2014/main" id="{4AADB737-C87A-4DF4-A546-57F9F264D88D}"/>
-              </a:ext>
-            </a:extLst>
-          </p:cNvPr>
+          <p:cNvPr id="6" name="Номер слайда 5"/>
           <p:cNvSpPr>
             <a:spLocks noGrp="1"/>
           </p:cNvSpPr>
@@ -519,6 +570,7 @@
           <a:p>
             <a:fld id="{44E593DF-646F-45EB-B2B7-C2091C7E091D}" type="slidenum">
               <a:rPr lang="ru-RU" smtClean="0"/>
+              <a:pPr/>
               <a:t>‹#›</a:t>
             </a:fld>
             <a:endParaRPr lang="ru-RU"/>
@@ -526,11 +578,6 @@
         </p:txBody>
       </p:sp>
     </p:spTree>
-    <p:extLst>
-      <p:ext uri="{BB962C8B-B14F-4D97-AF65-F5344CB8AC3E}">
-        <p14:creationId xmlns:p14="http://schemas.microsoft.com/office/powerpoint/2010/main" val="3457766691"/>
-      </p:ext>
-    </p:extLst>
   </p:cSld>
   <p:clrMapOvr>
     <a:masterClrMapping/>
@@ -557,13 +604,7 @@
       </p:grpSpPr>
       <p:sp>
         <p:nvSpPr>
-          <p:cNvPr id="2" name="Вертикальный заголовок 1">
-            <a:extLst>
-              <a:ext uri="{FF2B5EF4-FFF2-40B4-BE49-F238E27FC236}">
-                <a16:creationId xmlns:a16="http://schemas.microsoft.com/office/drawing/2014/main" id="{FB612DED-ACED-4D57-A270-6BF3013DA2BA}"/>
-              </a:ext>
-            </a:extLst>
-          </p:cNvPr>
+          <p:cNvPr id="2" name="Вертикальный заголовок 1"/>
           <p:cNvSpPr>
             <a:spLocks noGrp="1"/>
           </p:cNvSpPr>
@@ -573,8 +614,8 @@
         </p:nvSpPr>
         <p:spPr>
           <a:xfrm>
-            <a:off x="8724900" y="365125"/>
-            <a:ext cx="2628900" cy="5811838"/>
+            <a:off x="9042400" y="381000"/>
+            <a:ext cx="2540000" cy="5486400"/>
           </a:xfrm>
         </p:spPr>
         <p:txBody>
@@ -582,21 +623,16 @@
           <a:lstStyle/>
           <a:p>
             <a:r>
-              <a:rPr lang="ru-RU"/>
+              <a:rPr kumimoji="0" lang="ru-RU" smtClean="0"/>
               <a:t>Образец заголовка</a:t>
             </a:r>
-          </a:p>
-        </p:txBody>
-      </p:sp>
-      <p:sp>
-        <p:nvSpPr>
-          <p:cNvPr id="3" name="Вертикальный текст 2">
-            <a:extLst>
-              <a:ext uri="{FF2B5EF4-FFF2-40B4-BE49-F238E27FC236}">
-                <a16:creationId xmlns:a16="http://schemas.microsoft.com/office/drawing/2014/main" id="{F35A613E-9F4B-4955-A3F2-07D1C6C1D339}"/>
-              </a:ext>
-            </a:extLst>
-          </p:cNvPr>
+            <a:endParaRPr kumimoji="0" lang="en-US"/>
+          </a:p>
+        </p:txBody>
+      </p:sp>
+      <p:sp>
+        <p:nvSpPr>
+          <p:cNvPr id="3" name="Вертикальный текст 2"/>
           <p:cNvSpPr>
             <a:spLocks noGrp="1"/>
           </p:cNvSpPr>
@@ -606,59 +642,54 @@
         </p:nvSpPr>
         <p:spPr>
           <a:xfrm>
-            <a:off x="838200" y="365125"/>
-            <a:ext cx="7734300" cy="5811838"/>
+            <a:off x="609600" y="381000"/>
+            <a:ext cx="8331200" cy="5486400"/>
           </a:xfrm>
         </p:spPr>
         <p:txBody>
           <a:bodyPr vert="eaVert"/>
           <a:lstStyle/>
           <a:p>
-            <a:pPr lvl="0"/>
-            <a:r>
-              <a:rPr lang="ru-RU"/>
+            <a:pPr lvl="0" eaLnBrk="1" latinLnBrk="0" hangingPunct="1"/>
+            <a:r>
+              <a:rPr lang="ru-RU" smtClean="0"/>
               <a:t>Образец текста</a:t>
             </a:r>
           </a:p>
           <a:p>
-            <a:pPr lvl="1"/>
-            <a:r>
-              <a:rPr lang="ru-RU"/>
+            <a:pPr lvl="1" eaLnBrk="1" latinLnBrk="0" hangingPunct="1"/>
+            <a:r>
+              <a:rPr lang="ru-RU" smtClean="0"/>
               <a:t>Второй уровень</a:t>
             </a:r>
           </a:p>
           <a:p>
-            <a:pPr lvl="2"/>
-            <a:r>
-              <a:rPr lang="ru-RU"/>
+            <a:pPr lvl="2" eaLnBrk="1" latinLnBrk="0" hangingPunct="1"/>
+            <a:r>
+              <a:rPr lang="ru-RU" smtClean="0"/>
               <a:t>Третий уровень</a:t>
             </a:r>
           </a:p>
           <a:p>
-            <a:pPr lvl="3"/>
-            <a:r>
-              <a:rPr lang="ru-RU"/>
+            <a:pPr lvl="3" eaLnBrk="1" latinLnBrk="0" hangingPunct="1"/>
+            <a:r>
+              <a:rPr lang="ru-RU" smtClean="0"/>
               <a:t>Четвертый уровень</a:t>
             </a:r>
           </a:p>
           <a:p>
-            <a:pPr lvl="4"/>
-            <a:r>
-              <a:rPr lang="ru-RU"/>
+            <a:pPr lvl="4" eaLnBrk="1" latinLnBrk="0" hangingPunct="1"/>
+            <a:r>
+              <a:rPr lang="ru-RU" smtClean="0"/>
               <a:t>Пятый уровень</a:t>
             </a:r>
-          </a:p>
-        </p:txBody>
-      </p:sp>
-      <p:sp>
-        <p:nvSpPr>
-          <p:cNvPr id="4" name="Дата 3">
-            <a:extLst>
-              <a:ext uri="{FF2B5EF4-FFF2-40B4-BE49-F238E27FC236}">
-                <a16:creationId xmlns:a16="http://schemas.microsoft.com/office/drawing/2014/main" id="{A3316F5F-333E-491A-9C27-3715A6EBB2CB}"/>
-              </a:ext>
-            </a:extLst>
-          </p:cNvPr>
+            <a:endParaRPr kumimoji="0" lang="en-US"/>
+          </a:p>
+        </p:txBody>
+      </p:sp>
+      <p:sp>
+        <p:nvSpPr>
+          <p:cNvPr id="4" name="Дата 3"/>
           <p:cNvSpPr>
             <a:spLocks noGrp="1"/>
           </p:cNvSpPr>
@@ -673,6 +704,7 @@
           <a:p>
             <a:fld id="{FED9941D-7481-4412-9593-AE3B98A14048}" type="datetimeFigureOut">
               <a:rPr lang="ru-RU" smtClean="0"/>
+              <a:pPr/>
               <a:t>28.04.2026</a:t>
             </a:fld>
             <a:endParaRPr lang="ru-RU"/>
@@ -681,13 +713,7 @@
       </p:sp>
       <p:sp>
         <p:nvSpPr>
-          <p:cNvPr id="5" name="Нижний колонтитул 4">
-            <a:extLst>
-              <a:ext uri="{FF2B5EF4-FFF2-40B4-BE49-F238E27FC236}">
-                <a16:creationId xmlns:a16="http://schemas.microsoft.com/office/drawing/2014/main" id="{EC6BC2E5-05BD-410B-A71B-3B4314C34967}"/>
-              </a:ext>
-            </a:extLst>
-          </p:cNvPr>
+          <p:cNvPr id="5" name="Нижний колонтитул 4"/>
           <p:cNvSpPr>
             <a:spLocks noGrp="1"/>
           </p:cNvSpPr>
@@ -706,13 +732,7 @@
       </p:sp>
       <p:sp>
         <p:nvSpPr>
-          <p:cNvPr id="6" name="Номер слайда 5">
-            <a:extLst>
-              <a:ext uri="{FF2B5EF4-FFF2-40B4-BE49-F238E27FC236}">
-                <a16:creationId xmlns:a16="http://schemas.microsoft.com/office/drawing/2014/main" id="{07647BCC-A132-4FAC-BFAC-1277C67DF442}"/>
-              </a:ext>
-            </a:extLst>
-          </p:cNvPr>
+          <p:cNvPr id="6" name="Номер слайда 5"/>
           <p:cNvSpPr>
             <a:spLocks noGrp="1"/>
           </p:cNvSpPr>
@@ -727,6 +747,7 @@
           <a:p>
             <a:fld id="{44E593DF-646F-45EB-B2B7-C2091C7E091D}" type="slidenum">
               <a:rPr lang="ru-RU" smtClean="0"/>
+              <a:pPr/>
               <a:t>‹#›</a:t>
             </a:fld>
             <a:endParaRPr lang="ru-RU"/>
@@ -734,11 +755,6 @@
         </p:txBody>
       </p:sp>
     </p:spTree>
-    <p:extLst>
-      <p:ext uri="{BB962C8B-B14F-4D97-AF65-F5344CB8AC3E}">
-        <p14:creationId xmlns:p14="http://schemas.microsoft.com/office/powerpoint/2010/main" val="3344189799"/>
-      </p:ext>
-    </p:extLst>
   </p:cSld>
   <p:clrMapOvr>
     <a:masterClrMapping/>
@@ -765,13 +781,7 @@
       </p:grpSpPr>
       <p:sp>
         <p:nvSpPr>
-          <p:cNvPr id="2" name="Заголовок 1">
-            <a:extLst>
-              <a:ext uri="{FF2B5EF4-FFF2-40B4-BE49-F238E27FC236}">
-                <a16:creationId xmlns:a16="http://schemas.microsoft.com/office/drawing/2014/main" id="{F8AC837E-E6DB-4AF9-835F-ACCDDAEFDD0B}"/>
-              </a:ext>
-            </a:extLst>
-          </p:cNvPr>
+          <p:cNvPr id="2" name="Заголовок 1"/>
           <p:cNvSpPr>
             <a:spLocks noGrp="1"/>
           </p:cNvSpPr>
@@ -779,27 +789,27 @@
             <p:ph type="title"/>
           </p:nvPr>
         </p:nvSpPr>
-        <p:spPr/>
+        <p:spPr>
+          <a:xfrm>
+            <a:off x="609600" y="267494"/>
+            <a:ext cx="10972800" cy="1399032"/>
+          </a:xfrm>
+        </p:spPr>
         <p:txBody>
           <a:bodyPr/>
           <a:lstStyle/>
           <a:p>
             <a:r>
-              <a:rPr lang="ru-RU"/>
+              <a:rPr kumimoji="0" lang="ru-RU" smtClean="0"/>
               <a:t>Образец заголовка</a:t>
             </a:r>
-          </a:p>
-        </p:txBody>
-      </p:sp>
-      <p:sp>
-        <p:nvSpPr>
-          <p:cNvPr id="3" name="Объект 2">
-            <a:extLst>
-              <a:ext uri="{FF2B5EF4-FFF2-40B4-BE49-F238E27FC236}">
-                <a16:creationId xmlns:a16="http://schemas.microsoft.com/office/drawing/2014/main" id="{55F63A17-E9A0-460A-85FE-567985637E37}"/>
-              </a:ext>
-            </a:extLst>
-          </p:cNvPr>
+            <a:endParaRPr kumimoji="0" lang="en-US"/>
+          </a:p>
+        </p:txBody>
+      </p:sp>
+      <p:sp>
+        <p:nvSpPr>
+          <p:cNvPr id="3" name="Содержимое 2"/>
           <p:cNvSpPr>
             <a:spLocks noGrp="1"/>
           </p:cNvSpPr>
@@ -807,56 +817,56 @@
             <p:ph idx="1"/>
           </p:nvPr>
         </p:nvSpPr>
-        <p:spPr/>
+        <p:spPr>
+          <a:xfrm>
+            <a:off x="609600" y="1882808"/>
+            <a:ext cx="10972800" cy="4572000"/>
+          </a:xfrm>
+        </p:spPr>
         <p:txBody>
           <a:bodyPr/>
           <a:lstStyle/>
           <a:p>
-            <a:pPr lvl="0"/>
-            <a:r>
-              <a:rPr lang="ru-RU"/>
+            <a:pPr lvl="0" eaLnBrk="1" latinLnBrk="0" hangingPunct="1"/>
+            <a:r>
+              <a:rPr lang="ru-RU" smtClean="0"/>
               <a:t>Образец текста</a:t>
             </a:r>
           </a:p>
           <a:p>
-            <a:pPr lvl="1"/>
-            <a:r>
-              <a:rPr lang="ru-RU"/>
+            <a:pPr lvl="1" eaLnBrk="1" latinLnBrk="0" hangingPunct="1"/>
+            <a:r>
+              <a:rPr lang="ru-RU" smtClean="0"/>
               <a:t>Второй уровень</a:t>
             </a:r>
           </a:p>
           <a:p>
-            <a:pPr lvl="2"/>
-            <a:r>
-              <a:rPr lang="ru-RU"/>
+            <a:pPr lvl="2" eaLnBrk="1" latinLnBrk="0" hangingPunct="1"/>
+            <a:r>
+              <a:rPr lang="ru-RU" smtClean="0"/>
               <a:t>Третий уровень</a:t>
             </a:r>
           </a:p>
           <a:p>
-            <a:pPr lvl="3"/>
-            <a:r>
-              <a:rPr lang="ru-RU"/>
+            <a:pPr lvl="3" eaLnBrk="1" latinLnBrk="0" hangingPunct="1"/>
+            <a:r>
+              <a:rPr lang="ru-RU" smtClean="0"/>
               <a:t>Четвертый уровень</a:t>
             </a:r>
           </a:p>
           <a:p>
-            <a:pPr lvl="4"/>
-            <a:r>
-              <a:rPr lang="ru-RU"/>
+            <a:pPr lvl="4" eaLnBrk="1" latinLnBrk="0" hangingPunct="1"/>
+            <a:r>
+              <a:rPr lang="ru-RU" smtClean="0"/>
               <a:t>Пятый уровень</a:t>
             </a:r>
-          </a:p>
-        </p:txBody>
-      </p:sp>
-      <p:sp>
-        <p:nvSpPr>
-          <p:cNvPr id="4" name="Дата 3">
-            <a:extLst>
-              <a:ext uri="{FF2B5EF4-FFF2-40B4-BE49-F238E27FC236}">
-                <a16:creationId xmlns:a16="http://schemas.microsoft.com/office/drawing/2014/main" id="{D325D916-08D9-40E6-A4BC-E0FCD5BC1FB7}"/>
-              </a:ext>
-            </a:extLst>
-          </p:cNvPr>
+            <a:endParaRPr kumimoji="0" lang="en-US"/>
+          </a:p>
+        </p:txBody>
+      </p:sp>
+      <p:sp>
+        <p:nvSpPr>
+          <p:cNvPr id="4" name="Дата 3"/>
           <p:cNvSpPr>
             <a:spLocks noGrp="1"/>
           </p:cNvSpPr>
@@ -864,13 +874,19 @@
             <p:ph type="dt" sz="half" idx="10"/>
           </p:nvPr>
         </p:nvSpPr>
-        <p:spPr/>
+        <p:spPr>
+          <a:xfrm>
+            <a:off x="6388608" y="6480048"/>
+            <a:ext cx="2844800" cy="301752"/>
+          </a:xfrm>
+        </p:spPr>
         <p:txBody>
           <a:bodyPr/>
           <a:lstStyle/>
           <a:p>
             <a:fld id="{FED9941D-7481-4412-9593-AE3B98A14048}" type="datetimeFigureOut">
               <a:rPr lang="ru-RU" smtClean="0"/>
+              <a:pPr/>
               <a:t>28.04.2026</a:t>
             </a:fld>
             <a:endParaRPr lang="ru-RU"/>
@@ -879,13 +895,7 @@
       </p:sp>
       <p:sp>
         <p:nvSpPr>
-          <p:cNvPr id="5" name="Нижний колонтитул 4">
-            <a:extLst>
-              <a:ext uri="{FF2B5EF4-FFF2-40B4-BE49-F238E27FC236}">
-                <a16:creationId xmlns:a16="http://schemas.microsoft.com/office/drawing/2014/main" id="{0E185F7F-F64E-4605-8DDE-38B4705767BE}"/>
-              </a:ext>
-            </a:extLst>
-          </p:cNvPr>
+          <p:cNvPr id="5" name="Нижний колонтитул 4"/>
           <p:cNvSpPr>
             <a:spLocks noGrp="1"/>
           </p:cNvSpPr>
@@ -893,38 +903,38 @@
             <p:ph type="ftr" sz="quarter" idx="11"/>
           </p:nvPr>
         </p:nvSpPr>
+        <p:spPr>
+          <a:xfrm>
+            <a:off x="609600" y="6480970"/>
+            <a:ext cx="5680075" cy="300831"/>
+          </a:xfrm>
+        </p:spPr>
+        <p:txBody>
+          <a:bodyPr/>
+          <a:lstStyle/>
+          <a:p>
+            <a:endParaRPr lang="ru-RU"/>
+          </a:p>
+        </p:txBody>
+      </p:sp>
+      <p:sp>
+        <p:nvSpPr>
+          <p:cNvPr id="6" name="Номер слайда 5"/>
+          <p:cNvSpPr>
+            <a:spLocks noGrp="1"/>
+          </p:cNvSpPr>
+          <p:nvPr>
+            <p:ph type="sldNum" sz="quarter" idx="12"/>
+          </p:nvPr>
+        </p:nvSpPr>
         <p:spPr/>
         <p:txBody>
           <a:bodyPr/>
           <a:lstStyle/>
           <a:p>
-            <a:endParaRPr lang="ru-RU"/>
-          </a:p>
-        </p:txBody>
-      </p:sp>
-      <p:sp>
-        <p:nvSpPr>
-          <p:cNvPr id="6" name="Номер слайда 5">
-            <a:extLst>
-              <a:ext uri="{FF2B5EF4-FFF2-40B4-BE49-F238E27FC236}">
-                <a16:creationId xmlns:a16="http://schemas.microsoft.com/office/drawing/2014/main" id="{7C290E99-AA88-4475-A568-5C90D9B37C5D}"/>
-              </a:ext>
-            </a:extLst>
-          </p:cNvPr>
-          <p:cNvSpPr>
-            <a:spLocks noGrp="1"/>
-          </p:cNvSpPr>
-          <p:nvPr>
-            <p:ph type="sldNum" sz="quarter" idx="12"/>
-          </p:nvPr>
-        </p:nvSpPr>
-        <p:spPr/>
-        <p:txBody>
-          <a:bodyPr/>
-          <a:lstStyle/>
-          <a:p>
             <a:fld id="{44E593DF-646F-45EB-B2B7-C2091C7E091D}" type="slidenum">
               <a:rPr lang="ru-RU" smtClean="0"/>
+              <a:pPr/>
               <a:t>‹#›</a:t>
             </a:fld>
             <a:endParaRPr lang="ru-RU"/>
@@ -932,11 +942,6 @@
         </p:txBody>
       </p:sp>
     </p:spTree>
-    <p:extLst>
-      <p:ext uri="{BB962C8B-B14F-4D97-AF65-F5344CB8AC3E}">
-        <p14:creationId xmlns:p14="http://schemas.microsoft.com/office/powerpoint/2010/main" val="339986664"/>
-      </p:ext>
-    </p:extLst>
   </p:cSld>
   <p:clrMapOvr>
     <a:masterClrMapping/>
@@ -945,8 +950,13 @@
 </file>
 
 <file path=ppt/slideLayouts/slideLayout3.xml><?xml version="1.0" encoding="utf-8"?>
-<p:sldLayout xmlns:a="http://schemas.openxmlformats.org/drawingml/2006/main" xmlns:r="http://schemas.openxmlformats.org/officeDocument/2006/relationships" xmlns:p="http://schemas.openxmlformats.org/presentationml/2006/main" type="secHead" preserve="1">
+<p:sldLayout xmlns:a="http://schemas.openxmlformats.org/drawingml/2006/main" xmlns:r="http://schemas.openxmlformats.org/officeDocument/2006/relationships" xmlns:p="http://schemas.openxmlformats.org/presentationml/2006/main" showMasterSp="0" type="secHead" preserve="1">
   <p:cSld name="Заголовок раздела">
+    <p:bg>
+      <p:bgRef idx="1002">
+        <a:schemeClr val="bg1"/>
+      </p:bgRef>
+    </p:bg>
     <p:spTree>
       <p:nvGrpSpPr>
         <p:cNvPr id="1" name=""/>
@@ -963,13 +973,315 @@
       </p:grpSpPr>
       <p:sp>
         <p:nvSpPr>
-          <p:cNvPr id="2" name="Заголовок 1">
-            <a:extLst>
-              <a:ext uri="{FF2B5EF4-FFF2-40B4-BE49-F238E27FC236}">
-                <a16:creationId xmlns:a16="http://schemas.microsoft.com/office/drawing/2014/main" id="{B1D783C9-D3E7-4199-A991-9A282CEB6915}"/>
-              </a:ext>
-            </a:extLst>
-          </p:cNvPr>
+          <p:cNvPr id="9" name="Прямоугольный треугольник 8"/>
+          <p:cNvSpPr/>
+          <p:nvPr/>
+        </p:nvSpPr>
+        <p:spPr>
+          <a:xfrm flipV="1">
+            <a:off x="9379" y="7035"/>
+            <a:ext cx="12173243" cy="6836899"/>
+          </a:xfrm>
+          <a:prstGeom prst="rtTriangle">
+            <a:avLst/>
+          </a:prstGeom>
+          <a:gradFill flip="none" rotWithShape="1">
+            <a:gsLst>
+              <a:gs pos="0">
+                <a:schemeClr val="tx2">
+                  <a:alpha val="10000"/>
+                </a:schemeClr>
+              </a:gs>
+              <a:gs pos="70000">
+                <a:schemeClr val="tx2">
+                  <a:alpha val="8000"/>
+                </a:schemeClr>
+              </a:gs>
+              <a:gs pos="100000">
+                <a:schemeClr val="tx2">
+                  <a:alpha val="1000"/>
+                </a:schemeClr>
+              </a:gs>
+            </a:gsLst>
+            <a:lin ang="8000000" scaled="1"/>
+            <a:tileRect/>
+          </a:gradFill>
+          <a:ln w="38100" cap="rnd" cmpd="sng" algn="ctr">
+            <a:noFill/>
+            <a:prstDash val="solid"/>
+          </a:ln>
+          <a:effectLst/>
+        </p:spPr>
+        <p:style>
+          <a:lnRef idx="3">
+            <a:schemeClr val="lt1"/>
+          </a:lnRef>
+          <a:fillRef idx="1">
+            <a:schemeClr val="accent1"/>
+          </a:fillRef>
+          <a:effectRef idx="1">
+            <a:schemeClr val="accent1"/>
+          </a:effectRef>
+          <a:fontRef idx="minor">
+            <a:schemeClr val="lt1"/>
+          </a:fontRef>
+        </p:style>
+        <p:txBody>
+          <a:bodyPr anchor="ctr"/>
+          <a:lstStyle/>
+          <a:p>
+            <a:pPr marL="0" algn="ctr" defTabSz="914400" rtl="0" eaLnBrk="1" latinLnBrk="0" hangingPunct="1"/>
+            <a:endParaRPr kumimoji="0" lang="en-US" sz="1800" kern="1200">
+              <a:solidFill>
+                <a:schemeClr val="lt1"/>
+              </a:solidFill>
+              <a:latin typeface="+mn-lt"/>
+              <a:ea typeface="+mn-ea"/>
+              <a:cs typeface="+mn-cs"/>
+            </a:endParaRPr>
+          </a:p>
+        </p:txBody>
+      </p:sp>
+      <p:sp>
+        <p:nvSpPr>
+          <p:cNvPr id="8" name="Равнобедренный треугольник 7"/>
+          <p:cNvSpPr/>
+          <p:nvPr/>
+        </p:nvSpPr>
+        <p:spPr>
+          <a:xfrm rot="5400000" flipV="1">
+            <a:off x="10387963" y="93786"/>
+            <a:ext cx="1892949" cy="1725637"/>
+          </a:xfrm>
+          <a:prstGeom prst="triangle">
+            <a:avLst>
+              <a:gd name="adj" fmla="val 51323"/>
+            </a:avLst>
+          </a:prstGeom>
+          <a:gradFill flip="none" rotWithShape="1">
+            <a:gsLst>
+              <a:gs pos="0">
+                <a:schemeClr val="accent1">
+                  <a:shade val="30000"/>
+                  <a:satMod val="155000"/>
+                  <a:alpha val="100000"/>
+                </a:schemeClr>
+              </a:gs>
+              <a:gs pos="60000">
+                <a:schemeClr val="accent1">
+                  <a:satMod val="160000"/>
+                  <a:alpha val="100000"/>
+                </a:schemeClr>
+              </a:gs>
+              <a:gs pos="100000">
+                <a:schemeClr val="accent1">
+                  <a:tint val="70000"/>
+                  <a:satMod val="200000"/>
+                  <a:alpha val="100000"/>
+                </a:schemeClr>
+              </a:gs>
+            </a:gsLst>
+            <a:lin ang="15500000" scaled="1"/>
+            <a:tileRect/>
+          </a:gradFill>
+          <a:ln w="38100" cap="rnd" cmpd="sng" algn="ctr">
+            <a:noFill/>
+            <a:prstDash val="solid"/>
+          </a:ln>
+          <a:effectLst/>
+        </p:spPr>
+        <p:style>
+          <a:lnRef idx="3">
+            <a:schemeClr val="lt1"/>
+          </a:lnRef>
+          <a:fillRef idx="1">
+            <a:schemeClr val="accent1"/>
+          </a:fillRef>
+          <a:effectRef idx="1">
+            <a:schemeClr val="accent1"/>
+          </a:effectRef>
+          <a:fontRef idx="minor">
+            <a:schemeClr val="lt1"/>
+          </a:fontRef>
+        </p:style>
+        <p:txBody>
+          <a:bodyPr anchor="ctr"/>
+          <a:lstStyle/>
+          <a:p>
+            <a:pPr algn="ctr" eaLnBrk="1" latinLnBrk="0" hangingPunct="1"/>
+            <a:endParaRPr kumimoji="0" lang="en-US"/>
+          </a:p>
+        </p:txBody>
+      </p:sp>
+      <p:sp>
+        <p:nvSpPr>
+          <p:cNvPr id="4" name="Дата 3"/>
+          <p:cNvSpPr>
+            <a:spLocks noGrp="1"/>
+          </p:cNvSpPr>
+          <p:nvPr>
+            <p:ph type="dt" sz="half" idx="10"/>
+          </p:nvPr>
+        </p:nvSpPr>
+        <p:spPr>
+          <a:xfrm>
+            <a:off x="9274176" y="6477000"/>
+            <a:ext cx="2844800" cy="304800"/>
+          </a:xfrm>
+        </p:spPr>
+        <p:txBody>
+          <a:bodyPr/>
+          <a:lstStyle/>
+          <a:p>
+            <a:fld id="{FED9941D-7481-4412-9593-AE3B98A14048}" type="datetimeFigureOut">
+              <a:rPr lang="ru-RU" smtClean="0"/>
+              <a:pPr/>
+              <a:t>28.04.2026</a:t>
+            </a:fld>
+            <a:endParaRPr lang="ru-RU"/>
+          </a:p>
+        </p:txBody>
+      </p:sp>
+      <p:sp>
+        <p:nvSpPr>
+          <p:cNvPr id="5" name="Нижний колонтитул 4"/>
+          <p:cNvSpPr>
+            <a:spLocks noGrp="1"/>
+          </p:cNvSpPr>
+          <p:nvPr>
+            <p:ph type="ftr" sz="quarter" idx="11"/>
+          </p:nvPr>
+        </p:nvSpPr>
+        <p:spPr>
+          <a:xfrm>
+            <a:off x="3492501" y="6480970"/>
+            <a:ext cx="5680075" cy="300831"/>
+          </a:xfrm>
+        </p:spPr>
+        <p:txBody>
+          <a:bodyPr/>
+          <a:lstStyle/>
+          <a:p>
+            <a:endParaRPr lang="ru-RU"/>
+          </a:p>
+        </p:txBody>
+      </p:sp>
+      <p:sp>
+        <p:nvSpPr>
+          <p:cNvPr id="6" name="Номер слайда 5"/>
+          <p:cNvSpPr>
+            <a:spLocks noGrp="1"/>
+          </p:cNvSpPr>
+          <p:nvPr>
+            <p:ph type="sldNum" sz="quarter" idx="12"/>
+          </p:nvPr>
+        </p:nvSpPr>
+        <p:spPr>
+          <a:xfrm>
+            <a:off x="11268075" y="809625"/>
+            <a:ext cx="670560" cy="300831"/>
+          </a:xfrm>
+        </p:spPr>
+        <p:txBody>
+          <a:bodyPr/>
+          <a:lstStyle/>
+          <a:p>
+            <a:fld id="{44E593DF-646F-45EB-B2B7-C2091C7E091D}" type="slidenum">
+              <a:rPr lang="ru-RU" smtClean="0"/>
+              <a:pPr/>
+              <a:t>‹#›</a:t>
+            </a:fld>
+            <a:endParaRPr lang="ru-RU"/>
+          </a:p>
+        </p:txBody>
+      </p:sp>
+      <p:cxnSp>
+        <p:nvCxnSpPr>
+          <p:cNvPr id="11" name="Прямая соединительная линия 10"/>
+          <p:cNvCxnSpPr/>
+          <p:nvPr/>
+        </p:nvCxnSpPr>
+        <p:spPr>
+          <a:xfrm rot="10800000">
+            <a:off x="8625059" y="9381"/>
+            <a:ext cx="3563815" cy="1900210"/>
+          </a:xfrm>
+          <a:prstGeom prst="line">
+            <a:avLst/>
+          </a:prstGeom>
+          <a:noFill/>
+          <a:ln w="6000" cap="rnd" cmpd="sng" algn="ctr">
+            <a:solidFill>
+              <a:schemeClr val="bg2">
+                <a:tint val="50000"/>
+                <a:satMod val="200000"/>
+                <a:alpha val="45000"/>
+              </a:schemeClr>
+            </a:solidFill>
+            <a:prstDash val="solid"/>
+          </a:ln>
+          <a:effectLst/>
+        </p:spPr>
+        <p:style>
+          <a:lnRef idx="2">
+            <a:schemeClr val="accent1"/>
+          </a:lnRef>
+          <a:fillRef idx="0">
+            <a:schemeClr val="accent1"/>
+          </a:fillRef>
+          <a:effectRef idx="1">
+            <a:schemeClr val="accent1"/>
+          </a:effectRef>
+          <a:fontRef idx="minor">
+            <a:schemeClr val="tx1"/>
+          </a:fontRef>
+        </p:style>
+      </p:cxnSp>
+      <p:cxnSp>
+        <p:nvCxnSpPr>
+          <p:cNvPr id="10" name="Прямая соединительная линия 9"/>
+          <p:cNvCxnSpPr/>
+          <p:nvPr/>
+        </p:nvCxnSpPr>
+        <p:spPr>
+          <a:xfrm flipV="1">
+            <a:off x="0" y="7035"/>
+            <a:ext cx="12182621" cy="6843933"/>
+          </a:xfrm>
+          <a:prstGeom prst="line">
+            <a:avLst/>
+          </a:prstGeom>
+          <a:noFill/>
+          <a:ln w="5000" cap="rnd" cmpd="sng" algn="ctr">
+            <a:solidFill>
+              <a:schemeClr val="bg2">
+                <a:tint val="55000"/>
+                <a:satMod val="200000"/>
+                <a:alpha val="35000"/>
+              </a:schemeClr>
+            </a:solidFill>
+            <a:prstDash val="solid"/>
+          </a:ln>
+          <a:effectLst/>
+        </p:spPr>
+        <p:style>
+          <a:lnRef idx="2">
+            <a:schemeClr val="accent1"/>
+          </a:lnRef>
+          <a:fillRef idx="0">
+            <a:schemeClr val="accent1"/>
+          </a:fillRef>
+          <a:effectRef idx="1">
+            <a:schemeClr val="accent1"/>
+          </a:effectRef>
+          <a:fontRef idx="minor">
+            <a:schemeClr val="tx1"/>
+          </a:fontRef>
+        </p:style>
+      </p:cxnSp>
+      <p:sp>
+        <p:nvSpPr>
+          <p:cNvPr id="2" name="Заголовок 1"/>
           <p:cNvSpPr>
             <a:spLocks noGrp="1"/>
           </p:cNvSpPr>
@@ -979,34 +1291,30 @@
         </p:nvSpPr>
         <p:spPr>
           <a:xfrm>
-            <a:off x="831850" y="1709738"/>
-            <a:ext cx="10515600" cy="2852737"/>
-          </a:xfrm>
-        </p:spPr>
-        <p:txBody>
-          <a:bodyPr anchor="b"/>
+            <a:off x="508000" y="271465"/>
+            <a:ext cx="9652000" cy="1362075"/>
+          </a:xfrm>
+        </p:spPr>
+        <p:txBody>
+          <a:bodyPr anchor="ctr"/>
           <a:lstStyle>
-            <a:lvl1pPr>
-              <a:defRPr sz="6000"/>
+            <a:lvl1pPr marL="0" algn="l">
+              <a:buNone/>
+              <a:defRPr sz="3600" b="1" cap="none" baseline="0"/>
             </a:lvl1pPr>
           </a:lstStyle>
           <a:p>
             <a:r>
-              <a:rPr lang="ru-RU"/>
+              <a:rPr kumimoji="0" lang="ru-RU" smtClean="0"/>
               <a:t>Образец заголовка</a:t>
             </a:r>
-          </a:p>
-        </p:txBody>
-      </p:sp>
-      <p:sp>
-        <p:nvSpPr>
-          <p:cNvPr id="3" name="Текст 2">
-            <a:extLst>
-              <a:ext uri="{FF2B5EF4-FFF2-40B4-BE49-F238E27FC236}">
-                <a16:creationId xmlns:a16="http://schemas.microsoft.com/office/drawing/2014/main" id="{F25D372E-54A1-409A-958E-12144B088157}"/>
-              </a:ext>
-            </a:extLst>
-          </p:cNvPr>
+            <a:endParaRPr kumimoji="0" lang="en-US"/>
+          </a:p>
+        </p:txBody>
+      </p:sp>
+      <p:sp>
+        <p:nvSpPr>
+          <p:cNvPr id="3" name="Текст 2"/>
           <p:cNvSpPr>
             <a:spLocks noGrp="1"/>
           </p:cNvSpPr>
@@ -1016,24 +1324,14 @@
         </p:nvSpPr>
         <p:spPr>
           <a:xfrm>
-            <a:off x="831850" y="4589463"/>
-            <a:ext cx="10515600" cy="1500187"/>
-          </a:xfrm>
-        </p:spPr>
-        <p:txBody>
-          <a:bodyPr/>
+            <a:off x="508000" y="1633536"/>
+            <a:ext cx="5181600" cy="2286000"/>
+          </a:xfrm>
+        </p:spPr>
+        <p:txBody>
+          <a:bodyPr anchor="t"/>
           <a:lstStyle>
-            <a:lvl1pPr marL="0" indent="0">
-              <a:buNone/>
-              <a:defRPr sz="2400">
-                <a:solidFill>
-                  <a:schemeClr val="tx1">
-                    <a:tint val="75000"/>
-                  </a:schemeClr>
-                </a:solidFill>
-              </a:defRPr>
-            </a:lvl1pPr>
-            <a:lvl2pPr marL="457200" indent="0">
+            <a:lvl1pPr marL="54864" indent="0" algn="l">
               <a:buNone/>
               <a:defRPr sz="2000">
                 <a:solidFill>
@@ -1042,8 +1340,8 @@
                   </a:schemeClr>
                 </a:solidFill>
               </a:defRPr>
-            </a:lvl2pPr>
-            <a:lvl3pPr marL="914400" indent="0">
+            </a:lvl1pPr>
+            <a:lvl2pPr>
               <a:buNone/>
               <a:defRPr sz="1800">
                 <a:solidFill>
@@ -1052,8 +1350,8 @@
                   </a:schemeClr>
                 </a:solidFill>
               </a:defRPr>
-            </a:lvl3pPr>
-            <a:lvl4pPr marL="1371600" indent="0">
+            </a:lvl2pPr>
+            <a:lvl3pPr>
               <a:buNone/>
               <a:defRPr sz="1600">
                 <a:solidFill>
@@ -1062,10 +1360,20 @@
                   </a:schemeClr>
                 </a:solidFill>
               </a:defRPr>
+            </a:lvl3pPr>
+            <a:lvl4pPr>
+              <a:buNone/>
+              <a:defRPr sz="1400">
+                <a:solidFill>
+                  <a:schemeClr val="tx1">
+                    <a:tint val="75000"/>
+                  </a:schemeClr>
+                </a:solidFill>
+              </a:defRPr>
             </a:lvl4pPr>
-            <a:lvl5pPr marL="1828800" indent="0">
+            <a:lvl5pPr>
               <a:buNone/>
-              <a:defRPr sz="1600">
+              <a:defRPr sz="1400">
                 <a:solidFill>
                   <a:schemeClr val="tx1">
                     <a:tint val="75000"/>
@@ -1073,148 +1381,20 @@
                 </a:solidFill>
               </a:defRPr>
             </a:lvl5pPr>
-            <a:lvl6pPr marL="2286000" indent="0">
-              <a:buNone/>
-              <a:defRPr sz="1600">
-                <a:solidFill>
-                  <a:schemeClr val="tx1">
-                    <a:tint val="75000"/>
-                  </a:schemeClr>
-                </a:solidFill>
-              </a:defRPr>
-            </a:lvl6pPr>
-            <a:lvl7pPr marL="2743200" indent="0">
-              <a:buNone/>
-              <a:defRPr sz="1600">
-                <a:solidFill>
-                  <a:schemeClr val="tx1">
-                    <a:tint val="75000"/>
-                  </a:schemeClr>
-                </a:solidFill>
-              </a:defRPr>
-            </a:lvl7pPr>
-            <a:lvl8pPr marL="3200400" indent="0">
-              <a:buNone/>
-              <a:defRPr sz="1600">
-                <a:solidFill>
-                  <a:schemeClr val="tx1">
-                    <a:tint val="75000"/>
-                  </a:schemeClr>
-                </a:solidFill>
-              </a:defRPr>
-            </a:lvl8pPr>
-            <a:lvl9pPr marL="3657600" indent="0">
-              <a:buNone/>
-              <a:defRPr sz="1600">
-                <a:solidFill>
-                  <a:schemeClr val="tx1">
-                    <a:tint val="75000"/>
-                  </a:schemeClr>
-                </a:solidFill>
-              </a:defRPr>
-            </a:lvl9pPr>
           </a:lstStyle>
           <a:p>
-            <a:pPr lvl="0"/>
-            <a:r>
-              <a:rPr lang="ru-RU"/>
+            <a:pPr lvl="0" eaLnBrk="1" latinLnBrk="0" hangingPunct="1"/>
+            <a:r>
+              <a:rPr kumimoji="0" lang="ru-RU" smtClean="0"/>
               <a:t>Образец текста</a:t>
             </a:r>
           </a:p>
         </p:txBody>
       </p:sp>
-      <p:sp>
-        <p:nvSpPr>
-          <p:cNvPr id="4" name="Дата 3">
-            <a:extLst>
-              <a:ext uri="{FF2B5EF4-FFF2-40B4-BE49-F238E27FC236}">
-                <a16:creationId xmlns:a16="http://schemas.microsoft.com/office/drawing/2014/main" id="{373E97BA-4ADB-4640-9C45-E46DCD8BF530}"/>
-              </a:ext>
-            </a:extLst>
-          </p:cNvPr>
-          <p:cNvSpPr>
-            <a:spLocks noGrp="1"/>
-          </p:cNvSpPr>
-          <p:nvPr>
-            <p:ph type="dt" sz="half" idx="10"/>
-          </p:nvPr>
-        </p:nvSpPr>
-        <p:spPr/>
-        <p:txBody>
-          <a:bodyPr/>
-          <a:lstStyle/>
-          <a:p>
-            <a:fld id="{FED9941D-7481-4412-9593-AE3B98A14048}" type="datetimeFigureOut">
-              <a:rPr lang="ru-RU" smtClean="0"/>
-              <a:t>28.04.2026</a:t>
-            </a:fld>
-            <a:endParaRPr lang="ru-RU"/>
-          </a:p>
-        </p:txBody>
-      </p:sp>
-      <p:sp>
-        <p:nvSpPr>
-          <p:cNvPr id="5" name="Нижний колонтитул 4">
-            <a:extLst>
-              <a:ext uri="{FF2B5EF4-FFF2-40B4-BE49-F238E27FC236}">
-                <a16:creationId xmlns:a16="http://schemas.microsoft.com/office/drawing/2014/main" id="{47B83372-0F06-4AF3-BE12-CCDCB8081D4E}"/>
-              </a:ext>
-            </a:extLst>
-          </p:cNvPr>
-          <p:cNvSpPr>
-            <a:spLocks noGrp="1"/>
-          </p:cNvSpPr>
-          <p:nvPr>
-            <p:ph type="ftr" sz="quarter" idx="11"/>
-          </p:nvPr>
-        </p:nvSpPr>
-        <p:spPr/>
-        <p:txBody>
-          <a:bodyPr/>
-          <a:lstStyle/>
-          <a:p>
-            <a:endParaRPr lang="ru-RU"/>
-          </a:p>
-        </p:txBody>
-      </p:sp>
-      <p:sp>
-        <p:nvSpPr>
-          <p:cNvPr id="6" name="Номер слайда 5">
-            <a:extLst>
-              <a:ext uri="{FF2B5EF4-FFF2-40B4-BE49-F238E27FC236}">
-                <a16:creationId xmlns:a16="http://schemas.microsoft.com/office/drawing/2014/main" id="{C9E98715-346D-4030-87B8-08B6086EC056}"/>
-              </a:ext>
-            </a:extLst>
-          </p:cNvPr>
-          <p:cNvSpPr>
-            <a:spLocks noGrp="1"/>
-          </p:cNvSpPr>
-          <p:nvPr>
-            <p:ph type="sldNum" sz="quarter" idx="12"/>
-          </p:nvPr>
-        </p:nvSpPr>
-        <p:spPr/>
-        <p:txBody>
-          <a:bodyPr/>
-          <a:lstStyle/>
-          <a:p>
-            <a:fld id="{44E593DF-646F-45EB-B2B7-C2091C7E091D}" type="slidenum">
-              <a:rPr lang="ru-RU" smtClean="0"/>
-              <a:t>‹#›</a:t>
-            </a:fld>
-            <a:endParaRPr lang="ru-RU"/>
-          </a:p>
-        </p:txBody>
-      </p:sp>
     </p:spTree>
-    <p:extLst>
-      <p:ext uri="{BB962C8B-B14F-4D97-AF65-F5344CB8AC3E}">
-        <p14:creationId xmlns:p14="http://schemas.microsoft.com/office/powerpoint/2010/main" val="481243809"/>
-      </p:ext>
-    </p:extLst>
   </p:cSld>
   <p:clrMapOvr>
-    <a:masterClrMapping/>
+    <a:overrideClrMapping bg1="dk1" tx1="lt1" bg2="dk2" tx2="lt2" accent1="accent1" accent2="accent2" accent3="accent3" accent4="accent4" accent5="accent5" accent6="accent6" hlink="hlink" folHlink="folHlink"/>
   </p:clrMapOvr>
 </p:sldLayout>
 </file>
@@ -1238,13 +1418,7 @@
       </p:grpSpPr>
       <p:sp>
         <p:nvSpPr>
-          <p:cNvPr id="2" name="Заголовок 1">
-            <a:extLst>
-              <a:ext uri="{FF2B5EF4-FFF2-40B4-BE49-F238E27FC236}">
-                <a16:creationId xmlns:a16="http://schemas.microsoft.com/office/drawing/2014/main" id="{836A4609-91BE-4C36-8D9B-9F04E13ED717}"/>
-              </a:ext>
-            </a:extLst>
-          </p:cNvPr>
+          <p:cNvPr id="2" name="Заголовок 1"/>
           <p:cNvSpPr>
             <a:spLocks noGrp="1"/>
           </p:cNvSpPr>
@@ -1255,162 +1429,189 @@
         <p:spPr/>
         <p:txBody>
           <a:bodyPr/>
+          <a:lstStyle>
+            <a:lvl1pPr marL="0" algn="l">
+              <a:defRPr/>
+            </a:lvl1pPr>
+          </a:lstStyle>
+          <a:p>
+            <a:r>
+              <a:rPr kumimoji="0" lang="ru-RU" smtClean="0"/>
+              <a:t>Образец заголовка</a:t>
+            </a:r>
+            <a:endParaRPr kumimoji="0" lang="en-US"/>
+          </a:p>
+        </p:txBody>
+      </p:sp>
+      <p:sp>
+        <p:nvSpPr>
+          <p:cNvPr id="3" name="Содержимое 2"/>
+          <p:cNvSpPr>
+            <a:spLocks noGrp="1"/>
+          </p:cNvSpPr>
+          <p:nvPr>
+            <p:ph sz="half" idx="1"/>
+          </p:nvPr>
+        </p:nvSpPr>
+        <p:spPr>
+          <a:xfrm>
+            <a:off x="609600" y="1722438"/>
+            <a:ext cx="5384800" cy="4525963"/>
+          </a:xfrm>
+        </p:spPr>
+        <p:txBody>
+          <a:bodyPr/>
+          <a:lstStyle>
+            <a:lvl1pPr>
+              <a:defRPr sz="2600"/>
+            </a:lvl1pPr>
+            <a:lvl2pPr>
+              <a:defRPr sz="2400"/>
+            </a:lvl2pPr>
+            <a:lvl3pPr>
+              <a:defRPr sz="2000"/>
+            </a:lvl3pPr>
+            <a:lvl4pPr>
+              <a:defRPr sz="1800"/>
+            </a:lvl4pPr>
+            <a:lvl5pPr>
+              <a:defRPr sz="1800"/>
+            </a:lvl5pPr>
+          </a:lstStyle>
+          <a:p>
+            <a:pPr lvl="0" eaLnBrk="1" latinLnBrk="0" hangingPunct="1"/>
+            <a:r>
+              <a:rPr lang="ru-RU" smtClean="0"/>
+              <a:t>Образец текста</a:t>
+            </a:r>
+          </a:p>
+          <a:p>
+            <a:pPr lvl="1" eaLnBrk="1" latinLnBrk="0" hangingPunct="1"/>
+            <a:r>
+              <a:rPr lang="ru-RU" smtClean="0"/>
+              <a:t>Второй уровень</a:t>
+            </a:r>
+          </a:p>
+          <a:p>
+            <a:pPr lvl="2" eaLnBrk="1" latinLnBrk="0" hangingPunct="1"/>
+            <a:r>
+              <a:rPr lang="ru-RU" smtClean="0"/>
+              <a:t>Третий уровень</a:t>
+            </a:r>
+          </a:p>
+          <a:p>
+            <a:pPr lvl="3" eaLnBrk="1" latinLnBrk="0" hangingPunct="1"/>
+            <a:r>
+              <a:rPr lang="ru-RU" smtClean="0"/>
+              <a:t>Четвертый уровень</a:t>
+            </a:r>
+          </a:p>
+          <a:p>
+            <a:pPr lvl="4" eaLnBrk="1" latinLnBrk="0" hangingPunct="1"/>
+            <a:r>
+              <a:rPr lang="ru-RU" smtClean="0"/>
+              <a:t>Пятый уровень</a:t>
+            </a:r>
+            <a:endParaRPr kumimoji="0" lang="en-US"/>
+          </a:p>
+        </p:txBody>
+      </p:sp>
+      <p:sp>
+        <p:nvSpPr>
+          <p:cNvPr id="4" name="Содержимое 3"/>
+          <p:cNvSpPr>
+            <a:spLocks noGrp="1"/>
+          </p:cNvSpPr>
+          <p:nvPr>
+            <p:ph sz="half" idx="2"/>
+          </p:nvPr>
+        </p:nvSpPr>
+        <p:spPr>
+          <a:xfrm>
+            <a:off x="6197600" y="1722438"/>
+            <a:ext cx="5384800" cy="4525963"/>
+          </a:xfrm>
+        </p:spPr>
+        <p:txBody>
+          <a:bodyPr/>
+          <a:lstStyle>
+            <a:lvl1pPr>
+              <a:defRPr sz="2600"/>
+            </a:lvl1pPr>
+            <a:lvl2pPr>
+              <a:defRPr sz="2400"/>
+            </a:lvl2pPr>
+            <a:lvl3pPr>
+              <a:defRPr sz="2000"/>
+            </a:lvl3pPr>
+            <a:lvl4pPr>
+              <a:defRPr sz="1800"/>
+            </a:lvl4pPr>
+            <a:lvl5pPr>
+              <a:defRPr sz="1800"/>
+            </a:lvl5pPr>
+          </a:lstStyle>
+          <a:p>
+            <a:pPr lvl="0" eaLnBrk="1" latinLnBrk="0" hangingPunct="1"/>
+            <a:r>
+              <a:rPr lang="ru-RU" smtClean="0"/>
+              <a:t>Образец текста</a:t>
+            </a:r>
+          </a:p>
+          <a:p>
+            <a:pPr lvl="1" eaLnBrk="1" latinLnBrk="0" hangingPunct="1"/>
+            <a:r>
+              <a:rPr lang="ru-RU" smtClean="0"/>
+              <a:t>Второй уровень</a:t>
+            </a:r>
+          </a:p>
+          <a:p>
+            <a:pPr lvl="2" eaLnBrk="1" latinLnBrk="0" hangingPunct="1"/>
+            <a:r>
+              <a:rPr lang="ru-RU" smtClean="0"/>
+              <a:t>Третий уровень</a:t>
+            </a:r>
+          </a:p>
+          <a:p>
+            <a:pPr lvl="3" eaLnBrk="1" latinLnBrk="0" hangingPunct="1"/>
+            <a:r>
+              <a:rPr lang="ru-RU" smtClean="0"/>
+              <a:t>Четвертый уровень</a:t>
+            </a:r>
+          </a:p>
+          <a:p>
+            <a:pPr lvl="4" eaLnBrk="1" latinLnBrk="0" hangingPunct="1"/>
+            <a:r>
+              <a:rPr lang="ru-RU" smtClean="0"/>
+              <a:t>Пятый уровень</a:t>
+            </a:r>
+            <a:endParaRPr kumimoji="0" lang="en-US"/>
+          </a:p>
+        </p:txBody>
+      </p:sp>
+      <p:sp>
+        <p:nvSpPr>
+          <p:cNvPr id="5" name="Дата 4"/>
+          <p:cNvSpPr>
+            <a:spLocks noGrp="1"/>
+          </p:cNvSpPr>
+          <p:nvPr>
+            <p:ph type="dt" sz="half" idx="10"/>
+          </p:nvPr>
+        </p:nvSpPr>
+        <p:spPr>
+          <a:xfrm>
+            <a:off x="6388608" y="6480969"/>
+            <a:ext cx="2844800" cy="301752"/>
+          </a:xfrm>
+        </p:spPr>
+        <p:txBody>
+          <a:bodyPr/>
           <a:lstStyle/>
           <a:p>
-            <a:r>
-              <a:rPr lang="ru-RU"/>
-              <a:t>Образец заголовка</a:t>
-            </a:r>
-          </a:p>
-        </p:txBody>
-      </p:sp>
-      <p:sp>
-        <p:nvSpPr>
-          <p:cNvPr id="3" name="Объект 2">
-            <a:extLst>
-              <a:ext uri="{FF2B5EF4-FFF2-40B4-BE49-F238E27FC236}">
-                <a16:creationId xmlns:a16="http://schemas.microsoft.com/office/drawing/2014/main" id="{EFBF9D4D-98C8-40F6-8E1D-41D5FECFF8ED}"/>
-              </a:ext>
-            </a:extLst>
-          </p:cNvPr>
-          <p:cNvSpPr>
-            <a:spLocks noGrp="1"/>
-          </p:cNvSpPr>
-          <p:nvPr>
-            <p:ph sz="half" idx="1"/>
-          </p:nvPr>
-        </p:nvSpPr>
-        <p:spPr>
-          <a:xfrm>
-            <a:off x="838200" y="1825625"/>
-            <a:ext cx="5181600" cy="4351338"/>
-          </a:xfrm>
-        </p:spPr>
-        <p:txBody>
-          <a:bodyPr/>
-          <a:lstStyle/>
-          <a:p>
-            <a:pPr lvl="0"/>
-            <a:r>
-              <a:rPr lang="ru-RU"/>
-              <a:t>Образец текста</a:t>
-            </a:r>
-          </a:p>
-          <a:p>
-            <a:pPr lvl="1"/>
-            <a:r>
-              <a:rPr lang="ru-RU"/>
-              <a:t>Второй уровень</a:t>
-            </a:r>
-          </a:p>
-          <a:p>
-            <a:pPr lvl="2"/>
-            <a:r>
-              <a:rPr lang="ru-RU"/>
-              <a:t>Третий уровень</a:t>
-            </a:r>
-          </a:p>
-          <a:p>
-            <a:pPr lvl="3"/>
-            <a:r>
-              <a:rPr lang="ru-RU"/>
-              <a:t>Четвертый уровень</a:t>
-            </a:r>
-          </a:p>
-          <a:p>
-            <a:pPr lvl="4"/>
-            <a:r>
-              <a:rPr lang="ru-RU"/>
-              <a:t>Пятый уровень</a:t>
-            </a:r>
-          </a:p>
-        </p:txBody>
-      </p:sp>
-      <p:sp>
-        <p:nvSpPr>
-          <p:cNvPr id="4" name="Объект 3">
-            <a:extLst>
-              <a:ext uri="{FF2B5EF4-FFF2-40B4-BE49-F238E27FC236}">
-                <a16:creationId xmlns:a16="http://schemas.microsoft.com/office/drawing/2014/main" id="{6865AB1B-86A6-4EDA-AD4D-ECFE986C9CF9}"/>
-              </a:ext>
-            </a:extLst>
-          </p:cNvPr>
-          <p:cNvSpPr>
-            <a:spLocks noGrp="1"/>
-          </p:cNvSpPr>
-          <p:nvPr>
-            <p:ph sz="half" idx="2"/>
-          </p:nvPr>
-        </p:nvSpPr>
-        <p:spPr>
-          <a:xfrm>
-            <a:off x="6172200" y="1825625"/>
-            <a:ext cx="5181600" cy="4351338"/>
-          </a:xfrm>
-        </p:spPr>
-        <p:txBody>
-          <a:bodyPr/>
-          <a:lstStyle/>
-          <a:p>
-            <a:pPr lvl="0"/>
-            <a:r>
-              <a:rPr lang="ru-RU"/>
-              <a:t>Образец текста</a:t>
-            </a:r>
-          </a:p>
-          <a:p>
-            <a:pPr lvl="1"/>
-            <a:r>
-              <a:rPr lang="ru-RU"/>
-              <a:t>Второй уровень</a:t>
-            </a:r>
-          </a:p>
-          <a:p>
-            <a:pPr lvl="2"/>
-            <a:r>
-              <a:rPr lang="ru-RU"/>
-              <a:t>Третий уровень</a:t>
-            </a:r>
-          </a:p>
-          <a:p>
-            <a:pPr lvl="3"/>
-            <a:r>
-              <a:rPr lang="ru-RU"/>
-              <a:t>Четвертый уровень</a:t>
-            </a:r>
-          </a:p>
-          <a:p>
-            <a:pPr lvl="4"/>
-            <a:r>
-              <a:rPr lang="ru-RU"/>
-              <a:t>Пятый уровень</a:t>
-            </a:r>
-          </a:p>
-        </p:txBody>
-      </p:sp>
-      <p:sp>
-        <p:nvSpPr>
-          <p:cNvPr id="5" name="Дата 4">
-            <a:extLst>
-              <a:ext uri="{FF2B5EF4-FFF2-40B4-BE49-F238E27FC236}">
-                <a16:creationId xmlns:a16="http://schemas.microsoft.com/office/drawing/2014/main" id="{66884E1E-DD98-4A51-A21B-17C62CA635B5}"/>
-              </a:ext>
-            </a:extLst>
-          </p:cNvPr>
-          <p:cNvSpPr>
-            <a:spLocks noGrp="1"/>
-          </p:cNvSpPr>
-          <p:nvPr>
-            <p:ph type="dt" sz="half" idx="10"/>
-          </p:nvPr>
-        </p:nvSpPr>
-        <p:spPr/>
-        <p:txBody>
-          <a:bodyPr/>
-          <a:lstStyle/>
-          <a:p>
             <a:fld id="{FED9941D-7481-4412-9593-AE3B98A14048}" type="datetimeFigureOut">
               <a:rPr lang="ru-RU" smtClean="0"/>
+              <a:pPr/>
               <a:t>28.04.2026</a:t>
             </a:fld>
             <a:endParaRPr lang="ru-RU"/>
@@ -1419,13 +1620,7 @@
       </p:sp>
       <p:sp>
         <p:nvSpPr>
-          <p:cNvPr id="6" name="Нижний колонтитул 5">
-            <a:extLst>
-              <a:ext uri="{FF2B5EF4-FFF2-40B4-BE49-F238E27FC236}">
-                <a16:creationId xmlns:a16="http://schemas.microsoft.com/office/drawing/2014/main" id="{6349A8C2-558A-4EC4-B5EA-6777A08CB4E3}"/>
-              </a:ext>
-            </a:extLst>
-          </p:cNvPr>
+          <p:cNvPr id="6" name="Нижний колонтитул 5"/>
           <p:cNvSpPr>
             <a:spLocks noGrp="1"/>
           </p:cNvSpPr>
@@ -1433,7 +1628,12 @@
             <p:ph type="ftr" sz="quarter" idx="11"/>
           </p:nvPr>
         </p:nvSpPr>
-        <p:spPr/>
+        <p:spPr>
+          <a:xfrm>
+            <a:off x="609600" y="6480969"/>
+            <a:ext cx="5680075" cy="301752"/>
+          </a:xfrm>
+        </p:spPr>
         <p:txBody>
           <a:bodyPr/>
           <a:lstStyle/>
@@ -1444,13 +1644,7 @@
       </p:sp>
       <p:sp>
         <p:nvSpPr>
-          <p:cNvPr id="7" name="Номер слайда 6">
-            <a:extLst>
-              <a:ext uri="{FF2B5EF4-FFF2-40B4-BE49-F238E27FC236}">
-                <a16:creationId xmlns:a16="http://schemas.microsoft.com/office/drawing/2014/main" id="{D92E22DA-264A-4B82-A30A-C9224CA0F974}"/>
-              </a:ext>
-            </a:extLst>
-          </p:cNvPr>
+          <p:cNvPr id="7" name="Номер слайда 6"/>
           <p:cNvSpPr>
             <a:spLocks noGrp="1"/>
           </p:cNvSpPr>
@@ -1458,13 +1652,19 @@
             <p:ph type="sldNum" sz="quarter" idx="12"/>
           </p:nvPr>
         </p:nvSpPr>
-        <p:spPr/>
+        <p:spPr>
+          <a:xfrm>
+            <a:off x="10119360" y="6480969"/>
+            <a:ext cx="670560" cy="301752"/>
+          </a:xfrm>
+        </p:spPr>
         <p:txBody>
           <a:bodyPr/>
           <a:lstStyle/>
           <a:p>
             <a:fld id="{44E593DF-646F-45EB-B2B7-C2091C7E091D}" type="slidenum">
               <a:rPr lang="ru-RU" smtClean="0"/>
+              <a:pPr/>
               <a:t>‹#›</a:t>
             </a:fld>
             <a:endParaRPr lang="ru-RU"/>
@@ -1472,11 +1672,6 @@
         </p:txBody>
       </p:sp>
     </p:spTree>
-    <p:extLst>
-      <p:ext uri="{BB962C8B-B14F-4D97-AF65-F5344CB8AC3E}">
-        <p14:creationId xmlns:p14="http://schemas.microsoft.com/office/powerpoint/2010/main" val="3351732550"/>
-      </p:ext>
-    </p:extLst>
   </p:cSld>
   <p:clrMapOvr>
     <a:masterClrMapping/>
@@ -1485,8 +1680,13 @@
 </file>
 
 <file path=ppt/slideLayouts/slideLayout5.xml><?xml version="1.0" encoding="utf-8"?>
-<p:sldLayout xmlns:a="http://schemas.openxmlformats.org/drawingml/2006/main" xmlns:r="http://schemas.openxmlformats.org/officeDocument/2006/relationships" xmlns:p="http://schemas.openxmlformats.org/presentationml/2006/main" type="twoTxTwoObj" preserve="1">
+<p:sldLayout xmlns:a="http://schemas.openxmlformats.org/drawingml/2006/main" xmlns:r="http://schemas.openxmlformats.org/officeDocument/2006/relationships" xmlns:p="http://schemas.openxmlformats.org/presentationml/2006/main" showMasterSp="0" type="twoTxTwoObj" preserve="1">
   <p:cSld name="Сравнение">
+    <p:bg>
+      <p:bgRef idx="1002">
+        <a:schemeClr val="bg2"/>
+      </p:bgRef>
+    </p:bg>
     <p:spTree>
       <p:nvGrpSpPr>
         <p:cNvPr id="1" name=""/>
@@ -1503,13 +1703,7 @@
       </p:grpSpPr>
       <p:sp>
         <p:nvSpPr>
-          <p:cNvPr id="2" name="Заголовок 1">
-            <a:extLst>
-              <a:ext uri="{FF2B5EF4-FFF2-40B4-BE49-F238E27FC236}">
-                <a16:creationId xmlns:a16="http://schemas.microsoft.com/office/drawing/2014/main" id="{4CE6232E-FA69-4268-82AB-E327AE7F5689}"/>
-              </a:ext>
-            </a:extLst>
-          </p:cNvPr>
+          <p:cNvPr id="2" name="Заголовок 1"/>
           <p:cNvSpPr>
             <a:spLocks noGrp="1"/>
           </p:cNvSpPr>
@@ -1519,30 +1713,38 @@
         </p:nvSpPr>
         <p:spPr>
           <a:xfrm>
-            <a:off x="839788" y="365125"/>
-            <a:ext cx="10515600" cy="1325563"/>
-          </a:xfrm>
-        </p:spPr>
-        <p:txBody>
-          <a:bodyPr/>
-          <a:lstStyle/>
-          <a:p>
-            <a:r>
-              <a:rPr lang="ru-RU"/>
+            <a:off x="330931" y="290732"/>
+            <a:ext cx="1422400" cy="6153912"/>
+          </a:xfrm>
+        </p:spPr>
+        <p:txBody>
+          <a:bodyPr vert="vert270" anchor="b"/>
+          <a:lstStyle>
+            <a:lvl1pPr marL="0" algn="ctr">
+              <a:defRPr sz="3300" b="1">
+                <a:ln w="6350">
+                  <a:solidFill>
+                    <a:schemeClr val="tx1"/>
+                  </a:solidFill>
+                </a:ln>
+                <a:solidFill>
+                  <a:schemeClr val="tx1"/>
+                </a:solidFill>
+              </a:defRPr>
+            </a:lvl1pPr>
+          </a:lstStyle>
+          <a:p>
+            <a:r>
+              <a:rPr kumimoji="0" lang="ru-RU" smtClean="0"/>
               <a:t>Образец заголовка</a:t>
             </a:r>
-          </a:p>
-        </p:txBody>
-      </p:sp>
-      <p:sp>
-        <p:nvSpPr>
-          <p:cNvPr id="3" name="Текст 2">
-            <a:extLst>
-              <a:ext uri="{FF2B5EF4-FFF2-40B4-BE49-F238E27FC236}">
-                <a16:creationId xmlns:a16="http://schemas.microsoft.com/office/drawing/2014/main" id="{FE7F5EBB-7C0A-4D6B-B77D-8B739B47E1D2}"/>
-              </a:ext>
-            </a:extLst>
-          </p:cNvPr>
+            <a:endParaRPr kumimoji="0" lang="en-US"/>
+          </a:p>
+        </p:txBody>
+      </p:sp>
+      <p:sp>
+        <p:nvSpPr>
+          <p:cNvPr id="3" name="Текст 2"/>
           <p:cNvSpPr>
             <a:spLocks noGrp="1"/>
           </p:cNvSpPr>
@@ -1552,187 +1754,107 @@
         </p:nvSpPr>
         <p:spPr>
           <a:xfrm>
-            <a:off x="839788" y="1681163"/>
-            <a:ext cx="5157787" cy="823912"/>
-          </a:xfrm>
-        </p:spPr>
-        <p:txBody>
-          <a:bodyPr anchor="b"/>
+            <a:off x="1820008" y="290732"/>
+            <a:ext cx="774699" cy="3017520"/>
+          </a:xfrm>
+          <a:solidFill>
+            <a:schemeClr val="bg1"/>
+          </a:solidFill>
+          <a:ln w="12700">
+            <a:noFill/>
+          </a:ln>
+        </p:spPr>
+        <p:txBody>
+          <a:bodyPr vert="vert270" anchor="ctr"/>
           <a:lstStyle>
-            <a:lvl1pPr marL="0" indent="0">
+            <a:lvl1pPr marL="0" indent="0" algn="ctr">
               <a:buNone/>
-              <a:defRPr sz="2400" b="1"/>
+              <a:defRPr sz="1600" b="0">
+                <a:solidFill>
+                  <a:schemeClr val="tx1"/>
+                </a:solidFill>
+              </a:defRPr>
             </a:lvl1pPr>
-            <a:lvl2pPr marL="457200" indent="0">
+            <a:lvl2pPr>
               <a:buNone/>
               <a:defRPr sz="2000" b="1"/>
             </a:lvl2pPr>
-            <a:lvl3pPr marL="914400" indent="0">
+            <a:lvl3pPr>
               <a:buNone/>
               <a:defRPr sz="1800" b="1"/>
             </a:lvl3pPr>
-            <a:lvl4pPr marL="1371600" indent="0">
+            <a:lvl4pPr>
               <a:buNone/>
               <a:defRPr sz="1600" b="1"/>
             </a:lvl4pPr>
-            <a:lvl5pPr marL="1828800" indent="0">
+            <a:lvl5pPr>
               <a:buNone/>
               <a:defRPr sz="1600" b="1"/>
             </a:lvl5pPr>
-            <a:lvl6pPr marL="2286000" indent="0">
+          </a:lstStyle>
+          <a:p>
+            <a:pPr lvl="0" eaLnBrk="1" latinLnBrk="0" hangingPunct="1"/>
+            <a:r>
+              <a:rPr kumimoji="0" lang="ru-RU" smtClean="0"/>
+              <a:t>Образец текста</a:t>
+            </a:r>
+          </a:p>
+        </p:txBody>
+      </p:sp>
+      <p:sp>
+        <p:nvSpPr>
+          <p:cNvPr id="4" name="Текст 3"/>
+          <p:cNvSpPr>
+            <a:spLocks noGrp="1"/>
+          </p:cNvSpPr>
+          <p:nvPr>
+            <p:ph type="body" sz="half" idx="3"/>
+          </p:nvPr>
+        </p:nvSpPr>
+        <p:spPr>
+          <a:xfrm>
+            <a:off x="1820008" y="3427124"/>
+            <a:ext cx="774699" cy="3017520"/>
+          </a:xfrm>
+          <a:solidFill>
+            <a:schemeClr val="bg1"/>
+          </a:solidFill>
+          <a:ln w="12700">
+            <a:noFill/>
+          </a:ln>
+        </p:spPr>
+        <p:txBody>
+          <a:bodyPr vert="vert270" anchor="ctr"/>
+          <a:lstStyle>
+            <a:lvl1pPr marL="0" indent="0" algn="ctr">
               <a:buNone/>
-              <a:defRPr sz="1600" b="1"/>
-            </a:lvl6pPr>
-            <a:lvl7pPr marL="2743200" indent="0">
-              <a:buNone/>
-              <a:defRPr sz="1600" b="1"/>
-            </a:lvl7pPr>
-            <a:lvl8pPr marL="3200400" indent="0">
-              <a:buNone/>
-              <a:defRPr sz="1600" b="1"/>
-            </a:lvl8pPr>
-            <a:lvl9pPr marL="3657600" indent="0">
-              <a:buNone/>
-              <a:defRPr sz="1600" b="1"/>
-            </a:lvl9pPr>
-          </a:lstStyle>
-          <a:p>
-            <a:pPr lvl="0"/>
-            <a:r>
-              <a:rPr lang="ru-RU"/>
-              <a:t>Образец текста</a:t>
-            </a:r>
-          </a:p>
-        </p:txBody>
-      </p:sp>
-      <p:sp>
-        <p:nvSpPr>
-          <p:cNvPr id="4" name="Объект 3">
-            <a:extLst>
-              <a:ext uri="{FF2B5EF4-FFF2-40B4-BE49-F238E27FC236}">
-                <a16:creationId xmlns:a16="http://schemas.microsoft.com/office/drawing/2014/main" id="{46E8BBE0-D223-48EE-A975-93576CF04166}"/>
-              </a:ext>
-            </a:extLst>
-          </p:cNvPr>
-          <p:cNvSpPr>
-            <a:spLocks noGrp="1"/>
-          </p:cNvSpPr>
-          <p:nvPr>
-            <p:ph sz="half" idx="2"/>
-          </p:nvPr>
-        </p:nvSpPr>
-        <p:spPr>
-          <a:xfrm>
-            <a:off x="839788" y="2505075"/>
-            <a:ext cx="5157787" cy="3684588"/>
-          </a:xfrm>
-        </p:spPr>
-        <p:txBody>
-          <a:bodyPr/>
-          <a:lstStyle/>
-          <a:p>
-            <a:pPr lvl="0"/>
-            <a:r>
-              <a:rPr lang="ru-RU"/>
-              <a:t>Образец текста</a:t>
-            </a:r>
-          </a:p>
-          <a:p>
-            <a:pPr lvl="1"/>
-            <a:r>
-              <a:rPr lang="ru-RU"/>
-              <a:t>Второй уровень</a:t>
-            </a:r>
-          </a:p>
-          <a:p>
-            <a:pPr lvl="2"/>
-            <a:r>
-              <a:rPr lang="ru-RU"/>
-              <a:t>Третий уровень</a:t>
-            </a:r>
-          </a:p>
-          <a:p>
-            <a:pPr lvl="3"/>
-            <a:r>
-              <a:rPr lang="ru-RU"/>
-              <a:t>Четвертый уровень</a:t>
-            </a:r>
-          </a:p>
-          <a:p>
-            <a:pPr lvl="4"/>
-            <a:r>
-              <a:rPr lang="ru-RU"/>
-              <a:t>Пятый уровень</a:t>
-            </a:r>
-          </a:p>
-        </p:txBody>
-      </p:sp>
-      <p:sp>
-        <p:nvSpPr>
-          <p:cNvPr id="5" name="Текст 4">
-            <a:extLst>
-              <a:ext uri="{FF2B5EF4-FFF2-40B4-BE49-F238E27FC236}">
-                <a16:creationId xmlns:a16="http://schemas.microsoft.com/office/drawing/2014/main" id="{339AEB45-028C-42D0-80E9-C1A8BFF3E7F1}"/>
-              </a:ext>
-            </a:extLst>
-          </p:cNvPr>
-          <p:cNvSpPr>
-            <a:spLocks noGrp="1"/>
-          </p:cNvSpPr>
-          <p:nvPr>
-            <p:ph type="body" sz="quarter" idx="3"/>
-          </p:nvPr>
-        </p:nvSpPr>
-        <p:spPr>
-          <a:xfrm>
-            <a:off x="6172200" y="1681163"/>
-            <a:ext cx="5183188" cy="823912"/>
-          </a:xfrm>
-        </p:spPr>
-        <p:txBody>
-          <a:bodyPr anchor="b"/>
-          <a:lstStyle>
-            <a:lvl1pPr marL="0" indent="0">
-              <a:buNone/>
-              <a:defRPr sz="2400" b="1"/>
+              <a:defRPr sz="1600" b="0">
+                <a:solidFill>
+                  <a:schemeClr val="tx1"/>
+                </a:solidFill>
+              </a:defRPr>
             </a:lvl1pPr>
-            <a:lvl2pPr marL="457200" indent="0">
+            <a:lvl2pPr>
               <a:buNone/>
               <a:defRPr sz="2000" b="1"/>
             </a:lvl2pPr>
-            <a:lvl3pPr marL="914400" indent="0">
+            <a:lvl3pPr>
               <a:buNone/>
               <a:defRPr sz="1800" b="1"/>
             </a:lvl3pPr>
-            <a:lvl4pPr marL="1371600" indent="0">
+            <a:lvl4pPr>
               <a:buNone/>
               <a:defRPr sz="1600" b="1"/>
             </a:lvl4pPr>
-            <a:lvl5pPr marL="1828800" indent="0">
+            <a:lvl5pPr>
               <a:buNone/>
               <a:defRPr sz="1600" b="1"/>
             </a:lvl5pPr>
-            <a:lvl6pPr marL="2286000" indent="0">
-              <a:buNone/>
-              <a:defRPr sz="1600" b="1"/>
-            </a:lvl6pPr>
-            <a:lvl7pPr marL="2743200" indent="0">
-              <a:buNone/>
-              <a:defRPr sz="1600" b="1"/>
-            </a:lvl7pPr>
-            <a:lvl8pPr marL="3200400" indent="0">
-              <a:buNone/>
-              <a:defRPr sz="1600" b="1"/>
-            </a:lvl8pPr>
-            <a:lvl9pPr marL="3657600" indent="0">
-              <a:buNone/>
-              <a:defRPr sz="1600" b="1"/>
-            </a:lvl9pPr>
           </a:lstStyle>
           <a:p>
-            <a:pPr lvl="0"/>
-            <a:r>
-              <a:rPr lang="ru-RU"/>
+            <a:pPr lvl="0" eaLnBrk="1" latinLnBrk="0" hangingPunct="1"/>
+            <a:r>
+              <a:rPr kumimoji="0" lang="ru-RU" smtClean="0"/>
               <a:t>Образец текста</a:t>
             </a:r>
           </a:p>
@@ -1740,13 +1862,80 @@
       </p:sp>
       <p:sp>
         <p:nvSpPr>
-          <p:cNvPr id="6" name="Объект 5">
-            <a:extLst>
-              <a:ext uri="{FF2B5EF4-FFF2-40B4-BE49-F238E27FC236}">
-                <a16:creationId xmlns:a16="http://schemas.microsoft.com/office/drawing/2014/main" id="{862B2AC4-D10F-4ECC-802E-758C13AA854E}"/>
-              </a:ext>
-            </a:extLst>
-          </p:cNvPr>
+          <p:cNvPr id="5" name="Содержимое 4"/>
+          <p:cNvSpPr>
+            <a:spLocks noGrp="1"/>
+          </p:cNvSpPr>
+          <p:nvPr>
+            <p:ph sz="quarter" idx="2"/>
+          </p:nvPr>
+        </p:nvSpPr>
+        <p:spPr>
+          <a:xfrm>
+            <a:off x="2696307" y="290732"/>
+            <a:ext cx="9144000" cy="3017520"/>
+          </a:xfrm>
+        </p:spPr>
+        <p:txBody>
+          <a:bodyPr/>
+          <a:lstStyle>
+            <a:lvl1pPr algn="l">
+              <a:defRPr sz="2400"/>
+            </a:lvl1pPr>
+            <a:lvl2pPr algn="l">
+              <a:defRPr sz="2000"/>
+            </a:lvl2pPr>
+            <a:lvl3pPr algn="l">
+              <a:defRPr sz="1800"/>
+            </a:lvl3pPr>
+            <a:lvl4pPr algn="l">
+              <a:defRPr sz="1600"/>
+            </a:lvl4pPr>
+            <a:lvl5pPr algn="l">
+              <a:defRPr sz="1600"/>
+            </a:lvl5pPr>
+          </a:lstStyle>
+          <a:p>
+            <a:pPr lvl="0" eaLnBrk="1" latinLnBrk="0" hangingPunct="1"/>
+            <a:r>
+              <a:rPr lang="ru-RU" smtClean="0"/>
+              <a:t>Образец текста</a:t>
+            </a:r>
+          </a:p>
+          <a:p>
+            <a:pPr lvl="1" eaLnBrk="1" latinLnBrk="0" hangingPunct="1"/>
+            <a:r>
+              <a:rPr lang="ru-RU" smtClean="0"/>
+              <a:t>Второй уровень</a:t>
+            </a:r>
+          </a:p>
+          <a:p>
+            <a:pPr lvl="2" eaLnBrk="1" latinLnBrk="0" hangingPunct="1"/>
+            <a:r>
+              <a:rPr lang="ru-RU" smtClean="0"/>
+              <a:t>Третий уровень</a:t>
+            </a:r>
+          </a:p>
+          <a:p>
+            <a:pPr lvl="3" eaLnBrk="1" latinLnBrk="0" hangingPunct="1"/>
+            <a:r>
+              <a:rPr lang="ru-RU" smtClean="0"/>
+              <a:t>Четвертый уровень</a:t>
+            </a:r>
+          </a:p>
+          <a:p>
+            <a:pPr lvl="4" eaLnBrk="1" latinLnBrk="0" hangingPunct="1"/>
+            <a:r>
+              <a:rPr lang="ru-RU" smtClean="0"/>
+              <a:t>Пятый уровень</a:t>
+            </a:r>
+            <a:endParaRPr kumimoji="0" lang="en-US"/>
+          </a:p>
+        </p:txBody>
+      </p:sp>
+      <p:sp>
+        <p:nvSpPr>
+          <p:cNvPr id="6" name="Содержимое 5"/>
           <p:cNvSpPr>
             <a:spLocks noGrp="1"/>
           </p:cNvSpPr>
@@ -1756,73 +1945,90 @@
         </p:nvSpPr>
         <p:spPr>
           <a:xfrm>
-            <a:off x="6172200" y="2505075"/>
-            <a:ext cx="5183188" cy="3684588"/>
+            <a:off x="2696307" y="3427124"/>
+            <a:ext cx="9144000" cy="3017520"/>
+          </a:xfrm>
+        </p:spPr>
+        <p:txBody>
+          <a:bodyPr/>
+          <a:lstStyle>
+            <a:lvl1pPr>
+              <a:defRPr sz="2400"/>
+            </a:lvl1pPr>
+            <a:lvl2pPr>
+              <a:defRPr sz="2000"/>
+            </a:lvl2pPr>
+            <a:lvl3pPr>
+              <a:defRPr sz="1800"/>
+            </a:lvl3pPr>
+            <a:lvl4pPr>
+              <a:defRPr sz="1600"/>
+            </a:lvl4pPr>
+            <a:lvl5pPr>
+              <a:defRPr sz="1600"/>
+            </a:lvl5pPr>
+          </a:lstStyle>
+          <a:p>
+            <a:pPr lvl="0" eaLnBrk="1" latinLnBrk="0" hangingPunct="1"/>
+            <a:r>
+              <a:rPr lang="ru-RU" smtClean="0"/>
+              <a:t>Образец текста</a:t>
+            </a:r>
+          </a:p>
+          <a:p>
+            <a:pPr lvl="1" eaLnBrk="1" latinLnBrk="0" hangingPunct="1"/>
+            <a:r>
+              <a:rPr lang="ru-RU" smtClean="0"/>
+              <a:t>Второй уровень</a:t>
+            </a:r>
+          </a:p>
+          <a:p>
+            <a:pPr lvl="2" eaLnBrk="1" latinLnBrk="0" hangingPunct="1"/>
+            <a:r>
+              <a:rPr lang="ru-RU" smtClean="0"/>
+              <a:t>Третий уровень</a:t>
+            </a:r>
+          </a:p>
+          <a:p>
+            <a:pPr lvl="3" eaLnBrk="1" latinLnBrk="0" hangingPunct="1"/>
+            <a:r>
+              <a:rPr lang="ru-RU" smtClean="0"/>
+              <a:t>Четвертый уровень</a:t>
+            </a:r>
+          </a:p>
+          <a:p>
+            <a:pPr lvl="4" eaLnBrk="1" latinLnBrk="0" hangingPunct="1"/>
+            <a:r>
+              <a:rPr lang="ru-RU" smtClean="0"/>
+              <a:t>Пятый уровень</a:t>
+            </a:r>
+            <a:endParaRPr kumimoji="0" lang="en-US"/>
+          </a:p>
+        </p:txBody>
+      </p:sp>
+      <p:sp>
+        <p:nvSpPr>
+          <p:cNvPr id="7" name="Дата 6"/>
+          <p:cNvSpPr>
+            <a:spLocks noGrp="1"/>
+          </p:cNvSpPr>
+          <p:nvPr>
+            <p:ph type="dt" sz="half" idx="10"/>
+          </p:nvPr>
+        </p:nvSpPr>
+        <p:spPr>
+          <a:xfrm>
+            <a:off x="6388608" y="6480969"/>
+            <a:ext cx="2840736" cy="301752"/>
           </a:xfrm>
         </p:spPr>
         <p:txBody>
           <a:bodyPr/>
           <a:lstStyle/>
           <a:p>
-            <a:pPr lvl="0"/>
-            <a:r>
-              <a:rPr lang="ru-RU"/>
-              <a:t>Образец текста</a:t>
-            </a:r>
-          </a:p>
-          <a:p>
-            <a:pPr lvl="1"/>
-            <a:r>
-              <a:rPr lang="ru-RU"/>
-              <a:t>Второй уровень</a:t>
-            </a:r>
-          </a:p>
-          <a:p>
-            <a:pPr lvl="2"/>
-            <a:r>
-              <a:rPr lang="ru-RU"/>
-              <a:t>Третий уровень</a:t>
-            </a:r>
-          </a:p>
-          <a:p>
-            <a:pPr lvl="3"/>
-            <a:r>
-              <a:rPr lang="ru-RU"/>
-              <a:t>Четвертый уровень</a:t>
-            </a:r>
-          </a:p>
-          <a:p>
-            <a:pPr lvl="4"/>
-            <a:r>
-              <a:rPr lang="ru-RU"/>
-              <a:t>Пятый уровень</a:t>
-            </a:r>
-          </a:p>
-        </p:txBody>
-      </p:sp>
-      <p:sp>
-        <p:nvSpPr>
-          <p:cNvPr id="7" name="Дата 6">
-            <a:extLst>
-              <a:ext uri="{FF2B5EF4-FFF2-40B4-BE49-F238E27FC236}">
-                <a16:creationId xmlns:a16="http://schemas.microsoft.com/office/drawing/2014/main" id="{4B571A93-A49D-48B2-A281-D64D8C8DA921}"/>
-              </a:ext>
-            </a:extLst>
-          </p:cNvPr>
-          <p:cNvSpPr>
-            <a:spLocks noGrp="1"/>
-          </p:cNvSpPr>
-          <p:nvPr>
-            <p:ph type="dt" sz="half" idx="10"/>
-          </p:nvPr>
-        </p:nvSpPr>
-        <p:spPr/>
-        <p:txBody>
-          <a:bodyPr/>
-          <a:lstStyle/>
-          <a:p>
             <a:fld id="{FED9941D-7481-4412-9593-AE3B98A14048}" type="datetimeFigureOut">
               <a:rPr lang="ru-RU" smtClean="0"/>
+              <a:pPr/>
               <a:t>28.04.2026</a:t>
             </a:fld>
             <a:endParaRPr lang="ru-RU"/>
@@ -1831,13 +2037,7 @@
       </p:sp>
       <p:sp>
         <p:nvSpPr>
-          <p:cNvPr id="8" name="Нижний колонтитул 7">
-            <a:extLst>
-              <a:ext uri="{FF2B5EF4-FFF2-40B4-BE49-F238E27FC236}">
-                <a16:creationId xmlns:a16="http://schemas.microsoft.com/office/drawing/2014/main" id="{22CD27D8-DAB6-4ACF-ADEA-1F6F185E5EBB}"/>
-              </a:ext>
-            </a:extLst>
-          </p:cNvPr>
+          <p:cNvPr id="8" name="Нижний колонтитул 7"/>
           <p:cNvSpPr>
             <a:spLocks noGrp="1"/>
           </p:cNvSpPr>
@@ -1845,7 +2045,12 @@
             <p:ph type="ftr" sz="quarter" idx="11"/>
           </p:nvPr>
         </p:nvSpPr>
-        <p:spPr/>
+        <p:spPr>
+          <a:xfrm>
+            <a:off x="609600" y="6480969"/>
+            <a:ext cx="5681472" cy="301752"/>
+          </a:xfrm>
+        </p:spPr>
         <p:txBody>
           <a:bodyPr/>
           <a:lstStyle/>
@@ -1856,13 +2061,7 @@
       </p:sp>
       <p:sp>
         <p:nvSpPr>
-          <p:cNvPr id="9" name="Номер слайда 8">
-            <a:extLst>
-              <a:ext uri="{FF2B5EF4-FFF2-40B4-BE49-F238E27FC236}">
-                <a16:creationId xmlns:a16="http://schemas.microsoft.com/office/drawing/2014/main" id="{0B168040-FB0C-4DDC-815F-F6B98951BCD0}"/>
-              </a:ext>
-            </a:extLst>
-          </p:cNvPr>
+          <p:cNvPr id="9" name="Номер слайда 8"/>
           <p:cNvSpPr>
             <a:spLocks noGrp="1"/>
           </p:cNvSpPr>
@@ -1870,13 +2069,23 @@
             <p:ph type="sldNum" sz="quarter" idx="12"/>
           </p:nvPr>
         </p:nvSpPr>
-        <p:spPr/>
-        <p:txBody>
-          <a:bodyPr/>
-          <a:lstStyle/>
+        <p:spPr>
+          <a:xfrm>
+            <a:off x="10119360" y="6483096"/>
+            <a:ext cx="670560" cy="301752"/>
+          </a:xfrm>
+        </p:spPr>
+        <p:txBody>
+          <a:bodyPr/>
+          <a:lstStyle>
+            <a:lvl1pPr algn="ctr">
+              <a:defRPr/>
+            </a:lvl1pPr>
+          </a:lstStyle>
           <a:p>
             <a:fld id="{44E593DF-646F-45EB-B2B7-C2091C7E091D}" type="slidenum">
               <a:rPr lang="ru-RU" smtClean="0"/>
+              <a:pPr/>
               <a:t>‹#›</a:t>
             </a:fld>
             <a:endParaRPr lang="ru-RU"/>
@@ -1884,14 +2093,9 @@
         </p:txBody>
       </p:sp>
     </p:spTree>
-    <p:extLst>
-      <p:ext uri="{BB962C8B-B14F-4D97-AF65-F5344CB8AC3E}">
-        <p14:creationId xmlns:p14="http://schemas.microsoft.com/office/powerpoint/2010/main" val="3047760990"/>
-      </p:ext>
-    </p:extLst>
   </p:cSld>
   <p:clrMapOvr>
-    <a:masterClrMapping/>
+    <a:overrideClrMapping bg1="dk1" tx1="lt1" bg2="dk2" tx2="lt2" accent1="accent1" accent2="accent2" accent3="accent3" accent4="accent4" accent5="accent5" accent6="accent6" hlink="hlink" folHlink="folHlink"/>
   </p:clrMapOvr>
 </p:sldLayout>
 </file>
@@ -1915,13 +2119,7 @@
       </p:grpSpPr>
       <p:sp>
         <p:nvSpPr>
-          <p:cNvPr id="2" name="Заголовок 1">
-            <a:extLst>
-              <a:ext uri="{FF2B5EF4-FFF2-40B4-BE49-F238E27FC236}">
-                <a16:creationId xmlns:a16="http://schemas.microsoft.com/office/drawing/2014/main" id="{504BCA83-3662-402C-9519-C7CE2C1033B4}"/>
-              </a:ext>
-            </a:extLst>
-          </p:cNvPr>
+          <p:cNvPr id="2" name="Заголовок 1"/>
           <p:cNvSpPr>
             <a:spLocks noGrp="1"/>
           </p:cNvSpPr>
@@ -1932,38 +2130,38 @@
         <p:spPr/>
         <p:txBody>
           <a:bodyPr/>
+          <a:lstStyle>
+            <a:lvl1pPr>
+              <a:defRPr b="0"/>
+            </a:lvl1pPr>
+          </a:lstStyle>
+          <a:p>
+            <a:r>
+              <a:rPr kumimoji="0" lang="ru-RU" smtClean="0"/>
+              <a:t>Образец заголовка</a:t>
+            </a:r>
+            <a:endParaRPr kumimoji="0" lang="en-US"/>
+          </a:p>
+        </p:txBody>
+      </p:sp>
+      <p:sp>
+        <p:nvSpPr>
+          <p:cNvPr id="3" name="Дата 2"/>
+          <p:cNvSpPr>
+            <a:spLocks noGrp="1"/>
+          </p:cNvSpPr>
+          <p:nvPr>
+            <p:ph type="dt" sz="half" idx="10"/>
+          </p:nvPr>
+        </p:nvSpPr>
+        <p:spPr/>
+        <p:txBody>
+          <a:bodyPr/>
           <a:lstStyle/>
           <a:p>
-            <a:r>
-              <a:rPr lang="ru-RU"/>
-              <a:t>Образец заголовка</a:t>
-            </a:r>
-          </a:p>
-        </p:txBody>
-      </p:sp>
-      <p:sp>
-        <p:nvSpPr>
-          <p:cNvPr id="3" name="Дата 2">
-            <a:extLst>
-              <a:ext uri="{FF2B5EF4-FFF2-40B4-BE49-F238E27FC236}">
-                <a16:creationId xmlns:a16="http://schemas.microsoft.com/office/drawing/2014/main" id="{35C52DF1-2CA9-4501-B37B-48F3D294D6FB}"/>
-              </a:ext>
-            </a:extLst>
-          </p:cNvPr>
-          <p:cNvSpPr>
-            <a:spLocks noGrp="1"/>
-          </p:cNvSpPr>
-          <p:nvPr>
-            <p:ph type="dt" sz="half" idx="10"/>
-          </p:nvPr>
-        </p:nvSpPr>
-        <p:spPr/>
-        <p:txBody>
-          <a:bodyPr/>
-          <a:lstStyle/>
-          <a:p>
             <a:fld id="{FED9941D-7481-4412-9593-AE3B98A14048}" type="datetimeFigureOut">
               <a:rPr lang="ru-RU" smtClean="0"/>
+              <a:pPr/>
               <a:t>28.04.2026</a:t>
             </a:fld>
             <a:endParaRPr lang="ru-RU"/>
@@ -1972,13 +2170,7 @@
       </p:sp>
       <p:sp>
         <p:nvSpPr>
-          <p:cNvPr id="4" name="Нижний колонтитул 3">
-            <a:extLst>
-              <a:ext uri="{FF2B5EF4-FFF2-40B4-BE49-F238E27FC236}">
-                <a16:creationId xmlns:a16="http://schemas.microsoft.com/office/drawing/2014/main" id="{97974292-7A08-4D02-AAA5-DAAAC2D79684}"/>
-              </a:ext>
-            </a:extLst>
-          </p:cNvPr>
+          <p:cNvPr id="4" name="Нижний колонтитул 3"/>
           <p:cNvSpPr>
             <a:spLocks noGrp="1"/>
           </p:cNvSpPr>
@@ -1997,13 +2189,7 @@
       </p:sp>
       <p:sp>
         <p:nvSpPr>
-          <p:cNvPr id="5" name="Номер слайда 4">
-            <a:extLst>
-              <a:ext uri="{FF2B5EF4-FFF2-40B4-BE49-F238E27FC236}">
-                <a16:creationId xmlns:a16="http://schemas.microsoft.com/office/drawing/2014/main" id="{A53965FE-1CE3-48DF-953B-7419AA1D76B1}"/>
-              </a:ext>
-            </a:extLst>
-          </p:cNvPr>
+          <p:cNvPr id="5" name="Номер слайда 4"/>
           <p:cNvSpPr>
             <a:spLocks noGrp="1"/>
           </p:cNvSpPr>
@@ -2018,6 +2204,7 @@
           <a:p>
             <a:fld id="{44E593DF-646F-45EB-B2B7-C2091C7E091D}" type="slidenum">
               <a:rPr lang="ru-RU" smtClean="0"/>
+              <a:pPr/>
               <a:t>‹#›</a:t>
             </a:fld>
             <a:endParaRPr lang="ru-RU"/>
@@ -2025,11 +2212,6 @@
         </p:txBody>
       </p:sp>
     </p:spTree>
-    <p:extLst>
-      <p:ext uri="{BB962C8B-B14F-4D97-AF65-F5344CB8AC3E}">
-        <p14:creationId xmlns:p14="http://schemas.microsoft.com/office/powerpoint/2010/main" val="517970350"/>
-      </p:ext>
-    </p:extLst>
   </p:cSld>
   <p:clrMapOvr>
     <a:masterClrMapping/>
@@ -2056,13 +2238,7 @@
       </p:grpSpPr>
       <p:sp>
         <p:nvSpPr>
-          <p:cNvPr id="2" name="Дата 1">
-            <a:extLst>
-              <a:ext uri="{FF2B5EF4-FFF2-40B4-BE49-F238E27FC236}">
-                <a16:creationId xmlns:a16="http://schemas.microsoft.com/office/drawing/2014/main" id="{30C23648-6B0B-44B3-BB1A-7DEBBD20CF35}"/>
-              </a:ext>
-            </a:extLst>
-          </p:cNvPr>
+          <p:cNvPr id="2" name="Дата 1"/>
           <p:cNvSpPr>
             <a:spLocks noGrp="1"/>
           </p:cNvSpPr>
@@ -2070,13 +2246,19 @@
             <p:ph type="dt" sz="half" idx="10"/>
           </p:nvPr>
         </p:nvSpPr>
-        <p:spPr/>
+        <p:spPr>
+          <a:xfrm>
+            <a:off x="6388608" y="6480969"/>
+            <a:ext cx="2844800" cy="301752"/>
+          </a:xfrm>
+        </p:spPr>
         <p:txBody>
           <a:bodyPr/>
           <a:lstStyle/>
           <a:p>
             <a:fld id="{FED9941D-7481-4412-9593-AE3B98A14048}" type="datetimeFigureOut">
               <a:rPr lang="ru-RU" smtClean="0"/>
+              <a:pPr/>
               <a:t>28.04.2026</a:t>
             </a:fld>
             <a:endParaRPr lang="ru-RU"/>
@@ -2085,13 +2267,7 @@
       </p:sp>
       <p:sp>
         <p:nvSpPr>
-          <p:cNvPr id="3" name="Нижний колонтитул 2">
-            <a:extLst>
-              <a:ext uri="{FF2B5EF4-FFF2-40B4-BE49-F238E27FC236}">
-                <a16:creationId xmlns:a16="http://schemas.microsoft.com/office/drawing/2014/main" id="{FE28905A-BC19-4C31-8ED9-ACEE5ABB8020}"/>
-              </a:ext>
-            </a:extLst>
-          </p:cNvPr>
+          <p:cNvPr id="3" name="Нижний колонтитул 2"/>
           <p:cNvSpPr>
             <a:spLocks noGrp="1"/>
           </p:cNvSpPr>
@@ -2099,7 +2275,12 @@
             <p:ph type="ftr" sz="quarter" idx="11"/>
           </p:nvPr>
         </p:nvSpPr>
-        <p:spPr/>
+        <p:spPr>
+          <a:xfrm>
+            <a:off x="609600" y="6481891"/>
+            <a:ext cx="5680075" cy="300831"/>
+          </a:xfrm>
+        </p:spPr>
         <p:txBody>
           <a:bodyPr/>
           <a:lstStyle/>
@@ -2110,13 +2291,7 @@
       </p:sp>
       <p:sp>
         <p:nvSpPr>
-          <p:cNvPr id="4" name="Номер слайда 3">
-            <a:extLst>
-              <a:ext uri="{FF2B5EF4-FFF2-40B4-BE49-F238E27FC236}">
-                <a16:creationId xmlns:a16="http://schemas.microsoft.com/office/drawing/2014/main" id="{91761616-F566-410A-AC3F-6AE048F9D1D5}"/>
-              </a:ext>
-            </a:extLst>
-          </p:cNvPr>
+          <p:cNvPr id="4" name="Номер слайда 3"/>
           <p:cNvSpPr>
             <a:spLocks noGrp="1"/>
           </p:cNvSpPr>
@@ -2124,13 +2299,19 @@
             <p:ph type="sldNum" sz="quarter" idx="12"/>
           </p:nvPr>
         </p:nvSpPr>
-        <p:spPr/>
+        <p:spPr>
+          <a:xfrm>
+            <a:off x="10119360" y="6480969"/>
+            <a:ext cx="670560" cy="301752"/>
+          </a:xfrm>
+        </p:spPr>
         <p:txBody>
           <a:bodyPr/>
           <a:lstStyle/>
           <a:p>
             <a:fld id="{44E593DF-646F-45EB-B2B7-C2091C7E091D}" type="slidenum">
               <a:rPr lang="ru-RU" smtClean="0"/>
+              <a:pPr/>
               <a:t>‹#›</a:t>
             </a:fld>
             <a:endParaRPr lang="ru-RU"/>
@@ -2138,11 +2319,6 @@
         </p:txBody>
       </p:sp>
     </p:spTree>
-    <p:extLst>
-      <p:ext uri="{BB962C8B-B14F-4D97-AF65-F5344CB8AC3E}">
-        <p14:creationId xmlns:p14="http://schemas.microsoft.com/office/powerpoint/2010/main" val="1711967718"/>
-      </p:ext>
-    </p:extLst>
   </p:cSld>
   <p:clrMapOvr>
     <a:masterClrMapping/>
@@ -2151,8 +2327,13 @@
 </file>
 
 <file path=ppt/slideLayouts/slideLayout8.xml><?xml version="1.0" encoding="utf-8"?>
-<p:sldLayout xmlns:a="http://schemas.openxmlformats.org/drawingml/2006/main" xmlns:r="http://schemas.openxmlformats.org/officeDocument/2006/relationships" xmlns:p="http://schemas.openxmlformats.org/presentationml/2006/main" type="objTx" preserve="1">
+<p:sldLayout xmlns:a="http://schemas.openxmlformats.org/drawingml/2006/main" xmlns:r="http://schemas.openxmlformats.org/officeDocument/2006/relationships" xmlns:p="http://schemas.openxmlformats.org/presentationml/2006/main" showMasterSp="0" type="objTx" preserve="1">
   <p:cSld name="Объект с подписью">
+    <p:bg>
+      <p:bgRef idx="1002">
+        <a:schemeClr val="bg2"/>
+      </p:bgRef>
+    </p:bg>
     <p:spTree>
       <p:nvGrpSpPr>
         <p:cNvPr id="1" name=""/>
@@ -2169,13 +2350,7 @@
       </p:grpSpPr>
       <p:sp>
         <p:nvSpPr>
-          <p:cNvPr id="2" name="Заголовок 1">
-            <a:extLst>
-              <a:ext uri="{FF2B5EF4-FFF2-40B4-BE49-F238E27FC236}">
-                <a16:creationId xmlns:a16="http://schemas.microsoft.com/office/drawing/2014/main" id="{D9BBDB92-026E-4D68-A2E0-F8E7BCB33CF4}"/>
-              </a:ext>
-            </a:extLst>
-          </p:cNvPr>
+          <p:cNvPr id="2" name="Заголовок 1"/>
           <p:cNvSpPr>
             <a:spLocks noGrp="1"/>
           </p:cNvSpPr>
@@ -2185,55 +2360,109 @@
         </p:nvSpPr>
         <p:spPr>
           <a:xfrm>
-            <a:off x="839788" y="457200"/>
-            <a:ext cx="3932237" cy="1600200"/>
-          </a:xfrm>
-        </p:spPr>
-        <p:txBody>
-          <a:bodyPr anchor="b"/>
+            <a:off x="292608" y="367664"/>
+            <a:ext cx="1219200" cy="5943600"/>
+          </a:xfrm>
+        </p:spPr>
+        <p:txBody>
+          <a:bodyPr vert="vert270" anchor="b"/>
+          <a:lstStyle>
+            <a:lvl1pPr marL="0" marR="18288" algn="r">
+              <a:spcBef>
+                <a:spcPts val="0"/>
+              </a:spcBef>
+              <a:buNone/>
+              <a:defRPr sz="2900" b="0" cap="all" baseline="0"/>
+            </a:lvl1pPr>
+          </a:lstStyle>
+          <a:p>
+            <a:r>
+              <a:rPr kumimoji="0" lang="ru-RU" smtClean="0"/>
+              <a:t>Образец заголовка</a:t>
+            </a:r>
+            <a:endParaRPr kumimoji="0" lang="en-US"/>
+          </a:p>
+        </p:txBody>
+      </p:sp>
+      <p:sp>
+        <p:nvSpPr>
+          <p:cNvPr id="3" name="Текст 2"/>
+          <p:cNvSpPr>
+            <a:spLocks noGrp="1"/>
+          </p:cNvSpPr>
+          <p:nvPr>
+            <p:ph type="body" idx="2"/>
+          </p:nvPr>
+        </p:nvSpPr>
+        <p:spPr>
+          <a:xfrm>
+            <a:off x="1514475" y="367664"/>
+            <a:ext cx="3251200" cy="5943600"/>
+          </a:xfrm>
+        </p:spPr>
+        <p:txBody>
+          <a:bodyPr anchor="t"/>
+          <a:lstStyle>
+            <a:lvl1pPr marL="0" indent="0">
+              <a:spcBef>
+                <a:spcPts val="0"/>
+              </a:spcBef>
+              <a:buNone/>
+              <a:defRPr sz="1400"/>
+            </a:lvl1pPr>
+            <a:lvl2pPr>
+              <a:buNone/>
+              <a:defRPr sz="1200"/>
+            </a:lvl2pPr>
+            <a:lvl3pPr>
+              <a:buNone/>
+              <a:defRPr sz="1000"/>
+            </a:lvl3pPr>
+            <a:lvl4pPr>
+              <a:buNone/>
+              <a:defRPr sz="900"/>
+            </a:lvl4pPr>
+            <a:lvl5pPr>
+              <a:buNone/>
+              <a:defRPr sz="900"/>
+            </a:lvl5pPr>
+          </a:lstStyle>
+          <a:p>
+            <a:pPr lvl="0" eaLnBrk="1" latinLnBrk="0" hangingPunct="1"/>
+            <a:r>
+              <a:rPr kumimoji="0" lang="ru-RU" smtClean="0"/>
+              <a:t>Образец текста</a:t>
+            </a:r>
+          </a:p>
+        </p:txBody>
+      </p:sp>
+      <p:sp>
+        <p:nvSpPr>
+          <p:cNvPr id="4" name="Содержимое 3"/>
+          <p:cNvSpPr>
+            <a:spLocks noGrp="1"/>
+          </p:cNvSpPr>
+          <p:nvPr>
+            <p:ph sz="half" idx="1"/>
+          </p:nvPr>
+        </p:nvSpPr>
+        <p:spPr>
+          <a:xfrm>
+            <a:off x="4868333" y="320040"/>
+            <a:ext cx="7034784" cy="5989320"/>
+          </a:xfrm>
+        </p:spPr>
+        <p:txBody>
+          <a:bodyPr/>
           <a:lstStyle>
             <a:lvl1pPr>
-              <a:defRPr sz="3200"/>
-            </a:lvl1pPr>
-          </a:lstStyle>
-          <a:p>
-            <a:r>
-              <a:rPr lang="ru-RU"/>
-              <a:t>Образец заголовка</a:t>
-            </a:r>
-          </a:p>
-        </p:txBody>
-      </p:sp>
-      <p:sp>
-        <p:nvSpPr>
-          <p:cNvPr id="3" name="Объект 2">
-            <a:extLst>
-              <a:ext uri="{FF2B5EF4-FFF2-40B4-BE49-F238E27FC236}">
-                <a16:creationId xmlns:a16="http://schemas.microsoft.com/office/drawing/2014/main" id="{B10C9045-85CF-4936-AC28-F2932AA5C613}"/>
-              </a:ext>
-            </a:extLst>
-          </p:cNvPr>
-          <p:cNvSpPr>
-            <a:spLocks noGrp="1"/>
-          </p:cNvSpPr>
-          <p:nvPr>
-            <p:ph idx="1"/>
-          </p:nvPr>
-        </p:nvSpPr>
-        <p:spPr>
-          <a:xfrm>
-            <a:off x="5183188" y="987425"/>
-            <a:ext cx="6172200" cy="4873625"/>
-          </a:xfrm>
-        </p:spPr>
-        <p:txBody>
-          <a:bodyPr/>
-          <a:lstStyle>
-            <a:lvl1pPr>
-              <a:defRPr sz="3200"/>
+              <a:spcBef>
+                <a:spcPts val="0"/>
+              </a:spcBef>
+              <a:defRPr sz="3000"/>
             </a:lvl1pPr>
             <a:lvl2pPr>
-              <a:defRPr sz="2800"/>
+              <a:defRPr sz="2600"/>
             </a:lvl2pPr>
             <a:lvl3pPr>
               <a:defRPr sz="2400"/>
@@ -2244,150 +2473,72 @@
             <a:lvl5pPr>
               <a:defRPr sz="2000"/>
             </a:lvl5pPr>
-            <a:lvl6pPr>
-              <a:defRPr sz="2000"/>
-            </a:lvl6pPr>
-            <a:lvl7pPr>
-              <a:defRPr sz="2000"/>
-            </a:lvl7pPr>
-            <a:lvl8pPr>
-              <a:defRPr sz="2000"/>
-            </a:lvl8pPr>
-            <a:lvl9pPr>
-              <a:defRPr sz="2000"/>
-            </a:lvl9pPr>
           </a:lstStyle>
           <a:p>
-            <a:pPr lvl="0"/>
-            <a:r>
-              <a:rPr lang="ru-RU"/>
+            <a:pPr lvl="0" eaLnBrk="1" latinLnBrk="0" hangingPunct="1"/>
+            <a:r>
+              <a:rPr lang="ru-RU" smtClean="0"/>
               <a:t>Образец текста</a:t>
             </a:r>
           </a:p>
           <a:p>
-            <a:pPr lvl="1"/>
-            <a:r>
-              <a:rPr lang="ru-RU"/>
+            <a:pPr lvl="1" eaLnBrk="1" latinLnBrk="0" hangingPunct="1"/>
+            <a:r>
+              <a:rPr lang="ru-RU" smtClean="0"/>
               <a:t>Второй уровень</a:t>
             </a:r>
           </a:p>
           <a:p>
-            <a:pPr lvl="2"/>
-            <a:r>
-              <a:rPr lang="ru-RU"/>
+            <a:pPr lvl="2" eaLnBrk="1" latinLnBrk="0" hangingPunct="1"/>
+            <a:r>
+              <a:rPr lang="ru-RU" smtClean="0"/>
               <a:t>Третий уровень</a:t>
             </a:r>
           </a:p>
           <a:p>
-            <a:pPr lvl="3"/>
-            <a:r>
-              <a:rPr lang="ru-RU"/>
+            <a:pPr lvl="3" eaLnBrk="1" latinLnBrk="0" hangingPunct="1"/>
+            <a:r>
+              <a:rPr lang="ru-RU" smtClean="0"/>
               <a:t>Четвертый уровень</a:t>
             </a:r>
           </a:p>
           <a:p>
-            <a:pPr lvl="4"/>
-            <a:r>
-              <a:rPr lang="ru-RU"/>
+            <a:pPr lvl="4" eaLnBrk="1" latinLnBrk="0" hangingPunct="1"/>
+            <a:r>
+              <a:rPr lang="ru-RU" smtClean="0"/>
               <a:t>Пятый уровень</a:t>
             </a:r>
-          </a:p>
-        </p:txBody>
-      </p:sp>
-      <p:sp>
-        <p:nvSpPr>
-          <p:cNvPr id="4" name="Текст 3">
-            <a:extLst>
-              <a:ext uri="{FF2B5EF4-FFF2-40B4-BE49-F238E27FC236}">
-                <a16:creationId xmlns:a16="http://schemas.microsoft.com/office/drawing/2014/main" id="{DFD61046-653D-48D4-B6DE-FB37EA918231}"/>
-              </a:ext>
-            </a:extLst>
-          </p:cNvPr>
-          <p:cNvSpPr>
-            <a:spLocks noGrp="1"/>
-          </p:cNvSpPr>
-          <p:nvPr>
-            <p:ph type="body" sz="half" idx="2"/>
-          </p:nvPr>
-        </p:nvSpPr>
-        <p:spPr>
-          <a:xfrm>
-            <a:off x="839788" y="2057400"/>
-            <a:ext cx="3932237" cy="3811588"/>
+            <a:endParaRPr kumimoji="0" lang="en-US"/>
+          </a:p>
+        </p:txBody>
+      </p:sp>
+      <p:sp>
+        <p:nvSpPr>
+          <p:cNvPr id="5" name="Дата 4"/>
+          <p:cNvSpPr>
+            <a:spLocks noGrp="1"/>
+          </p:cNvSpPr>
+          <p:nvPr>
+            <p:ph type="dt" sz="half" idx="10"/>
+          </p:nvPr>
+        </p:nvSpPr>
+        <p:spPr>
+          <a:xfrm>
+            <a:off x="8371968" y="6556248"/>
+            <a:ext cx="2844800" cy="301752"/>
           </a:xfrm>
         </p:spPr>
         <p:txBody>
           <a:bodyPr/>
           <a:lstStyle>
-            <a:lvl1pPr marL="0" indent="0">
-              <a:buNone/>
-              <a:defRPr sz="1600"/>
+            <a:lvl1pPr>
+              <a:defRPr sz="900"/>
             </a:lvl1pPr>
-            <a:lvl2pPr marL="457200" indent="0">
-              <a:buNone/>
-              <a:defRPr sz="1400"/>
-            </a:lvl2pPr>
-            <a:lvl3pPr marL="914400" indent="0">
-              <a:buNone/>
-              <a:defRPr sz="1200"/>
-            </a:lvl3pPr>
-            <a:lvl4pPr marL="1371600" indent="0">
-              <a:buNone/>
-              <a:defRPr sz="1000"/>
-            </a:lvl4pPr>
-            <a:lvl5pPr marL="1828800" indent="0">
-              <a:buNone/>
-              <a:defRPr sz="1000"/>
-            </a:lvl5pPr>
-            <a:lvl6pPr marL="2286000" indent="0">
-              <a:buNone/>
-              <a:defRPr sz="1000"/>
-            </a:lvl6pPr>
-            <a:lvl7pPr marL="2743200" indent="0">
-              <a:buNone/>
-              <a:defRPr sz="1000"/>
-            </a:lvl7pPr>
-            <a:lvl8pPr marL="3200400" indent="0">
-              <a:buNone/>
-              <a:defRPr sz="1000"/>
-            </a:lvl8pPr>
-            <a:lvl9pPr marL="3657600" indent="0">
-              <a:buNone/>
-              <a:defRPr sz="1000"/>
-            </a:lvl9pPr>
           </a:lstStyle>
           <a:p>
-            <a:pPr lvl="0"/>
-            <a:r>
-              <a:rPr lang="ru-RU"/>
-              <a:t>Образец текста</a:t>
-            </a:r>
-          </a:p>
-        </p:txBody>
-      </p:sp>
-      <p:sp>
-        <p:nvSpPr>
-          <p:cNvPr id="5" name="Дата 4">
-            <a:extLst>
-              <a:ext uri="{FF2B5EF4-FFF2-40B4-BE49-F238E27FC236}">
-                <a16:creationId xmlns:a16="http://schemas.microsoft.com/office/drawing/2014/main" id="{453CE0F5-F420-4F33-AA21-B39EF22821B3}"/>
-              </a:ext>
-            </a:extLst>
-          </p:cNvPr>
-          <p:cNvSpPr>
-            <a:spLocks noGrp="1"/>
-          </p:cNvSpPr>
-          <p:nvPr>
-            <p:ph type="dt" sz="half" idx="10"/>
-          </p:nvPr>
-        </p:nvSpPr>
-        <p:spPr/>
-        <p:txBody>
-          <a:bodyPr/>
-          <a:lstStyle/>
-          <a:p>
             <a:fld id="{FED9941D-7481-4412-9593-AE3B98A14048}" type="datetimeFigureOut">
               <a:rPr lang="ru-RU" smtClean="0"/>
+              <a:pPr/>
               <a:t>28.04.2026</a:t>
             </a:fld>
             <a:endParaRPr lang="ru-RU"/>
@@ -2396,13 +2547,7 @@
       </p:sp>
       <p:sp>
         <p:nvSpPr>
-          <p:cNvPr id="6" name="Нижний колонтитул 5">
-            <a:extLst>
-              <a:ext uri="{FF2B5EF4-FFF2-40B4-BE49-F238E27FC236}">
-                <a16:creationId xmlns:a16="http://schemas.microsoft.com/office/drawing/2014/main" id="{1D9FB502-4E6E-4929-97CC-0BEE3ACB20EA}"/>
-              </a:ext>
-            </a:extLst>
-          </p:cNvPr>
+          <p:cNvPr id="6" name="Нижний колонтитул 5"/>
           <p:cNvSpPr>
             <a:spLocks noGrp="1"/>
           </p:cNvSpPr>
@@ -2410,10 +2555,19 @@
             <p:ph type="ftr" sz="quarter" idx="11"/>
           </p:nvPr>
         </p:nvSpPr>
-        <p:spPr/>
-        <p:txBody>
-          <a:bodyPr/>
-          <a:lstStyle/>
+        <p:spPr>
+          <a:xfrm>
+            <a:off x="1514475" y="6556248"/>
+            <a:ext cx="6857493" cy="301752"/>
+          </a:xfrm>
+        </p:spPr>
+        <p:txBody>
+          <a:bodyPr/>
+          <a:lstStyle>
+            <a:lvl1pPr>
+              <a:defRPr sz="900"/>
+            </a:lvl1pPr>
+          </a:lstStyle>
           <a:p>
             <a:endParaRPr lang="ru-RU"/>
           </a:p>
@@ -2421,13 +2575,7 @@
       </p:sp>
       <p:sp>
         <p:nvSpPr>
-          <p:cNvPr id="7" name="Номер слайда 6">
-            <a:extLst>
-              <a:ext uri="{FF2B5EF4-FFF2-40B4-BE49-F238E27FC236}">
-                <a16:creationId xmlns:a16="http://schemas.microsoft.com/office/drawing/2014/main" id="{07B0817B-BBCB-4B6C-83E7-8A1652043714}"/>
-              </a:ext>
-            </a:extLst>
-          </p:cNvPr>
+          <p:cNvPr id="7" name="Номер слайда 6"/>
           <p:cNvSpPr>
             <a:spLocks noGrp="1"/>
           </p:cNvSpPr>
@@ -2435,13 +2583,23 @@
             <p:ph type="sldNum" sz="quarter" idx="12"/>
           </p:nvPr>
         </p:nvSpPr>
-        <p:spPr/>
-        <p:txBody>
-          <a:bodyPr/>
-          <a:lstStyle/>
+        <p:spPr>
+          <a:xfrm>
+            <a:off x="11214101" y="6556248"/>
+            <a:ext cx="670560" cy="301752"/>
+          </a:xfrm>
+        </p:spPr>
+        <p:txBody>
+          <a:bodyPr/>
+          <a:lstStyle>
+            <a:lvl1pPr>
+              <a:defRPr sz="900"/>
+            </a:lvl1pPr>
+          </a:lstStyle>
           <a:p>
             <a:fld id="{44E593DF-646F-45EB-B2B7-C2091C7E091D}" type="slidenum">
               <a:rPr lang="ru-RU" smtClean="0"/>
+              <a:pPr/>
               <a:t>‹#›</a:t>
             </a:fld>
             <a:endParaRPr lang="ru-RU"/>
@@ -2449,311 +2607,18 @@
         </p:txBody>
       </p:sp>
     </p:spTree>
-    <p:extLst>
-      <p:ext uri="{BB962C8B-B14F-4D97-AF65-F5344CB8AC3E}">
-        <p14:creationId xmlns:p14="http://schemas.microsoft.com/office/powerpoint/2010/main" val="1154790932"/>
-      </p:ext>
-    </p:extLst>
   </p:cSld>
   <p:clrMapOvr>
-    <a:masterClrMapping/>
+    <a:overrideClrMapping bg1="dk1" tx1="lt1" bg2="dk2" tx2="lt2" accent1="accent1" accent2="accent2" accent3="accent3" accent4="accent4" accent5="accent5" accent6="accent6" hlink="hlink" folHlink="folHlink"/>
   </p:clrMapOvr>
 </p:sldLayout>
 </file>
 
 <file path=ppt/slideLayouts/slideLayout9.xml><?xml version="1.0" encoding="utf-8"?>
-<p:sldLayout xmlns:a="http://schemas.openxmlformats.org/drawingml/2006/main" xmlns:r="http://schemas.openxmlformats.org/officeDocument/2006/relationships" xmlns:p="http://schemas.openxmlformats.org/presentationml/2006/main" type="picTx" preserve="1">
+<p:sldLayout xmlns:a="http://schemas.openxmlformats.org/drawingml/2006/main" xmlns:r="http://schemas.openxmlformats.org/officeDocument/2006/relationships" xmlns:p="http://schemas.openxmlformats.org/presentationml/2006/main" showMasterSp="0" type="picTx" preserve="1">
   <p:cSld name="Рисунок с подписью">
-    <p:spTree>
-      <p:nvGrpSpPr>
-        <p:cNvPr id="1" name=""/>
-        <p:cNvGrpSpPr/>
-        <p:nvPr/>
-      </p:nvGrpSpPr>
-      <p:grpSpPr>
-        <a:xfrm>
-          <a:off x="0" y="0"/>
-          <a:ext cx="0" cy="0"/>
-          <a:chOff x="0" y="0"/>
-          <a:chExt cx="0" cy="0"/>
-        </a:xfrm>
-      </p:grpSpPr>
-      <p:sp>
-        <p:nvSpPr>
-          <p:cNvPr id="2" name="Заголовок 1">
-            <a:extLst>
-              <a:ext uri="{FF2B5EF4-FFF2-40B4-BE49-F238E27FC236}">
-                <a16:creationId xmlns:a16="http://schemas.microsoft.com/office/drawing/2014/main" id="{57D77CDD-4936-4E39-9831-224A3D340D31}"/>
-              </a:ext>
-            </a:extLst>
-          </p:cNvPr>
-          <p:cNvSpPr>
-            <a:spLocks noGrp="1"/>
-          </p:cNvSpPr>
-          <p:nvPr>
-            <p:ph type="title"/>
-          </p:nvPr>
-        </p:nvSpPr>
-        <p:spPr>
-          <a:xfrm>
-            <a:off x="839788" y="457200"/>
-            <a:ext cx="3932237" cy="1600200"/>
-          </a:xfrm>
-        </p:spPr>
-        <p:txBody>
-          <a:bodyPr anchor="b"/>
-          <a:lstStyle>
-            <a:lvl1pPr>
-              <a:defRPr sz="3200"/>
-            </a:lvl1pPr>
-          </a:lstStyle>
-          <a:p>
-            <a:r>
-              <a:rPr lang="ru-RU"/>
-              <a:t>Образец заголовка</a:t>
-            </a:r>
-          </a:p>
-        </p:txBody>
-      </p:sp>
-      <p:sp>
-        <p:nvSpPr>
-          <p:cNvPr id="3" name="Рисунок 2">
-            <a:extLst>
-              <a:ext uri="{FF2B5EF4-FFF2-40B4-BE49-F238E27FC236}">
-                <a16:creationId xmlns:a16="http://schemas.microsoft.com/office/drawing/2014/main" id="{B0938195-6DD7-4795-AD88-1F71431698C4}"/>
-              </a:ext>
-            </a:extLst>
-          </p:cNvPr>
-          <p:cNvSpPr>
-            <a:spLocks noGrp="1"/>
-          </p:cNvSpPr>
-          <p:nvPr>
-            <p:ph type="pic" idx="1"/>
-          </p:nvPr>
-        </p:nvSpPr>
-        <p:spPr>
-          <a:xfrm>
-            <a:off x="5183188" y="987425"/>
-            <a:ext cx="6172200" cy="4873625"/>
-          </a:xfrm>
-        </p:spPr>
-        <p:txBody>
-          <a:bodyPr/>
-          <a:lstStyle>
-            <a:lvl1pPr marL="0" indent="0">
-              <a:buNone/>
-              <a:defRPr sz="3200"/>
-            </a:lvl1pPr>
-            <a:lvl2pPr marL="457200" indent="0">
-              <a:buNone/>
-              <a:defRPr sz="2800"/>
-            </a:lvl2pPr>
-            <a:lvl3pPr marL="914400" indent="0">
-              <a:buNone/>
-              <a:defRPr sz="2400"/>
-            </a:lvl3pPr>
-            <a:lvl4pPr marL="1371600" indent="0">
-              <a:buNone/>
-              <a:defRPr sz="2000"/>
-            </a:lvl4pPr>
-            <a:lvl5pPr marL="1828800" indent="0">
-              <a:buNone/>
-              <a:defRPr sz="2000"/>
-            </a:lvl5pPr>
-            <a:lvl6pPr marL="2286000" indent="0">
-              <a:buNone/>
-              <a:defRPr sz="2000"/>
-            </a:lvl6pPr>
-            <a:lvl7pPr marL="2743200" indent="0">
-              <a:buNone/>
-              <a:defRPr sz="2000"/>
-            </a:lvl7pPr>
-            <a:lvl8pPr marL="3200400" indent="0">
-              <a:buNone/>
-              <a:defRPr sz="2000"/>
-            </a:lvl8pPr>
-            <a:lvl9pPr marL="3657600" indent="0">
-              <a:buNone/>
-              <a:defRPr sz="2000"/>
-            </a:lvl9pPr>
-          </a:lstStyle>
-          <a:p>
-            <a:endParaRPr lang="ru-RU"/>
-          </a:p>
-        </p:txBody>
-      </p:sp>
-      <p:sp>
-        <p:nvSpPr>
-          <p:cNvPr id="4" name="Текст 3">
-            <a:extLst>
-              <a:ext uri="{FF2B5EF4-FFF2-40B4-BE49-F238E27FC236}">
-                <a16:creationId xmlns:a16="http://schemas.microsoft.com/office/drawing/2014/main" id="{AC618B5D-C52D-45DA-9DFE-A5059D4CBBD2}"/>
-              </a:ext>
-            </a:extLst>
-          </p:cNvPr>
-          <p:cNvSpPr>
-            <a:spLocks noGrp="1"/>
-          </p:cNvSpPr>
-          <p:nvPr>
-            <p:ph type="body" sz="half" idx="2"/>
-          </p:nvPr>
-        </p:nvSpPr>
-        <p:spPr>
-          <a:xfrm>
-            <a:off x="839788" y="2057400"/>
-            <a:ext cx="3932237" cy="3811588"/>
-          </a:xfrm>
-        </p:spPr>
-        <p:txBody>
-          <a:bodyPr/>
-          <a:lstStyle>
-            <a:lvl1pPr marL="0" indent="0">
-              <a:buNone/>
-              <a:defRPr sz="1600"/>
-            </a:lvl1pPr>
-            <a:lvl2pPr marL="457200" indent="0">
-              <a:buNone/>
-              <a:defRPr sz="1400"/>
-            </a:lvl2pPr>
-            <a:lvl3pPr marL="914400" indent="0">
-              <a:buNone/>
-              <a:defRPr sz="1200"/>
-            </a:lvl3pPr>
-            <a:lvl4pPr marL="1371600" indent="0">
-              <a:buNone/>
-              <a:defRPr sz="1000"/>
-            </a:lvl4pPr>
-            <a:lvl5pPr marL="1828800" indent="0">
-              <a:buNone/>
-              <a:defRPr sz="1000"/>
-            </a:lvl5pPr>
-            <a:lvl6pPr marL="2286000" indent="0">
-              <a:buNone/>
-              <a:defRPr sz="1000"/>
-            </a:lvl6pPr>
-            <a:lvl7pPr marL="2743200" indent="0">
-              <a:buNone/>
-              <a:defRPr sz="1000"/>
-            </a:lvl7pPr>
-            <a:lvl8pPr marL="3200400" indent="0">
-              <a:buNone/>
-              <a:defRPr sz="1000"/>
-            </a:lvl8pPr>
-            <a:lvl9pPr marL="3657600" indent="0">
-              <a:buNone/>
-              <a:defRPr sz="1000"/>
-            </a:lvl9pPr>
-          </a:lstStyle>
-          <a:p>
-            <a:pPr lvl="0"/>
-            <a:r>
-              <a:rPr lang="ru-RU"/>
-              <a:t>Образец текста</a:t>
-            </a:r>
-          </a:p>
-        </p:txBody>
-      </p:sp>
-      <p:sp>
-        <p:nvSpPr>
-          <p:cNvPr id="5" name="Дата 4">
-            <a:extLst>
-              <a:ext uri="{FF2B5EF4-FFF2-40B4-BE49-F238E27FC236}">
-                <a16:creationId xmlns:a16="http://schemas.microsoft.com/office/drawing/2014/main" id="{D797A626-2DCB-40A1-8742-A0B9F40AB830}"/>
-              </a:ext>
-            </a:extLst>
-          </p:cNvPr>
-          <p:cNvSpPr>
-            <a:spLocks noGrp="1"/>
-          </p:cNvSpPr>
-          <p:nvPr>
-            <p:ph type="dt" sz="half" idx="10"/>
-          </p:nvPr>
-        </p:nvSpPr>
-        <p:spPr/>
-        <p:txBody>
-          <a:bodyPr/>
-          <a:lstStyle/>
-          <a:p>
-            <a:fld id="{FED9941D-7481-4412-9593-AE3B98A14048}" type="datetimeFigureOut">
-              <a:rPr lang="ru-RU" smtClean="0"/>
-              <a:t>28.04.2026</a:t>
-            </a:fld>
-            <a:endParaRPr lang="ru-RU"/>
-          </a:p>
-        </p:txBody>
-      </p:sp>
-      <p:sp>
-        <p:nvSpPr>
-          <p:cNvPr id="6" name="Нижний колонтитул 5">
-            <a:extLst>
-              <a:ext uri="{FF2B5EF4-FFF2-40B4-BE49-F238E27FC236}">
-                <a16:creationId xmlns:a16="http://schemas.microsoft.com/office/drawing/2014/main" id="{A8089DC1-D1D0-4C73-A9D5-B1E4312DAFAD}"/>
-              </a:ext>
-            </a:extLst>
-          </p:cNvPr>
-          <p:cNvSpPr>
-            <a:spLocks noGrp="1"/>
-          </p:cNvSpPr>
-          <p:nvPr>
-            <p:ph type="ftr" sz="quarter" idx="11"/>
-          </p:nvPr>
-        </p:nvSpPr>
-        <p:spPr/>
-        <p:txBody>
-          <a:bodyPr/>
-          <a:lstStyle/>
-          <a:p>
-            <a:endParaRPr lang="ru-RU"/>
-          </a:p>
-        </p:txBody>
-      </p:sp>
-      <p:sp>
-        <p:nvSpPr>
-          <p:cNvPr id="7" name="Номер слайда 6">
-            <a:extLst>
-              <a:ext uri="{FF2B5EF4-FFF2-40B4-BE49-F238E27FC236}">
-                <a16:creationId xmlns:a16="http://schemas.microsoft.com/office/drawing/2014/main" id="{550A2A65-0354-4EE0-88A5-87C5B8A31AD0}"/>
-              </a:ext>
-            </a:extLst>
-          </p:cNvPr>
-          <p:cNvSpPr>
-            <a:spLocks noGrp="1"/>
-          </p:cNvSpPr>
-          <p:nvPr>
-            <p:ph type="sldNum" sz="quarter" idx="12"/>
-          </p:nvPr>
-        </p:nvSpPr>
-        <p:spPr/>
-        <p:txBody>
-          <a:bodyPr/>
-          <a:lstStyle/>
-          <a:p>
-            <a:fld id="{44E593DF-646F-45EB-B2B7-C2091C7E091D}" type="slidenum">
-              <a:rPr lang="ru-RU" smtClean="0"/>
-              <a:t>‹#›</a:t>
-            </a:fld>
-            <a:endParaRPr lang="ru-RU"/>
-          </a:p>
-        </p:txBody>
-      </p:sp>
-    </p:spTree>
-    <p:extLst>
-      <p:ext uri="{BB962C8B-B14F-4D97-AF65-F5344CB8AC3E}">
-        <p14:creationId xmlns:p14="http://schemas.microsoft.com/office/powerpoint/2010/main" val="3380334160"/>
-      </p:ext>
-    </p:extLst>
-  </p:cSld>
-  <p:clrMapOvr>
-    <a:masterClrMapping/>
-  </p:clrMapOvr>
-</p:sldLayout>
-</file>
-
-<file path=ppt/slideMasters/slideMaster1.xml><?xml version="1.0" encoding="utf-8"?>
-<p:sldMaster xmlns:a="http://schemas.openxmlformats.org/drawingml/2006/main" xmlns:r="http://schemas.openxmlformats.org/officeDocument/2006/relationships" xmlns:p="http://schemas.openxmlformats.org/presentationml/2006/main">
-  <p:cSld>
     <p:bg>
-      <p:bgRef idx="1001">
+      <p:bgRef idx="1002">
         <a:schemeClr val="bg1"/>
       </p:bgRef>
     </p:bg>
@@ -2773,13 +2638,7 @@
       </p:grpSpPr>
       <p:sp>
         <p:nvSpPr>
-          <p:cNvPr id="2" name="Заголовок 1">
-            <a:extLst>
-              <a:ext uri="{FF2B5EF4-FFF2-40B4-BE49-F238E27FC236}">
-                <a16:creationId xmlns:a16="http://schemas.microsoft.com/office/drawing/2014/main" id="{22351A45-5A9C-468A-B32F-D9991A9E1FBB}"/>
-              </a:ext>
-            </a:extLst>
-          </p:cNvPr>
+          <p:cNvPr id="2" name="Заголовок 1"/>
           <p:cNvSpPr>
             <a:spLocks noGrp="1"/>
           </p:cNvSpPr>
@@ -2789,35 +2648,432 @@
         </p:nvSpPr>
         <p:spPr>
           <a:xfrm>
-            <a:off x="838200" y="365125"/>
-            <a:ext cx="10515600" cy="1325563"/>
+            <a:off x="292608" y="150896"/>
+            <a:ext cx="1219200" cy="6400800"/>
+          </a:xfrm>
+        </p:spPr>
+        <p:txBody>
+          <a:bodyPr vert="vert270" anchor="b"/>
+          <a:lstStyle>
+            <a:lvl1pPr marL="0" algn="l">
+              <a:buNone/>
+              <a:defRPr sz="3000" b="0" cap="all" baseline="0"/>
+            </a:lvl1pPr>
+          </a:lstStyle>
+          <a:p>
+            <a:r>
+              <a:rPr kumimoji="0" lang="ru-RU" smtClean="0"/>
+              <a:t>Образец заголовка</a:t>
+            </a:r>
+            <a:endParaRPr kumimoji="0" lang="en-US"/>
+          </a:p>
+        </p:txBody>
+      </p:sp>
+      <p:sp>
+        <p:nvSpPr>
+          <p:cNvPr id="3" name="Рисунок 2"/>
+          <p:cNvSpPr>
+            <a:spLocks noGrp="1"/>
+          </p:cNvSpPr>
+          <p:nvPr>
+            <p:ph type="pic" idx="1"/>
+          </p:nvPr>
+        </p:nvSpPr>
+        <p:spPr>
+          <a:xfrm>
+            <a:off x="1517649" y="373966"/>
+            <a:ext cx="9777984" cy="5486400"/>
+          </a:xfrm>
+          <a:solidFill>
+            <a:schemeClr val="bg2">
+              <a:shade val="50000"/>
+            </a:schemeClr>
+          </a:solidFill>
+        </p:spPr>
+        <p:txBody>
+          <a:bodyPr/>
+          <a:lstStyle>
+            <a:lvl1pPr marL="0" indent="0">
+              <a:buNone/>
+              <a:defRPr sz="3200"/>
+            </a:lvl1pPr>
+          </a:lstStyle>
+          <a:p>
+            <a:r>
+              <a:rPr kumimoji="0" lang="ru-RU" smtClean="0"/>
+              <a:t>Вставка рисунка</a:t>
+            </a:r>
+            <a:endParaRPr kumimoji="0" lang="en-US" dirty="0"/>
+          </a:p>
+        </p:txBody>
+      </p:sp>
+      <p:sp>
+        <p:nvSpPr>
+          <p:cNvPr id="4" name="Текст 3"/>
+          <p:cNvSpPr>
+            <a:spLocks noGrp="1"/>
+          </p:cNvSpPr>
+          <p:nvPr>
+            <p:ph type="body" sz="half" idx="2"/>
+          </p:nvPr>
+        </p:nvSpPr>
+        <p:spPr>
+          <a:xfrm>
+            <a:off x="1524000" y="5867400"/>
+            <a:ext cx="9777984" cy="685800"/>
+          </a:xfrm>
+          <a:solidFill>
+            <a:schemeClr val="accent1">
+              <a:alpha val="15000"/>
+            </a:schemeClr>
+          </a:solidFill>
+          <a:ln>
+            <a:solidFill>
+              <a:schemeClr val="accent1"/>
+            </a:solidFill>
+            <a:miter lim="800000"/>
+          </a:ln>
+        </p:spPr>
+        <p:txBody>
+          <a:bodyPr/>
+          <a:lstStyle>
+            <a:lvl1pPr marL="0" indent="0">
+              <a:spcBef>
+                <a:spcPts val="0"/>
+              </a:spcBef>
+              <a:buNone/>
+              <a:defRPr sz="1400"/>
+            </a:lvl1pPr>
+            <a:lvl2pPr>
+              <a:defRPr sz="1200"/>
+            </a:lvl2pPr>
+            <a:lvl3pPr>
+              <a:defRPr sz="1000"/>
+            </a:lvl3pPr>
+            <a:lvl4pPr>
+              <a:defRPr sz="900"/>
+            </a:lvl4pPr>
+            <a:lvl5pPr>
+              <a:defRPr sz="900"/>
+            </a:lvl5pPr>
+          </a:lstStyle>
+          <a:p>
+            <a:pPr lvl="0" eaLnBrk="1" latinLnBrk="0" hangingPunct="1"/>
+            <a:r>
+              <a:rPr kumimoji="0" lang="ru-RU" smtClean="0"/>
+              <a:t>Образец текста</a:t>
+            </a:r>
+          </a:p>
+        </p:txBody>
+      </p:sp>
+      <p:sp>
+        <p:nvSpPr>
+          <p:cNvPr id="5" name="Дата 4"/>
+          <p:cNvSpPr>
+            <a:spLocks noGrp="1"/>
+          </p:cNvSpPr>
+          <p:nvPr>
+            <p:ph type="dt" sz="half" idx="10"/>
+          </p:nvPr>
+        </p:nvSpPr>
+        <p:spPr>
+          <a:xfrm>
+            <a:off x="8144256" y="6556248"/>
+            <a:ext cx="2804160" cy="301752"/>
+          </a:xfrm>
+        </p:spPr>
+        <p:txBody>
+          <a:bodyPr/>
+          <a:lstStyle>
+            <a:lvl1pPr>
+              <a:defRPr sz="900"/>
+            </a:lvl1pPr>
+          </a:lstStyle>
+          <a:p>
+            <a:fld id="{FED9941D-7481-4412-9593-AE3B98A14048}" type="datetimeFigureOut">
+              <a:rPr lang="ru-RU" smtClean="0"/>
+              <a:pPr/>
+              <a:t>28.04.2026</a:t>
+            </a:fld>
+            <a:endParaRPr lang="ru-RU"/>
+          </a:p>
+        </p:txBody>
+      </p:sp>
+      <p:sp>
+        <p:nvSpPr>
+          <p:cNvPr id="6" name="Нижний колонтитул 5"/>
+          <p:cNvSpPr>
+            <a:spLocks noGrp="1"/>
+          </p:cNvSpPr>
+          <p:nvPr>
+            <p:ph type="ftr" sz="quarter" idx="11"/>
+          </p:nvPr>
+        </p:nvSpPr>
+        <p:spPr>
+          <a:xfrm>
+            <a:off x="1560576" y="6557169"/>
+            <a:ext cx="6597429" cy="301752"/>
+          </a:xfrm>
+        </p:spPr>
+        <p:txBody>
+          <a:bodyPr/>
+          <a:lstStyle>
+            <a:lvl1pPr>
+              <a:defRPr sz="900"/>
+            </a:lvl1pPr>
+          </a:lstStyle>
+          <a:p>
+            <a:endParaRPr lang="ru-RU"/>
+          </a:p>
+        </p:txBody>
+      </p:sp>
+      <p:sp>
+        <p:nvSpPr>
+          <p:cNvPr id="7" name="Номер слайда 6"/>
+          <p:cNvSpPr>
+            <a:spLocks noGrp="1"/>
+          </p:cNvSpPr>
+          <p:nvPr>
+            <p:ph type="sldNum" sz="quarter" idx="12"/>
+          </p:nvPr>
+        </p:nvSpPr>
+        <p:spPr>
+          <a:xfrm>
+            <a:off x="10956256" y="6556248"/>
+            <a:ext cx="487680" cy="301752"/>
+          </a:xfrm>
+        </p:spPr>
+        <p:txBody>
+          <a:bodyPr/>
+          <a:lstStyle>
+            <a:lvl1pPr algn="ctr">
+              <a:defRPr sz="900"/>
+            </a:lvl1pPr>
+          </a:lstStyle>
+          <a:p>
+            <a:fld id="{44E593DF-646F-45EB-B2B7-C2091C7E091D}" type="slidenum">
+              <a:rPr lang="ru-RU" smtClean="0"/>
+              <a:pPr/>
+              <a:t>‹#›</a:t>
+            </a:fld>
+            <a:endParaRPr lang="ru-RU"/>
+          </a:p>
+        </p:txBody>
+      </p:sp>
+    </p:spTree>
+  </p:cSld>
+  <p:clrMapOvr>
+    <a:overrideClrMapping bg1="dk1" tx1="lt1" bg2="dk2" tx2="lt2" accent1="accent1" accent2="accent2" accent3="accent3" accent4="accent4" accent5="accent5" accent6="accent6" hlink="hlink" folHlink="folHlink"/>
+  </p:clrMapOvr>
+</p:sldLayout>
+</file>
+
+<file path=ppt/slideMasters/slideMaster1.xml><?xml version="1.0" encoding="utf-8"?>
+<p:sldMaster xmlns:a="http://schemas.openxmlformats.org/drawingml/2006/main" xmlns:r="http://schemas.openxmlformats.org/officeDocument/2006/relationships" xmlns:p="http://schemas.openxmlformats.org/presentationml/2006/main">
+  <p:cSld>
+    <p:bg>
+      <p:bgRef idx="1002">
+        <a:schemeClr val="bg2"/>
+      </p:bgRef>
+    </p:bg>
+    <p:spTree>
+      <p:nvGrpSpPr>
+        <p:cNvPr id="1" name=""/>
+        <p:cNvGrpSpPr/>
+        <p:nvPr/>
+      </p:nvGrpSpPr>
+      <p:grpSpPr>
+        <a:xfrm>
+          <a:off x="0" y="0"/>
+          <a:ext cx="0" cy="0"/>
+          <a:chOff x="0" y="0"/>
+          <a:chExt cx="0" cy="0"/>
+        </a:xfrm>
+      </p:grpSpPr>
+      <p:sp>
+        <p:nvSpPr>
+          <p:cNvPr id="11" name="Прямоугольный треугольник 10"/>
+          <p:cNvSpPr/>
+          <p:nvPr/>
+        </p:nvSpPr>
+        <p:spPr>
+          <a:xfrm>
+            <a:off x="9379" y="14069"/>
+            <a:ext cx="12173243" cy="6836899"/>
+          </a:xfrm>
+          <a:prstGeom prst="rtTriangle">
+            <a:avLst/>
+          </a:prstGeom>
+          <a:gradFill flip="none" rotWithShape="1">
+            <a:gsLst>
+              <a:gs pos="0">
+                <a:schemeClr val="tx2">
+                  <a:alpha val="10000"/>
+                </a:schemeClr>
+              </a:gs>
+              <a:gs pos="70000">
+                <a:schemeClr val="tx2">
+                  <a:alpha val="8000"/>
+                </a:schemeClr>
+              </a:gs>
+              <a:gs pos="100000">
+                <a:schemeClr val="tx2">
+                  <a:alpha val="1000"/>
+                </a:schemeClr>
+              </a:gs>
+            </a:gsLst>
+            <a:lin ang="8000000" scaled="1"/>
+            <a:tileRect/>
+          </a:gradFill>
+          <a:ln w="38100" cap="rnd" cmpd="sng" algn="ctr">
+            <a:noFill/>
+            <a:prstDash val="solid"/>
+          </a:ln>
+          <a:effectLst/>
+        </p:spPr>
+        <p:style>
+          <a:lnRef idx="3">
+            <a:schemeClr val="lt1"/>
+          </a:lnRef>
+          <a:fillRef idx="1">
+            <a:schemeClr val="accent1"/>
+          </a:fillRef>
+          <a:effectRef idx="1">
+            <a:schemeClr val="accent1"/>
+          </a:effectRef>
+          <a:fontRef idx="minor">
+            <a:schemeClr val="lt1"/>
+          </a:fontRef>
+        </p:style>
+        <p:txBody>
+          <a:bodyPr anchor="ctr"/>
+          <a:lstStyle/>
+          <a:p>
+            <a:pPr algn="ctr" eaLnBrk="1" latinLnBrk="0" hangingPunct="1"/>
+            <a:endParaRPr kumimoji="0" lang="en-US"/>
+          </a:p>
+        </p:txBody>
+      </p:sp>
+      <p:cxnSp>
+        <p:nvCxnSpPr>
+          <p:cNvPr id="8" name="Прямая соединительная линия 7"/>
+          <p:cNvCxnSpPr/>
+          <p:nvPr/>
+        </p:nvCxnSpPr>
+        <p:spPr>
+          <a:xfrm>
+            <a:off x="0" y="7035"/>
+            <a:ext cx="12182621" cy="6843933"/>
+          </a:xfrm>
+          <a:prstGeom prst="line">
+            <a:avLst/>
+          </a:prstGeom>
+          <a:noFill/>
+          <a:ln w="5000" cap="rnd" cmpd="sng" algn="ctr">
+            <a:solidFill>
+              <a:schemeClr val="bg2">
+                <a:tint val="55000"/>
+                <a:satMod val="200000"/>
+                <a:alpha val="35000"/>
+              </a:schemeClr>
+            </a:solidFill>
+            <a:prstDash val="solid"/>
+          </a:ln>
+          <a:effectLst/>
+        </p:spPr>
+        <p:style>
+          <a:lnRef idx="2">
+            <a:schemeClr val="accent1"/>
+          </a:lnRef>
+          <a:fillRef idx="0">
+            <a:schemeClr val="accent1"/>
+          </a:fillRef>
+          <a:effectRef idx="1">
+            <a:schemeClr val="accent1"/>
+          </a:effectRef>
+          <a:fontRef idx="minor">
+            <a:schemeClr val="tx1"/>
+          </a:fontRef>
+        </p:style>
+      </p:cxnSp>
+      <p:cxnSp>
+        <p:nvCxnSpPr>
+          <p:cNvPr id="9" name="Прямая соединительная линия 8"/>
+          <p:cNvCxnSpPr/>
+          <p:nvPr/>
+        </p:nvCxnSpPr>
+        <p:spPr>
+          <a:xfrm rot="10800000" flipV="1">
+            <a:off x="8625059" y="4948410"/>
+            <a:ext cx="3563815" cy="1900210"/>
+          </a:xfrm>
+          <a:prstGeom prst="line">
+            <a:avLst/>
+          </a:prstGeom>
+          <a:noFill/>
+          <a:ln w="6000" cap="rnd" cmpd="sng" algn="ctr">
+            <a:solidFill>
+              <a:schemeClr val="bg2">
+                <a:tint val="50000"/>
+                <a:satMod val="200000"/>
+                <a:alpha val="45000"/>
+              </a:schemeClr>
+            </a:solidFill>
+            <a:prstDash val="solid"/>
+          </a:ln>
+          <a:effectLst/>
+        </p:spPr>
+        <p:style>
+          <a:lnRef idx="2">
+            <a:schemeClr val="accent1"/>
+          </a:lnRef>
+          <a:fillRef idx="0">
+            <a:schemeClr val="accent1"/>
+          </a:fillRef>
+          <a:effectRef idx="1">
+            <a:schemeClr val="accent1"/>
+          </a:effectRef>
+          <a:fontRef idx="minor">
+            <a:schemeClr val="tx1"/>
+          </a:fontRef>
+        </p:style>
+      </p:cxnSp>
+      <p:sp>
+        <p:nvSpPr>
+          <p:cNvPr id="22" name="Заголовок 21"/>
+          <p:cNvSpPr>
+            <a:spLocks noGrp="1"/>
+          </p:cNvSpPr>
+          <p:nvPr>
+            <p:ph type="title"/>
+          </p:nvPr>
+        </p:nvSpPr>
+        <p:spPr>
+          <a:xfrm>
+            <a:off x="609600" y="267494"/>
+            <a:ext cx="10972800" cy="1399032"/>
           </a:xfrm>
           <a:prstGeom prst="rect">
             <a:avLst/>
           </a:prstGeom>
         </p:spPr>
         <p:txBody>
-          <a:bodyPr vert="horz" lIns="91440" tIns="45720" rIns="91440" bIns="45720" rtlCol="0" anchor="ctr">
+          <a:bodyPr vert="horz" anchor="ctr">
             <a:normAutofit/>
           </a:bodyPr>
           <a:lstStyle/>
           <a:p>
             <a:r>
-              <a:rPr lang="ru-RU"/>
+              <a:rPr kumimoji="0" lang="ru-RU" smtClean="0"/>
               <a:t>Образец заголовка</a:t>
             </a:r>
-          </a:p>
-        </p:txBody>
-      </p:sp>
-      <p:sp>
-        <p:nvSpPr>
-          <p:cNvPr id="3" name="Текст 2">
-            <a:extLst>
-              <a:ext uri="{FF2B5EF4-FFF2-40B4-BE49-F238E27FC236}">
-                <a16:creationId xmlns:a16="http://schemas.microsoft.com/office/drawing/2014/main" id="{65FCF162-9B2B-4E18-93EC-602C1EE4FEEE}"/>
-              </a:ext>
-            </a:extLst>
-          </p:cNvPr>
+            <a:endParaRPr kumimoji="0" lang="en-US"/>
+          </a:p>
+        </p:txBody>
+      </p:sp>
+      <p:sp>
+        <p:nvSpPr>
+          <p:cNvPr id="13" name="Текст 12"/>
           <p:cNvSpPr>
             <a:spLocks noGrp="1"/>
           </p:cNvSpPr>
@@ -2827,64 +3083,59 @@
         </p:nvSpPr>
         <p:spPr>
           <a:xfrm>
-            <a:off x="838200" y="1825625"/>
-            <a:ext cx="10515600" cy="4351338"/>
+            <a:off x="609600" y="1882808"/>
+            <a:ext cx="10972800" cy="4572000"/>
           </a:xfrm>
           <a:prstGeom prst="rect">
             <a:avLst/>
           </a:prstGeom>
         </p:spPr>
         <p:txBody>
-          <a:bodyPr vert="horz" lIns="91440" tIns="45720" rIns="91440" bIns="45720" rtlCol="0">
+          <a:bodyPr vert="horz" anchor="t">
             <a:normAutofit/>
           </a:bodyPr>
           <a:lstStyle/>
           <a:p>
-            <a:pPr lvl="0"/>
-            <a:r>
-              <a:rPr lang="ru-RU"/>
+            <a:pPr lvl="0" eaLnBrk="1" latinLnBrk="0" hangingPunct="1"/>
+            <a:r>
+              <a:rPr kumimoji="0" lang="ru-RU" smtClean="0"/>
               <a:t>Образец текста</a:t>
             </a:r>
           </a:p>
           <a:p>
-            <a:pPr lvl="1"/>
-            <a:r>
-              <a:rPr lang="ru-RU"/>
+            <a:pPr lvl="1" eaLnBrk="1" latinLnBrk="0" hangingPunct="1"/>
+            <a:r>
+              <a:rPr kumimoji="0" lang="ru-RU" smtClean="0"/>
               <a:t>Второй уровень</a:t>
             </a:r>
           </a:p>
           <a:p>
-            <a:pPr lvl="2"/>
-            <a:r>
-              <a:rPr lang="ru-RU"/>
+            <a:pPr lvl="2" eaLnBrk="1" latinLnBrk="0" hangingPunct="1"/>
+            <a:r>
+              <a:rPr kumimoji="0" lang="ru-RU" smtClean="0"/>
               <a:t>Третий уровень</a:t>
             </a:r>
           </a:p>
           <a:p>
-            <a:pPr lvl="3"/>
-            <a:r>
-              <a:rPr lang="ru-RU"/>
+            <a:pPr lvl="3" eaLnBrk="1" latinLnBrk="0" hangingPunct="1"/>
+            <a:r>
+              <a:rPr kumimoji="0" lang="ru-RU" smtClean="0"/>
               <a:t>Четвертый уровень</a:t>
             </a:r>
           </a:p>
           <a:p>
-            <a:pPr lvl="4"/>
-            <a:r>
-              <a:rPr lang="ru-RU"/>
+            <a:pPr lvl="4" eaLnBrk="1" latinLnBrk="0" hangingPunct="1"/>
+            <a:r>
+              <a:rPr kumimoji="0" lang="ru-RU" smtClean="0"/>
               <a:t>Пятый уровень</a:t>
             </a:r>
-          </a:p>
-        </p:txBody>
-      </p:sp>
-      <p:sp>
-        <p:nvSpPr>
-          <p:cNvPr id="4" name="Дата 3">
-            <a:extLst>
-              <a:ext uri="{FF2B5EF4-FFF2-40B4-BE49-F238E27FC236}">
-                <a16:creationId xmlns:a16="http://schemas.microsoft.com/office/drawing/2014/main" id="{743E6468-AD22-426B-AB53-D27379333A3C}"/>
-              </a:ext>
-            </a:extLst>
-          </p:cNvPr>
+            <a:endParaRPr kumimoji="0" lang="en-US"/>
+          </a:p>
+        </p:txBody>
+      </p:sp>
+      <p:sp>
+        <p:nvSpPr>
+          <p:cNvPr id="14" name="Дата 13"/>
           <p:cNvSpPr>
             <a:spLocks noGrp="1"/>
           </p:cNvSpPr>
@@ -2894,22 +3145,20 @@
         </p:nvSpPr>
         <p:spPr>
           <a:xfrm>
-            <a:off x="838200" y="6356350"/>
-            <a:ext cx="2743200" cy="365125"/>
+            <a:off x="6388608" y="6480969"/>
+            <a:ext cx="2844800" cy="301752"/>
           </a:xfrm>
           <a:prstGeom prst="rect">
             <a:avLst/>
           </a:prstGeom>
         </p:spPr>
         <p:txBody>
-          <a:bodyPr vert="horz" lIns="91440" tIns="45720" rIns="91440" bIns="45720" rtlCol="0" anchor="ctr"/>
+          <a:bodyPr vert="horz" anchor="b"/>
           <a:lstStyle>
-            <a:lvl1pPr algn="l">
-              <a:defRPr sz="1200">
+            <a:lvl1pPr algn="l" eaLnBrk="1" latinLnBrk="0" hangingPunct="1">
+              <a:defRPr kumimoji="0" sz="1000" b="0">
                 <a:solidFill>
-                  <a:schemeClr val="tx1">
-                    <a:tint val="75000"/>
-                  </a:schemeClr>
+                  <a:schemeClr val="tx1"/>
                 </a:solidFill>
               </a:defRPr>
             </a:lvl1pPr>
@@ -2917,6 +3166,7 @@
           <a:p>
             <a:fld id="{FED9941D-7481-4412-9593-AE3B98A14048}" type="datetimeFigureOut">
               <a:rPr lang="ru-RU" smtClean="0"/>
+              <a:pPr/>
               <a:t>28.04.2026</a:t>
             </a:fld>
             <a:endParaRPr lang="ru-RU"/>
@@ -2925,13 +3175,7 @@
       </p:sp>
       <p:sp>
         <p:nvSpPr>
-          <p:cNvPr id="5" name="Нижний колонтитул 4">
-            <a:extLst>
-              <a:ext uri="{FF2B5EF4-FFF2-40B4-BE49-F238E27FC236}">
-                <a16:creationId xmlns:a16="http://schemas.microsoft.com/office/drawing/2014/main" id="{FD204509-4BB2-448B-BF07-88CDE836A593}"/>
-              </a:ext>
-            </a:extLst>
-          </p:cNvPr>
+          <p:cNvPr id="3" name="Нижний колонтитул 2"/>
           <p:cNvSpPr>
             <a:spLocks noGrp="1"/>
           </p:cNvSpPr>
@@ -2941,22 +3185,20 @@
         </p:nvSpPr>
         <p:spPr>
           <a:xfrm>
-            <a:off x="4038600" y="6356350"/>
-            <a:ext cx="4114800" cy="365125"/>
+            <a:off x="609600" y="6481891"/>
+            <a:ext cx="5680075" cy="300831"/>
           </a:xfrm>
           <a:prstGeom prst="rect">
             <a:avLst/>
           </a:prstGeom>
         </p:spPr>
         <p:txBody>
-          <a:bodyPr vert="horz" lIns="91440" tIns="45720" rIns="91440" bIns="45720" rtlCol="0" anchor="ctr"/>
+          <a:bodyPr vert="horz" anchor="b"/>
           <a:lstStyle>
-            <a:lvl1pPr algn="ctr">
-              <a:defRPr sz="1200">
+            <a:lvl1pPr algn="r" eaLnBrk="1" latinLnBrk="0" hangingPunct="1">
+              <a:defRPr kumimoji="0" sz="1000">
                 <a:solidFill>
-                  <a:schemeClr val="tx1">
-                    <a:tint val="75000"/>
-                  </a:schemeClr>
+                  <a:schemeClr val="tx1"/>
                 </a:solidFill>
               </a:defRPr>
             </a:lvl1pPr>
@@ -2968,13 +3210,7 @@
       </p:sp>
       <p:sp>
         <p:nvSpPr>
-          <p:cNvPr id="6" name="Номер слайда 5">
-            <a:extLst>
-              <a:ext uri="{FF2B5EF4-FFF2-40B4-BE49-F238E27FC236}">
-                <a16:creationId xmlns:a16="http://schemas.microsoft.com/office/drawing/2014/main" id="{232281C7-3BC8-4F32-9B8A-48B27663D0B9}"/>
-              </a:ext>
-            </a:extLst>
-          </p:cNvPr>
+          <p:cNvPr id="23" name="Номер слайда 22"/>
           <p:cNvSpPr>
             <a:spLocks noGrp="1"/>
           </p:cNvSpPr>
@@ -2984,22 +3220,20 @@
         </p:nvSpPr>
         <p:spPr>
           <a:xfrm>
-            <a:off x="8610600" y="6356350"/>
-            <a:ext cx="2743200" cy="365125"/>
+            <a:off x="10119360" y="6480969"/>
+            <a:ext cx="670560" cy="301752"/>
           </a:xfrm>
           <a:prstGeom prst="rect">
             <a:avLst/>
           </a:prstGeom>
         </p:spPr>
         <p:txBody>
-          <a:bodyPr vert="horz" lIns="91440" tIns="45720" rIns="91440" bIns="45720" rtlCol="0" anchor="ctr"/>
+          <a:bodyPr vert="horz" anchor="b"/>
           <a:lstStyle>
-            <a:lvl1pPr algn="r">
-              <a:defRPr sz="1200">
+            <a:lvl1pPr algn="ctr" eaLnBrk="1" latinLnBrk="0" hangingPunct="1">
+              <a:defRPr kumimoji="0" sz="1200">
                 <a:solidFill>
-                  <a:schemeClr val="tx1">
-                    <a:tint val="75000"/>
-                  </a:schemeClr>
+                  <a:schemeClr val="tx1"/>
                 </a:solidFill>
               </a:defRPr>
             </a:lvl1pPr>
@@ -3007,6 +3241,7 @@
           <a:p>
             <a:fld id="{44E593DF-646F-45EB-B2B7-C2091C7E091D}" type="slidenum">
               <a:rPr lang="ru-RU" smtClean="0"/>
+              <a:pPr/>
               <a:t>‹#›</a:t>
             </a:fld>
             <a:endParaRPr lang="ru-RU"/>
@@ -3014,40 +3249,49 @@
         </p:txBody>
       </p:sp>
     </p:spTree>
-    <p:extLst>
-      <p:ext uri="{BB962C8B-B14F-4D97-AF65-F5344CB8AC3E}">
-        <p14:creationId xmlns:p14="http://schemas.microsoft.com/office/powerpoint/2010/main" val="2278202441"/>
-      </p:ext>
-    </p:extLst>
   </p:cSld>
-  <p:clrMap bg1="lt1" tx1="dk1" bg2="lt2" tx2="dk2" accent1="accent1" accent2="accent2" accent3="accent3" accent4="accent4" accent5="accent5" accent6="accent6" hlink="hlink" folHlink="folHlink"/>
+  <p:clrMap bg1="dk1" tx1="lt1" bg2="dk2" tx2="lt2" accent1="accent1" accent2="accent2" accent3="accent3" accent4="accent4" accent5="accent5" accent6="accent6" hlink="hlink" folHlink="folHlink"/>
   <p:sldLayoutIdLst>
-    <p:sldLayoutId id="2147483649" r:id="rId1"/>
-    <p:sldLayoutId id="2147483650" r:id="rId2"/>
-    <p:sldLayoutId id="2147483651" r:id="rId3"/>
-    <p:sldLayoutId id="2147483652" r:id="rId4"/>
-    <p:sldLayoutId id="2147483653" r:id="rId5"/>
-    <p:sldLayoutId id="2147483654" r:id="rId6"/>
-    <p:sldLayoutId id="2147483655" r:id="rId7"/>
-    <p:sldLayoutId id="2147483656" r:id="rId8"/>
-    <p:sldLayoutId id="2147483657" r:id="rId9"/>
-    <p:sldLayoutId id="2147483658" r:id="rId10"/>
-    <p:sldLayoutId id="2147483659" r:id="rId11"/>
+    <p:sldLayoutId id="2147483733" r:id="rId1"/>
+    <p:sldLayoutId id="2147483734" r:id="rId2"/>
+    <p:sldLayoutId id="2147483735" r:id="rId3"/>
+    <p:sldLayoutId id="2147483736" r:id="rId4"/>
+    <p:sldLayoutId id="2147483737" r:id="rId5"/>
+    <p:sldLayoutId id="2147483738" r:id="rId6"/>
+    <p:sldLayoutId id="2147483739" r:id="rId7"/>
+    <p:sldLayoutId id="2147483740" r:id="rId8"/>
+    <p:sldLayoutId id="2147483741" r:id="rId9"/>
+    <p:sldLayoutId id="2147483742" r:id="rId10"/>
+    <p:sldLayoutId id="2147483743" r:id="rId11"/>
   </p:sldLayoutIdLst>
   <p:txStyles>
     <p:titleStyle>
-      <a:lvl1pPr algn="l" defTabSz="914400" rtl="0" eaLnBrk="1" latinLnBrk="0" hangingPunct="1">
-        <a:lnSpc>
-          <a:spcPct val="90000"/>
-        </a:lnSpc>
+      <a:lvl1pPr marL="484632" algn="l" rtl="0" eaLnBrk="1" latinLnBrk="0" hangingPunct="1">
         <a:spcBef>
           <a:spcPct val="0"/>
         </a:spcBef>
         <a:buNone/>
-        <a:defRPr sz="4400" kern="1200">
+        <a:defRPr kumimoji="0" sz="4200" kern="1200">
+          <a:ln w="6350">
+            <a:solidFill>
+              <a:schemeClr val="accent1">
+                <a:shade val="43000"/>
+              </a:schemeClr>
+            </a:solidFill>
+          </a:ln>
           <a:solidFill>
-            <a:schemeClr val="tx1"/>
+            <a:schemeClr val="accent1">
+              <a:tint val="83000"/>
+              <a:satMod val="150000"/>
+            </a:schemeClr>
           </a:solidFill>
+          <a:effectLst>
+            <a:outerShdw blurRad="26000" dist="26000" dir="14500000" algn="tl" rotWithShape="0">
+              <a:srgbClr val="000000">
+                <a:alpha val="40000"/>
+              </a:srgbClr>
+            </a:outerShdw>
+          </a:effectLst>
           <a:latin typeface="+mj-lt"/>
           <a:ea typeface="+mj-ea"/>
           <a:cs typeface="+mj-cs"/>
@@ -3055,16 +3299,17 @@
       </a:lvl1pPr>
     </p:titleStyle>
     <p:bodyStyle>
-      <a:lvl1pPr marL="228600" indent="-228600" algn="l" defTabSz="914400" rtl="0" eaLnBrk="1" latinLnBrk="0" hangingPunct="1">
-        <a:lnSpc>
-          <a:spcPct val="90000"/>
-        </a:lnSpc>
+      <a:lvl1pPr marL="448056" indent="-384048" algn="l" rtl="0" eaLnBrk="1" latinLnBrk="0" hangingPunct="1">
         <a:spcBef>
-          <a:spcPts val="1000"/>
+          <a:spcPct val="20000"/>
         </a:spcBef>
-        <a:buFont typeface="Arial" panose="020B0604020202020204" pitchFamily="34" charset="0"/>
-        <a:buChar char="•"/>
-        <a:defRPr sz="2800" kern="1200">
+        <a:buClr>
+          <a:schemeClr val="accent1"/>
+        </a:buClr>
+        <a:buSzPct val="80000"/>
+        <a:buFont typeface="Wingdings 2"/>
+        <a:buChar char=""/>
+        <a:defRPr kumimoji="0" sz="3000" kern="1200">
           <a:solidFill>
             <a:schemeClr val="tx1"/>
           </a:solidFill>
@@ -3073,16 +3318,17 @@
           <a:cs typeface="+mn-cs"/>
         </a:defRPr>
       </a:lvl1pPr>
-      <a:lvl2pPr marL="685800" indent="-228600" algn="l" defTabSz="914400" rtl="0" eaLnBrk="1" latinLnBrk="0" hangingPunct="1">
-        <a:lnSpc>
-          <a:spcPct val="90000"/>
-        </a:lnSpc>
+      <a:lvl2pPr marL="822960" indent="-285750" algn="l" rtl="0" eaLnBrk="1" latinLnBrk="0" hangingPunct="1">
         <a:spcBef>
-          <a:spcPts val="500"/>
+          <a:spcPct val="20000"/>
         </a:spcBef>
-        <a:buFont typeface="Arial" panose="020B0604020202020204" pitchFamily="34" charset="0"/>
-        <a:buChar char="•"/>
-        <a:defRPr sz="2400" kern="1200">
+        <a:buClr>
+          <a:schemeClr val="accent1"/>
+        </a:buClr>
+        <a:buSzPct val="95000"/>
+        <a:buFont typeface="Verdana"/>
+        <a:buChar char="›"/>
+        <a:defRPr kumimoji="0" sz="2600" kern="1200">
           <a:solidFill>
             <a:schemeClr val="tx1"/>
           </a:solidFill>
@@ -3091,16 +3337,16 @@
           <a:cs typeface="+mn-cs"/>
         </a:defRPr>
       </a:lvl2pPr>
-      <a:lvl3pPr marL="1143000" indent="-228600" algn="l" defTabSz="914400" rtl="0" eaLnBrk="1" latinLnBrk="0" hangingPunct="1">
-        <a:lnSpc>
-          <a:spcPct val="90000"/>
-        </a:lnSpc>
+      <a:lvl3pPr marL="1106424" indent="-228600" algn="l" rtl="0" eaLnBrk="1" latinLnBrk="0" hangingPunct="1">
         <a:spcBef>
-          <a:spcPts val="500"/>
+          <a:spcPct val="20000"/>
         </a:spcBef>
-        <a:buFont typeface="Arial" panose="020B0604020202020204" pitchFamily="34" charset="0"/>
-        <a:buChar char="•"/>
-        <a:defRPr sz="2000" kern="1200">
+        <a:buClr>
+          <a:schemeClr val="accent1"/>
+        </a:buClr>
+        <a:buFont typeface="Wingdings 2"/>
+        <a:buChar char=""/>
+        <a:defRPr kumimoji="0" sz="2400" kern="1200">
           <a:solidFill>
             <a:schemeClr val="tx1"/>
           </a:solidFill>
@@ -3109,16 +3355,16 @@
           <a:cs typeface="+mn-cs"/>
         </a:defRPr>
       </a:lvl3pPr>
-      <a:lvl4pPr marL="1600200" indent="-228600" algn="l" defTabSz="914400" rtl="0" eaLnBrk="1" latinLnBrk="0" hangingPunct="1">
-        <a:lnSpc>
-          <a:spcPct val="90000"/>
-        </a:lnSpc>
+      <a:lvl4pPr marL="1371600" indent="-210312" algn="l" rtl="0" eaLnBrk="1" latinLnBrk="0" hangingPunct="1">
         <a:spcBef>
-          <a:spcPts val="500"/>
+          <a:spcPct val="20000"/>
         </a:spcBef>
-        <a:buFont typeface="Arial" panose="020B0604020202020204" pitchFamily="34" charset="0"/>
-        <a:buChar char="•"/>
-        <a:defRPr sz="1800" kern="1200">
+        <a:buClr>
+          <a:schemeClr val="accent1"/>
+        </a:buClr>
+        <a:buFont typeface="Wingdings 2"/>
+        <a:buChar char=""/>
+        <a:defRPr kumimoji="0" sz="2000" kern="1200">
           <a:solidFill>
             <a:schemeClr val="tx1"/>
           </a:solidFill>
@@ -3127,16 +3373,18 @@
           <a:cs typeface="+mn-cs"/>
         </a:defRPr>
       </a:lvl4pPr>
-      <a:lvl5pPr marL="2057400" indent="-228600" algn="l" defTabSz="914400" rtl="0" eaLnBrk="1" latinLnBrk="0" hangingPunct="1">
-        <a:lnSpc>
-          <a:spcPct val="90000"/>
-        </a:lnSpc>
+      <a:lvl5pPr marL="1600200" indent="-210312" algn="l" rtl="0" eaLnBrk="1" latinLnBrk="0" hangingPunct="1">
         <a:spcBef>
-          <a:spcPts val="500"/>
+          <a:spcPct val="20000"/>
         </a:spcBef>
-        <a:buFont typeface="Arial" panose="020B0604020202020204" pitchFamily="34" charset="0"/>
-        <a:buChar char="•"/>
-        <a:defRPr sz="1800" kern="1200">
+        <a:buClr>
+          <a:schemeClr val="accent1">
+            <a:tint val="75000"/>
+          </a:schemeClr>
+        </a:buClr>
+        <a:buFont typeface="Wingdings 2"/>
+        <a:buChar char=""/>
+        <a:defRPr kumimoji="0" sz="1900" kern="1200">
           <a:solidFill>
             <a:schemeClr val="tx1"/>
           </a:solidFill>
@@ -3145,16 +3393,18 @@
           <a:cs typeface="+mn-cs"/>
         </a:defRPr>
       </a:lvl5pPr>
-      <a:lvl6pPr marL="2514600" indent="-228600" algn="l" defTabSz="914400" rtl="0" eaLnBrk="1" latinLnBrk="0" hangingPunct="1">
-        <a:lnSpc>
-          <a:spcPct val="90000"/>
-        </a:lnSpc>
+      <a:lvl6pPr marL="1828800" indent="-210312" algn="l" rtl="0" eaLnBrk="1" latinLnBrk="0" hangingPunct="1">
         <a:spcBef>
-          <a:spcPts val="500"/>
+          <a:spcPct val="20000"/>
         </a:spcBef>
-        <a:buFont typeface="Arial" panose="020B0604020202020204" pitchFamily="34" charset="0"/>
-        <a:buChar char="•"/>
-        <a:defRPr sz="1800" kern="1200">
+        <a:buClr>
+          <a:schemeClr val="accent1">
+            <a:tint val="75000"/>
+          </a:schemeClr>
+        </a:buClr>
+        <a:buFont typeface="Wingdings 2"/>
+        <a:buChar char=""/>
+        <a:defRPr kumimoji="0" sz="1800" kern="1200">
           <a:solidFill>
             <a:schemeClr val="tx1"/>
           </a:solidFill>
@@ -3163,16 +3413,18 @@
           <a:cs typeface="+mn-cs"/>
         </a:defRPr>
       </a:lvl6pPr>
-      <a:lvl7pPr marL="2971800" indent="-228600" algn="l" defTabSz="914400" rtl="0" eaLnBrk="1" latinLnBrk="0" hangingPunct="1">
-        <a:lnSpc>
-          <a:spcPct val="90000"/>
-        </a:lnSpc>
+      <a:lvl7pPr marL="2084832" indent="-210312" algn="l" rtl="0" eaLnBrk="1" latinLnBrk="0" hangingPunct="1">
         <a:spcBef>
-          <a:spcPts val="500"/>
+          <a:spcPct val="20000"/>
         </a:spcBef>
-        <a:buFont typeface="Arial" panose="020B0604020202020204" pitchFamily="34" charset="0"/>
-        <a:buChar char="•"/>
-        <a:defRPr sz="1800" kern="1200">
+        <a:buClr>
+          <a:schemeClr val="accent1">
+            <a:tint val="75000"/>
+          </a:schemeClr>
+        </a:buClr>
+        <a:buFont typeface="Wingdings 2"/>
+        <a:buChar char=""/>
+        <a:defRPr kumimoji="0" sz="1600" kern="1200">
           <a:solidFill>
             <a:schemeClr val="tx1"/>
           </a:solidFill>
@@ -3181,16 +3433,18 @@
           <a:cs typeface="+mn-cs"/>
         </a:defRPr>
       </a:lvl7pPr>
-      <a:lvl8pPr marL="3429000" indent="-228600" algn="l" defTabSz="914400" rtl="0" eaLnBrk="1" latinLnBrk="0" hangingPunct="1">
-        <a:lnSpc>
-          <a:spcPct val="90000"/>
-        </a:lnSpc>
+      <a:lvl8pPr marL="2286000" indent="-182880" algn="l" rtl="0" eaLnBrk="1" latinLnBrk="0" hangingPunct="1">
         <a:spcBef>
-          <a:spcPts val="500"/>
+          <a:spcPct val="20000"/>
         </a:spcBef>
-        <a:buFont typeface="Arial" panose="020B0604020202020204" pitchFamily="34" charset="0"/>
-        <a:buChar char="•"/>
-        <a:defRPr sz="1800" kern="1200">
+        <a:buClr>
+          <a:schemeClr val="accent1">
+            <a:tint val="75000"/>
+          </a:schemeClr>
+        </a:buClr>
+        <a:buFont typeface="Wingdings 2"/>
+        <a:buChar char=""/>
+        <a:defRPr kumimoji="0" sz="1600" kern="1200">
           <a:solidFill>
             <a:schemeClr val="tx1"/>
           </a:solidFill>
@@ -3199,16 +3453,18 @@
           <a:cs typeface="+mn-cs"/>
         </a:defRPr>
       </a:lvl8pPr>
-      <a:lvl9pPr marL="3886200" indent="-228600" algn="l" defTabSz="914400" rtl="0" eaLnBrk="1" latinLnBrk="0" hangingPunct="1">
-        <a:lnSpc>
-          <a:spcPct val="90000"/>
-        </a:lnSpc>
+      <a:lvl9pPr marL="2514600" indent="-182880" algn="l" rtl="0" eaLnBrk="1" latinLnBrk="0" hangingPunct="1">
         <a:spcBef>
-          <a:spcPts val="500"/>
+          <a:spcPct val="20000"/>
         </a:spcBef>
-        <a:buFont typeface="Arial" panose="020B0604020202020204" pitchFamily="34" charset="0"/>
-        <a:buChar char="•"/>
-        <a:defRPr sz="1800" kern="1200">
+        <a:buClr>
+          <a:schemeClr val="accent1">
+            <a:tint val="75000"/>
+          </a:schemeClr>
+        </a:buClr>
+        <a:buFont typeface="Wingdings 2"/>
+        <a:buChar char=""/>
+        <a:defRPr kumimoji="0" sz="1600" kern="1200">
           <a:solidFill>
             <a:schemeClr val="tx1"/>
           </a:solidFill>
@@ -3219,11 +3475,8 @@
       </a:lvl9pPr>
     </p:bodyStyle>
     <p:otherStyle>
-      <a:defPPr>
-        <a:defRPr lang="ru-RU"/>
-      </a:defPPr>
-      <a:lvl1pPr marL="0" algn="l" defTabSz="914400" rtl="0" eaLnBrk="1" latinLnBrk="0" hangingPunct="1">
-        <a:defRPr sz="1800" kern="1200">
+      <a:lvl1pPr marL="0" algn="l" rtl="0" eaLnBrk="1" latinLnBrk="0" hangingPunct="1">
+        <a:defRPr kumimoji="0" kern="1200">
           <a:solidFill>
             <a:schemeClr val="tx1"/>
           </a:solidFill>
@@ -3232,8 +3485,8 @@
           <a:cs typeface="+mn-cs"/>
         </a:defRPr>
       </a:lvl1pPr>
-      <a:lvl2pPr marL="457200" algn="l" defTabSz="914400" rtl="0" eaLnBrk="1" latinLnBrk="0" hangingPunct="1">
-        <a:defRPr sz="1800" kern="1200">
+      <a:lvl2pPr marL="457200" algn="l" rtl="0" eaLnBrk="1" latinLnBrk="0" hangingPunct="1">
+        <a:defRPr kumimoji="0" kern="1200">
           <a:solidFill>
             <a:schemeClr val="tx1"/>
           </a:solidFill>
@@ -3242,8 +3495,8 @@
           <a:cs typeface="+mn-cs"/>
         </a:defRPr>
       </a:lvl2pPr>
-      <a:lvl3pPr marL="914400" algn="l" defTabSz="914400" rtl="0" eaLnBrk="1" latinLnBrk="0" hangingPunct="1">
-        <a:defRPr sz="1800" kern="1200">
+      <a:lvl3pPr marL="914400" algn="l" rtl="0" eaLnBrk="1" latinLnBrk="0" hangingPunct="1">
+        <a:defRPr kumimoji="0" kern="1200">
           <a:solidFill>
             <a:schemeClr val="tx1"/>
           </a:solidFill>
@@ -3252,8 +3505,8 @@
           <a:cs typeface="+mn-cs"/>
         </a:defRPr>
       </a:lvl3pPr>
-      <a:lvl4pPr marL="1371600" algn="l" defTabSz="914400" rtl="0" eaLnBrk="1" latinLnBrk="0" hangingPunct="1">
-        <a:defRPr sz="1800" kern="1200">
+      <a:lvl4pPr marL="1371600" algn="l" rtl="0" eaLnBrk="1" latinLnBrk="0" hangingPunct="1">
+        <a:defRPr kumimoji="0" kern="1200">
           <a:solidFill>
             <a:schemeClr val="tx1"/>
           </a:solidFill>
@@ -3262,8 +3515,8 @@
           <a:cs typeface="+mn-cs"/>
         </a:defRPr>
       </a:lvl4pPr>
-      <a:lvl5pPr marL="1828800" algn="l" defTabSz="914400" rtl="0" eaLnBrk="1" latinLnBrk="0" hangingPunct="1">
-        <a:defRPr sz="1800" kern="1200">
+      <a:lvl5pPr marL="1828800" algn="l" rtl="0" eaLnBrk="1" latinLnBrk="0" hangingPunct="1">
+        <a:defRPr kumimoji="0" kern="1200">
           <a:solidFill>
             <a:schemeClr val="tx1"/>
           </a:solidFill>
@@ -3272,8 +3525,8 @@
           <a:cs typeface="+mn-cs"/>
         </a:defRPr>
       </a:lvl5pPr>
-      <a:lvl6pPr marL="2286000" algn="l" defTabSz="914400" rtl="0" eaLnBrk="1" latinLnBrk="0" hangingPunct="1">
-        <a:defRPr sz="1800" kern="1200">
+      <a:lvl6pPr marL="2286000" algn="l" rtl="0" eaLnBrk="1" latinLnBrk="0" hangingPunct="1">
+        <a:defRPr kumimoji="0" kern="1200">
           <a:solidFill>
             <a:schemeClr val="tx1"/>
           </a:solidFill>
@@ -3282,8 +3535,8 @@
           <a:cs typeface="+mn-cs"/>
         </a:defRPr>
       </a:lvl6pPr>
-      <a:lvl7pPr marL="2743200" algn="l" defTabSz="914400" rtl="0" eaLnBrk="1" latinLnBrk="0" hangingPunct="1">
-        <a:defRPr sz="1800" kern="1200">
+      <a:lvl7pPr marL="2743200" algn="l" rtl="0" eaLnBrk="1" latinLnBrk="0" hangingPunct="1">
+        <a:defRPr kumimoji="0" kern="1200">
           <a:solidFill>
             <a:schemeClr val="tx1"/>
           </a:solidFill>
@@ -3292,8 +3545,8 @@
           <a:cs typeface="+mn-cs"/>
         </a:defRPr>
       </a:lvl7pPr>
-      <a:lvl8pPr marL="3200400" algn="l" defTabSz="914400" rtl="0" eaLnBrk="1" latinLnBrk="0" hangingPunct="1">
-        <a:defRPr sz="1800" kern="1200">
+      <a:lvl8pPr marL="3200400" algn="l" rtl="0" eaLnBrk="1" latinLnBrk="0" hangingPunct="1">
+        <a:defRPr kumimoji="0" kern="1200">
           <a:solidFill>
             <a:schemeClr val="tx1"/>
           </a:solidFill>
@@ -3302,8 +3555,8 @@
           <a:cs typeface="+mn-cs"/>
         </a:defRPr>
       </a:lvl8pPr>
-      <a:lvl9pPr marL="3657600" algn="l" defTabSz="914400" rtl="0" eaLnBrk="1" latinLnBrk="0" hangingPunct="1">
-        <a:defRPr sz="1800" kern="1200">
+      <a:lvl9pPr marL="3657600" algn="l" rtl="0" eaLnBrk="1" latinLnBrk="0" hangingPunct="1">
+        <a:defRPr kumimoji="0" kern="1200">
           <a:solidFill>
             <a:schemeClr val="tx1"/>
           </a:solidFill>
@@ -3339,7 +3592,7 @@
           <p:cNvPr id="2" name="Заголовок 1">
             <a:extLst>
               <a:ext uri="{FF2B5EF4-FFF2-40B4-BE49-F238E27FC236}">
-                <a16:creationId xmlns:a16="http://schemas.microsoft.com/office/drawing/2014/main" id="{DBB751FF-877A-44BC-A179-3673B9556B01}"/>
+                <a16:creationId xmlns:a16="http://schemas.microsoft.com/office/drawing/2014/main" xmlns="" id="{DBB751FF-877A-44BC-A179-3673B9556B01}"/>
               </a:ext>
             </a:extLst>
           </p:cNvPr>
@@ -3368,7 +3621,7 @@
           <p:cNvPr id="3" name="Подзаголовок 2">
             <a:extLst>
               <a:ext uri="{FF2B5EF4-FFF2-40B4-BE49-F238E27FC236}">
-                <a16:creationId xmlns:a16="http://schemas.microsoft.com/office/drawing/2014/main" id="{E8A1B073-0C20-4360-AFF2-9F5F72DFE5F2}"/>
+                <a16:creationId xmlns:a16="http://schemas.microsoft.com/office/drawing/2014/main" xmlns="" id="{E8A1B073-0C20-4360-AFF2-9F5F72DFE5F2}"/>
               </a:ext>
             </a:extLst>
           </p:cNvPr>
@@ -3379,7 +3632,12 @@
             <p:ph type="subTitle" idx="1"/>
           </p:nvPr>
         </p:nvSpPr>
-        <p:spPr/>
+        <p:spPr>
+          <a:xfrm>
+            <a:off x="-2555412" y="2198711"/>
+            <a:ext cx="10750549" cy="1752600"/>
+          </a:xfrm>
+        </p:spPr>
         <p:txBody>
           <a:bodyPr/>
           <a:lstStyle/>
@@ -3415,7 +3673,7 @@
           <p:cNvPr id="9" name="Рисунок 8">
             <a:extLst>
               <a:ext uri="{FF2B5EF4-FFF2-40B4-BE49-F238E27FC236}">
-                <a16:creationId xmlns:a16="http://schemas.microsoft.com/office/drawing/2014/main" id="{F4FF435B-E86B-4831-BBCB-E9B9E812B07A}"/>
+                <a16:creationId xmlns:a16="http://schemas.microsoft.com/office/drawing/2014/main" xmlns="" id="{F4FF435B-E86B-4831-BBCB-E9B9E812B07A}"/>
               </a:ext>
             </a:extLst>
           </p:cNvPr>
@@ -3428,7 +3686,7 @@
           <a:blip r:embed="rId2">
             <a:extLst>
               <a:ext uri="{28A0092B-C50C-407E-A947-70E740481C1C}">
-                <a14:useLocalDpi xmlns:a14="http://schemas.microsoft.com/office/drawing/2010/main" val="0"/>
+                <a14:useLocalDpi xmlns:a14="http://schemas.microsoft.com/office/drawing/2010/main" xmlns="" val="0"/>
               </a:ext>
             </a:extLst>
           </a:blip>
@@ -3451,7 +3709,7 @@
           <p:cNvPr id="11" name="Рисунок 10">
             <a:extLst>
               <a:ext uri="{FF2B5EF4-FFF2-40B4-BE49-F238E27FC236}">
-                <a16:creationId xmlns:a16="http://schemas.microsoft.com/office/drawing/2014/main" id="{EFF22448-01B3-4A70-AC0B-80F3EC36E781}"/>
+                <a16:creationId xmlns:a16="http://schemas.microsoft.com/office/drawing/2014/main" xmlns="" id="{EFF22448-01B3-4A70-AC0B-80F3EC36E781}"/>
               </a:ext>
             </a:extLst>
           </p:cNvPr>
@@ -3464,7 +3722,7 @@
           <a:blip r:embed="rId3">
             <a:extLst>
               <a:ext uri="{28A0092B-C50C-407E-A947-70E740481C1C}">
-                <a14:useLocalDpi xmlns:a14="http://schemas.microsoft.com/office/drawing/2010/main" val="0"/>
+                <a14:useLocalDpi xmlns:a14="http://schemas.microsoft.com/office/drawing/2010/main" xmlns="" val="0"/>
               </a:ext>
             </a:extLst>
           </a:blip>
@@ -3487,7 +3745,7 @@
           <p:cNvPr id="13" name="Рисунок 12">
             <a:extLst>
               <a:ext uri="{FF2B5EF4-FFF2-40B4-BE49-F238E27FC236}">
-                <a16:creationId xmlns:a16="http://schemas.microsoft.com/office/drawing/2014/main" id="{EAB78659-6154-4618-869E-18492A2445E2}"/>
+                <a16:creationId xmlns:a16="http://schemas.microsoft.com/office/drawing/2014/main" xmlns="" id="{EAB78659-6154-4618-869E-18492A2445E2}"/>
               </a:ext>
             </a:extLst>
           </p:cNvPr>
@@ -3500,7 +3758,7 @@
           <a:blip r:embed="rId4">
             <a:extLst>
               <a:ext uri="{28A0092B-C50C-407E-A947-70E740481C1C}">
-                <a14:useLocalDpi xmlns:a14="http://schemas.microsoft.com/office/drawing/2010/main" val="0"/>
+                <a14:useLocalDpi xmlns:a14="http://schemas.microsoft.com/office/drawing/2010/main" xmlns="" val="0"/>
               </a:ext>
             </a:extLst>
           </a:blip>
@@ -3521,7 +3779,7 @@
     </p:spTree>
     <p:extLst>
       <p:ext uri="{BB962C8B-B14F-4D97-AF65-F5344CB8AC3E}">
-        <p14:creationId xmlns:p14="http://schemas.microsoft.com/office/powerpoint/2010/main" val="275784567"/>
+        <p14:creationId xmlns:p14="http://schemas.microsoft.com/office/powerpoint/2010/main" xmlns="" val="275784567"/>
       </p:ext>
     </p:extLst>
   </p:cSld>
@@ -3553,7 +3811,7 @@
           <p:cNvPr id="8" name="Заголовок 7">
             <a:extLst>
               <a:ext uri="{FF2B5EF4-FFF2-40B4-BE49-F238E27FC236}">
-                <a16:creationId xmlns:a16="http://schemas.microsoft.com/office/drawing/2014/main" id="{33851FEA-AC01-4129-BB36-207193DF622E}"/>
+                <a16:creationId xmlns:a16="http://schemas.microsoft.com/office/drawing/2014/main" xmlns="" id="{33851FEA-AC01-4129-BB36-207193DF622E}"/>
               </a:ext>
             </a:extLst>
           </p:cNvPr>
@@ -3581,7 +3839,7 @@
           <p:cNvPr id="9" name="Объект 8">
             <a:extLst>
               <a:ext uri="{FF2B5EF4-FFF2-40B4-BE49-F238E27FC236}">
-                <a16:creationId xmlns:a16="http://schemas.microsoft.com/office/drawing/2014/main" id="{C54E5FA0-227C-49B8-8FAF-14EB62E2B10A}"/>
+                <a16:creationId xmlns:a16="http://schemas.microsoft.com/office/drawing/2014/main" xmlns="" id="{C54E5FA0-227C-49B8-8FAF-14EB62E2B10A}"/>
               </a:ext>
             </a:extLst>
           </p:cNvPr>
@@ -3648,7 +3906,7 @@
     </p:spTree>
     <p:extLst>
       <p:ext uri="{BB962C8B-B14F-4D97-AF65-F5344CB8AC3E}">
-        <p14:creationId xmlns:p14="http://schemas.microsoft.com/office/powerpoint/2010/main" val="2593718060"/>
+        <p14:creationId xmlns:p14="http://schemas.microsoft.com/office/powerpoint/2010/main" xmlns="" val="2593718060"/>
       </p:ext>
     </p:extLst>
   </p:cSld>
@@ -3680,7 +3938,7 @@
           <p:cNvPr id="2" name="Заголовок 1">
             <a:extLst>
               <a:ext uri="{FF2B5EF4-FFF2-40B4-BE49-F238E27FC236}">
-                <a16:creationId xmlns:a16="http://schemas.microsoft.com/office/drawing/2014/main" id="{641A2158-0F64-4A03-A8F1-A73938E51EEF}"/>
+                <a16:creationId xmlns:a16="http://schemas.microsoft.com/office/drawing/2014/main" xmlns="" id="{641A2158-0F64-4A03-A8F1-A73938E51EEF}"/>
               </a:ext>
             </a:extLst>
           </p:cNvPr>
@@ -3708,7 +3966,7 @@
           <p:cNvPr id="3" name="Объект 2">
             <a:extLst>
               <a:ext uri="{FF2B5EF4-FFF2-40B4-BE49-F238E27FC236}">
-                <a16:creationId xmlns:a16="http://schemas.microsoft.com/office/drawing/2014/main" id="{92209E04-156D-48D4-B913-CBCD80A19EA2}"/>
+                <a16:creationId xmlns:a16="http://schemas.microsoft.com/office/drawing/2014/main" xmlns="" id="{92209E04-156D-48D4-B913-CBCD80A19EA2}"/>
               </a:ext>
             </a:extLst>
           </p:cNvPr>
@@ -3767,7 +4025,7 @@
     </p:spTree>
     <p:extLst>
       <p:ext uri="{BB962C8B-B14F-4D97-AF65-F5344CB8AC3E}">
-        <p14:creationId xmlns:p14="http://schemas.microsoft.com/office/powerpoint/2010/main" val="3960512477"/>
+        <p14:creationId xmlns:p14="http://schemas.microsoft.com/office/powerpoint/2010/main" xmlns="" val="3960512477"/>
       </p:ext>
     </p:extLst>
   </p:cSld>
@@ -3799,7 +4057,7 @@
           <p:cNvPr id="2" name="Заголовок 1">
             <a:extLst>
               <a:ext uri="{FF2B5EF4-FFF2-40B4-BE49-F238E27FC236}">
-                <a16:creationId xmlns:a16="http://schemas.microsoft.com/office/drawing/2014/main" id="{C8A7B6B8-1566-4303-9891-F1C78678CF9D}"/>
+                <a16:creationId xmlns:a16="http://schemas.microsoft.com/office/drawing/2014/main" xmlns="" id="{C8A7B6B8-1566-4303-9891-F1C78678CF9D}"/>
               </a:ext>
             </a:extLst>
           </p:cNvPr>
@@ -3827,7 +4085,7 @@
           <p:cNvPr id="3" name="Объект 2">
             <a:extLst>
               <a:ext uri="{FF2B5EF4-FFF2-40B4-BE49-F238E27FC236}">
-                <a16:creationId xmlns:a16="http://schemas.microsoft.com/office/drawing/2014/main" id="{C3A8B2E5-1727-4096-AC36-84AB58CAED38}"/>
+                <a16:creationId xmlns:a16="http://schemas.microsoft.com/office/drawing/2014/main" xmlns="" id="{C3A8B2E5-1727-4096-AC36-84AB58CAED38}"/>
               </a:ext>
             </a:extLst>
           </p:cNvPr>
@@ -3873,7 +4131,7 @@
           <p:cNvPr id="5" name="Рисунок 4">
             <a:extLst>
               <a:ext uri="{FF2B5EF4-FFF2-40B4-BE49-F238E27FC236}">
-                <a16:creationId xmlns:a16="http://schemas.microsoft.com/office/drawing/2014/main" id="{3E14B46E-7916-442F-BF65-41E2E0FD3137}"/>
+                <a16:creationId xmlns:a16="http://schemas.microsoft.com/office/drawing/2014/main" xmlns="" id="{3E14B46E-7916-442F-BF65-41E2E0FD3137}"/>
               </a:ext>
             </a:extLst>
           </p:cNvPr>
@@ -3903,7 +4161,7 @@
           <p:cNvPr id="7" name="Рисунок 6">
             <a:extLst>
               <a:ext uri="{FF2B5EF4-FFF2-40B4-BE49-F238E27FC236}">
-                <a16:creationId xmlns:a16="http://schemas.microsoft.com/office/drawing/2014/main" id="{6C507D91-ACCF-4280-9CD0-0D5052AEF22C}"/>
+                <a16:creationId xmlns:a16="http://schemas.microsoft.com/office/drawing/2014/main" xmlns="" id="{6C507D91-ACCF-4280-9CD0-0D5052AEF22C}"/>
               </a:ext>
             </a:extLst>
           </p:cNvPr>
@@ -3931,7 +4189,7 @@
     </p:spTree>
     <p:extLst>
       <p:ext uri="{BB962C8B-B14F-4D97-AF65-F5344CB8AC3E}">
-        <p14:creationId xmlns:p14="http://schemas.microsoft.com/office/powerpoint/2010/main" val="706321749"/>
+        <p14:creationId xmlns:p14="http://schemas.microsoft.com/office/powerpoint/2010/main" xmlns="" val="706321749"/>
       </p:ext>
     </p:extLst>
   </p:cSld>
@@ -3963,7 +4221,7 @@
           <p:cNvPr id="2" name="Заголовок 1">
             <a:extLst>
               <a:ext uri="{FF2B5EF4-FFF2-40B4-BE49-F238E27FC236}">
-                <a16:creationId xmlns:a16="http://schemas.microsoft.com/office/drawing/2014/main" id="{9010115F-D2DD-48B5-967C-BDA82A44ABB1}"/>
+                <a16:creationId xmlns:a16="http://schemas.microsoft.com/office/drawing/2014/main" xmlns="" id="{9010115F-D2DD-48B5-967C-BDA82A44ABB1}"/>
               </a:ext>
             </a:extLst>
           </p:cNvPr>
@@ -3991,7 +4249,7 @@
           <p:cNvPr id="5" name="Объект 4">
             <a:extLst>
               <a:ext uri="{FF2B5EF4-FFF2-40B4-BE49-F238E27FC236}">
-                <a16:creationId xmlns:a16="http://schemas.microsoft.com/office/drawing/2014/main" id="{D6BD1D02-0786-4BE6-B268-73C4F5F20D8C}"/>
+                <a16:creationId xmlns:a16="http://schemas.microsoft.com/office/drawing/2014/main" xmlns="" id="{D6BD1D02-0786-4BE6-B268-73C4F5F20D8C}"/>
               </a:ext>
             </a:extLst>
           </p:cNvPr>
@@ -4020,7 +4278,7 @@
           <p:cNvPr id="7" name="Рисунок 6">
             <a:extLst>
               <a:ext uri="{FF2B5EF4-FFF2-40B4-BE49-F238E27FC236}">
-                <a16:creationId xmlns:a16="http://schemas.microsoft.com/office/drawing/2014/main" id="{93F173FF-E9C8-41C8-AFD1-E209DD6E7228}"/>
+                <a16:creationId xmlns:a16="http://schemas.microsoft.com/office/drawing/2014/main" xmlns="" id="{93F173FF-E9C8-41C8-AFD1-E209DD6E7228}"/>
               </a:ext>
             </a:extLst>
           </p:cNvPr>
@@ -4050,7 +4308,7 @@
           <p:cNvPr id="9" name="Рисунок 8">
             <a:extLst>
               <a:ext uri="{FF2B5EF4-FFF2-40B4-BE49-F238E27FC236}">
-                <a16:creationId xmlns:a16="http://schemas.microsoft.com/office/drawing/2014/main" id="{555827A3-09A9-4FE1-8D1C-308939518AB2}"/>
+                <a16:creationId xmlns:a16="http://schemas.microsoft.com/office/drawing/2014/main" xmlns="" id="{555827A3-09A9-4FE1-8D1C-308939518AB2}"/>
               </a:ext>
             </a:extLst>
           </p:cNvPr>
@@ -4078,7 +4336,7 @@
     </p:spTree>
     <p:extLst>
       <p:ext uri="{BB962C8B-B14F-4D97-AF65-F5344CB8AC3E}">
-        <p14:creationId xmlns:p14="http://schemas.microsoft.com/office/powerpoint/2010/main" val="2281512641"/>
+        <p14:creationId xmlns:p14="http://schemas.microsoft.com/office/powerpoint/2010/main" xmlns="" val="2281512641"/>
       </p:ext>
     </p:extLst>
   </p:cSld>
@@ -4110,7 +4368,7 @@
           <p:cNvPr id="2" name="Заголовок 1">
             <a:extLst>
               <a:ext uri="{FF2B5EF4-FFF2-40B4-BE49-F238E27FC236}">
-                <a16:creationId xmlns:a16="http://schemas.microsoft.com/office/drawing/2014/main" id="{EA744A14-2738-4BE0-A3DB-033AB3810F3E}"/>
+                <a16:creationId xmlns:a16="http://schemas.microsoft.com/office/drawing/2014/main" xmlns="" id="{EA744A14-2738-4BE0-A3DB-033AB3810F3E}"/>
               </a:ext>
             </a:extLst>
           </p:cNvPr>
@@ -4142,7 +4400,7 @@
           <p:cNvPr id="5" name="Объект 4">
             <a:extLst>
               <a:ext uri="{FF2B5EF4-FFF2-40B4-BE49-F238E27FC236}">
-                <a16:creationId xmlns:a16="http://schemas.microsoft.com/office/drawing/2014/main" id="{788D9D13-E06B-4023-B0BB-3919C95DF814}"/>
+                <a16:creationId xmlns:a16="http://schemas.microsoft.com/office/drawing/2014/main" xmlns="" id="{788D9D13-E06B-4023-B0BB-3919C95DF814}"/>
               </a:ext>
             </a:extLst>
           </p:cNvPr>
@@ -4171,7 +4429,7 @@
           <p:cNvPr id="7" name="Рисунок 6">
             <a:extLst>
               <a:ext uri="{FF2B5EF4-FFF2-40B4-BE49-F238E27FC236}">
-                <a16:creationId xmlns:a16="http://schemas.microsoft.com/office/drawing/2014/main" id="{54506421-D15F-49ED-8D0E-56FAF42EF346}"/>
+                <a16:creationId xmlns:a16="http://schemas.microsoft.com/office/drawing/2014/main" xmlns="" id="{54506421-D15F-49ED-8D0E-56FAF42EF346}"/>
               </a:ext>
             </a:extLst>
           </p:cNvPr>
@@ -4201,7 +4459,7 @@
           <p:cNvPr id="9" name="Рисунок 8">
             <a:extLst>
               <a:ext uri="{FF2B5EF4-FFF2-40B4-BE49-F238E27FC236}">
-                <a16:creationId xmlns:a16="http://schemas.microsoft.com/office/drawing/2014/main" id="{ED88EA5A-4A33-4715-AB68-B14A895FD40C}"/>
+                <a16:creationId xmlns:a16="http://schemas.microsoft.com/office/drawing/2014/main" xmlns="" id="{ED88EA5A-4A33-4715-AB68-B14A895FD40C}"/>
               </a:ext>
             </a:extLst>
           </p:cNvPr>
@@ -4231,7 +4489,7 @@
           <p:cNvPr id="11" name="Рисунок 10">
             <a:extLst>
               <a:ext uri="{FF2B5EF4-FFF2-40B4-BE49-F238E27FC236}">
-                <a16:creationId xmlns:a16="http://schemas.microsoft.com/office/drawing/2014/main" id="{A5FD402F-20FE-402B-AA91-2848801D64A3}"/>
+                <a16:creationId xmlns:a16="http://schemas.microsoft.com/office/drawing/2014/main" xmlns="" id="{A5FD402F-20FE-402B-AA91-2848801D64A3}"/>
               </a:ext>
             </a:extLst>
           </p:cNvPr>
@@ -4259,7 +4517,7 @@
     </p:spTree>
     <p:extLst>
       <p:ext uri="{BB962C8B-B14F-4D97-AF65-F5344CB8AC3E}">
-        <p14:creationId xmlns:p14="http://schemas.microsoft.com/office/powerpoint/2010/main" val="2207126043"/>
+        <p14:creationId xmlns:p14="http://schemas.microsoft.com/office/powerpoint/2010/main" xmlns="" val="2207126043"/>
       </p:ext>
     </p:extLst>
   </p:cSld>
@@ -4291,7 +4549,7 @@
           <p:cNvPr id="2" name="Заголовок 1">
             <a:extLst>
               <a:ext uri="{FF2B5EF4-FFF2-40B4-BE49-F238E27FC236}">
-                <a16:creationId xmlns:a16="http://schemas.microsoft.com/office/drawing/2014/main" id="{7EF16AE7-C7F4-4D96-966B-CC28A4F99901}"/>
+                <a16:creationId xmlns:a16="http://schemas.microsoft.com/office/drawing/2014/main" xmlns="" id="{7EF16AE7-C7F4-4D96-966B-CC28A4F99901}"/>
               </a:ext>
             </a:extLst>
           </p:cNvPr>
@@ -4304,7 +4562,9 @@
         </p:nvSpPr>
         <p:spPr/>
         <p:txBody>
-          <a:bodyPr/>
+          <a:bodyPr>
+            <a:normAutofit/>
+          </a:bodyPr>
           <a:lstStyle/>
           <a:p>
             <a:r>
@@ -4319,7 +4579,7 @@
           <p:cNvPr id="5" name="Объект 4">
             <a:extLst>
               <a:ext uri="{FF2B5EF4-FFF2-40B4-BE49-F238E27FC236}">
-                <a16:creationId xmlns:a16="http://schemas.microsoft.com/office/drawing/2014/main" id="{358A0960-18BF-4083-916C-188DFEACD883}"/>
+                <a16:creationId xmlns:a16="http://schemas.microsoft.com/office/drawing/2014/main" xmlns="" id="{358A0960-18BF-4083-916C-188DFEACD883}"/>
               </a:ext>
             </a:extLst>
           </p:cNvPr>
@@ -4348,7 +4608,7 @@
           <p:cNvPr id="7" name="Рисунок 6">
             <a:extLst>
               <a:ext uri="{FF2B5EF4-FFF2-40B4-BE49-F238E27FC236}">
-                <a16:creationId xmlns:a16="http://schemas.microsoft.com/office/drawing/2014/main" id="{517DDAE0-A9F6-4158-B3FB-091BD1FBA4B5}"/>
+                <a16:creationId xmlns:a16="http://schemas.microsoft.com/office/drawing/2014/main" xmlns="" id="{517DDAE0-A9F6-4158-B3FB-091BD1FBA4B5}"/>
               </a:ext>
             </a:extLst>
           </p:cNvPr>
@@ -4376,7 +4636,7 @@
     </p:spTree>
     <p:extLst>
       <p:ext uri="{BB962C8B-B14F-4D97-AF65-F5344CB8AC3E}">
-        <p14:creationId xmlns:p14="http://schemas.microsoft.com/office/powerpoint/2010/main" val="1791094595"/>
+        <p14:creationId xmlns:p14="http://schemas.microsoft.com/office/powerpoint/2010/main" xmlns="" val="1791094595"/>
       </p:ext>
     </p:extLst>
   </p:cSld>
@@ -4405,98 +4665,10 @@
       </p:grpSpPr>
       <p:sp>
         <p:nvSpPr>
-          <p:cNvPr id="2" name="Заголовок 1">
-            <a:extLst>
-              <a:ext uri="{FF2B5EF4-FFF2-40B4-BE49-F238E27FC236}">
-                <a16:creationId xmlns:a16="http://schemas.microsoft.com/office/drawing/2014/main" id="{DD10D65C-5654-460D-A0C1-C9454AF933D2}"/>
-              </a:ext>
-            </a:extLst>
-          </p:cNvPr>
-          <p:cNvSpPr>
-            <a:spLocks noGrp="1"/>
-          </p:cNvSpPr>
-          <p:nvPr>
-            <p:ph type="title"/>
-          </p:nvPr>
-        </p:nvSpPr>
-        <p:spPr/>
-        <p:txBody>
-          <a:bodyPr/>
-          <a:lstStyle/>
-          <a:p>
-            <a:r>
-              <a:rPr lang="ru-RU" dirty="0"/>
-              <a:t>Использовали крутой </a:t>
-            </a:r>
-            <a:r>
-              <a:rPr lang="en-US" dirty="0"/>
-              <a:t>API</a:t>
-            </a:r>
-            <a:endParaRPr lang="ru-RU" dirty="0"/>
-          </a:p>
-        </p:txBody>
-      </p:sp>
-      <p:sp>
-        <p:nvSpPr>
-          <p:cNvPr id="3" name="Объект 2">
-            <a:extLst>
-              <a:ext uri="{FF2B5EF4-FFF2-40B4-BE49-F238E27FC236}">
-                <a16:creationId xmlns:a16="http://schemas.microsoft.com/office/drawing/2014/main" id="{1C97ACE5-C320-4234-8838-C2BD93CE4929}"/>
-              </a:ext>
-            </a:extLst>
-          </p:cNvPr>
-          <p:cNvSpPr>
-            <a:spLocks noGrp="1"/>
-          </p:cNvSpPr>
-          <p:nvPr>
-            <p:ph idx="1"/>
-          </p:nvPr>
-        </p:nvSpPr>
-        <p:spPr/>
-        <p:txBody>
-          <a:bodyPr/>
-          <a:lstStyle/>
-          <a:p>
-            <a:endParaRPr lang="ru-RU" dirty="0"/>
-          </a:p>
-        </p:txBody>
-      </p:sp>
-    </p:spTree>
-    <p:extLst>
-      <p:ext uri="{BB962C8B-B14F-4D97-AF65-F5344CB8AC3E}">
-        <p14:creationId xmlns:p14="http://schemas.microsoft.com/office/powerpoint/2010/main" val="1362388230"/>
-      </p:ext>
-    </p:extLst>
-  </p:cSld>
-  <p:clrMapOvr>
-    <a:masterClrMapping/>
-  </p:clrMapOvr>
-</p:sld>
-</file>
-
-<file path=ppt/slides/slide9.xml><?xml version="1.0" encoding="utf-8"?>
-<p:sld xmlns:a="http://schemas.openxmlformats.org/drawingml/2006/main" xmlns:r="http://schemas.openxmlformats.org/officeDocument/2006/relationships" xmlns:p="http://schemas.openxmlformats.org/presentationml/2006/main">
-  <p:cSld>
-    <p:spTree>
-      <p:nvGrpSpPr>
-        <p:cNvPr id="1" name=""/>
-        <p:cNvGrpSpPr/>
-        <p:nvPr/>
-      </p:nvGrpSpPr>
-      <p:grpSpPr>
-        <a:xfrm>
-          <a:off x="0" y="0"/>
-          <a:ext cx="0" cy="0"/>
-          <a:chOff x="0" y="0"/>
-          <a:chExt cx="0" cy="0"/>
-        </a:xfrm>
-      </p:grpSpPr>
-      <p:sp>
-        <p:nvSpPr>
           <p:cNvPr id="4" name="Заголовок 3">
             <a:extLst>
               <a:ext uri="{FF2B5EF4-FFF2-40B4-BE49-F238E27FC236}">
-                <a16:creationId xmlns:a16="http://schemas.microsoft.com/office/drawing/2014/main" id="{BEF1595D-7A97-4FC7-9A8A-BC64D604BD45}"/>
+                <a16:creationId xmlns:a16="http://schemas.microsoft.com/office/drawing/2014/main" xmlns="" id="{BEF1595D-7A97-4FC7-9A8A-BC64D604BD45}"/>
               </a:ext>
             </a:extLst>
           </p:cNvPr>
@@ -4525,7 +4697,7 @@
           <p:cNvPr id="5" name="Рисунок 4">
             <a:extLst>
               <a:ext uri="{FF2B5EF4-FFF2-40B4-BE49-F238E27FC236}">
-                <a16:creationId xmlns:a16="http://schemas.microsoft.com/office/drawing/2014/main" id="{2AE978DA-6337-4AA8-B0C0-3B2C1B22E78D}"/>
+                <a16:creationId xmlns:a16="http://schemas.microsoft.com/office/drawing/2014/main" xmlns="" id="{2AE978DA-6337-4AA8-B0C0-3B2C1B22E78D}"/>
               </a:ext>
             </a:extLst>
           </p:cNvPr>
@@ -4538,7 +4710,7 @@
           <a:blip r:embed="rId2">
             <a:extLst>
               <a:ext uri="{28A0092B-C50C-407E-A947-70E740481C1C}">
-                <a14:useLocalDpi xmlns:a14="http://schemas.microsoft.com/office/drawing/2010/main" val="0"/>
+                <a14:useLocalDpi xmlns:a14="http://schemas.microsoft.com/office/drawing/2010/main" xmlns="" val="0"/>
               </a:ext>
             </a:extLst>
           </a:blip>
@@ -4561,7 +4733,7 @@
           <p:cNvPr id="6" name="Рисунок 5">
             <a:extLst>
               <a:ext uri="{FF2B5EF4-FFF2-40B4-BE49-F238E27FC236}">
-                <a16:creationId xmlns:a16="http://schemas.microsoft.com/office/drawing/2014/main" id="{BF6A9E5C-3447-4E97-B4BA-A5ACB9401847}"/>
+                <a16:creationId xmlns:a16="http://schemas.microsoft.com/office/drawing/2014/main" xmlns="" id="{BF6A9E5C-3447-4E97-B4BA-A5ACB9401847}"/>
               </a:ext>
             </a:extLst>
           </p:cNvPr>
@@ -4574,7 +4746,7 @@
           <a:blip r:embed="rId3">
             <a:extLst>
               <a:ext uri="{28A0092B-C50C-407E-A947-70E740481C1C}">
-                <a14:useLocalDpi xmlns:a14="http://schemas.microsoft.com/office/drawing/2010/main" val="0"/>
+                <a14:useLocalDpi xmlns:a14="http://schemas.microsoft.com/office/drawing/2010/main" xmlns="" val="0"/>
               </a:ext>
             </a:extLst>
           </a:blip>
@@ -4597,7 +4769,7 @@
           <p:cNvPr id="7" name="Рисунок 6">
             <a:extLst>
               <a:ext uri="{FF2B5EF4-FFF2-40B4-BE49-F238E27FC236}">
-                <a16:creationId xmlns:a16="http://schemas.microsoft.com/office/drawing/2014/main" id="{3BD6D96E-3EEE-48AE-97BE-864F648A951D}"/>
+                <a16:creationId xmlns:a16="http://schemas.microsoft.com/office/drawing/2014/main" xmlns="" id="{3BD6D96E-3EEE-48AE-97BE-864F648A951D}"/>
               </a:ext>
             </a:extLst>
           </p:cNvPr>
@@ -4610,7 +4782,7 @@
           <a:blip r:embed="rId4">
             <a:extLst>
               <a:ext uri="{28A0092B-C50C-407E-A947-70E740481C1C}">
-                <a14:useLocalDpi xmlns:a14="http://schemas.microsoft.com/office/drawing/2010/main" val="0"/>
+                <a14:useLocalDpi xmlns:a14="http://schemas.microsoft.com/office/drawing/2010/main" xmlns="" val="0"/>
               </a:ext>
             </a:extLst>
           </a:blip>
@@ -4631,7 +4803,7 @@
     </p:spTree>
     <p:extLst>
       <p:ext uri="{BB962C8B-B14F-4D97-AF65-F5344CB8AC3E}">
-        <p14:creationId xmlns:p14="http://schemas.microsoft.com/office/powerpoint/2010/main" val="1227467554"/>
+        <p14:creationId xmlns:p14="http://schemas.microsoft.com/office/powerpoint/2010/main" xmlns="" val="1227467554"/>
       </p:ext>
     </p:extLst>
   </p:cSld>
@@ -4642,110 +4814,58 @@
 </file>
 
 <file path=ppt/theme/theme1.xml><?xml version="1.0" encoding="utf-8"?>
-<a:theme xmlns:a="http://schemas.openxmlformats.org/drawingml/2006/main" name="Тема Office">
+<a:theme xmlns:a="http://schemas.openxmlformats.org/drawingml/2006/main" name="Яркая">
   <a:themeElements>
-    <a:clrScheme name="Стандартная">
+    <a:clrScheme name="Другая 3">
       <a:dk1>
         <a:sysClr val="windowText" lastClr="000000"/>
       </a:dk1>
       <a:lt1>
-        <a:sysClr val="window" lastClr="FFFFFF"/>
+        <a:srgbClr val="FFFFFF"/>
       </a:lt1>
       <a:dk2>
-        <a:srgbClr val="44546A"/>
+        <a:srgbClr val="262626"/>
       </a:dk2>
       <a:lt2>
-        <a:srgbClr val="E7E6E6"/>
+        <a:srgbClr val="7F7F7F"/>
       </a:lt2>
       <a:accent1>
-        <a:srgbClr val="4472C4"/>
+        <a:srgbClr val="FE780A"/>
       </a:accent1>
       <a:accent2>
-        <a:srgbClr val="ED7D31"/>
+        <a:srgbClr val="FFA709"/>
       </a:accent2>
       <a:accent3>
-        <a:srgbClr val="A5A5A5"/>
+        <a:srgbClr val="D96301"/>
       </a:accent3>
       <a:accent4>
-        <a:srgbClr val="FFC000"/>
+        <a:srgbClr val="994601"/>
       </a:accent4>
       <a:accent5>
-        <a:srgbClr val="5B9BD5"/>
+        <a:srgbClr val="FF0000"/>
       </a:accent5>
       <a:accent6>
-        <a:srgbClr val="70AD47"/>
+        <a:srgbClr val="E40059"/>
       </a:accent6>
       <a:hlink>
-        <a:srgbClr val="0563C1"/>
+        <a:srgbClr val="C00000"/>
       </a:hlink>
       <a:folHlink>
-        <a:srgbClr val="954F72"/>
+        <a:srgbClr val="FFA709"/>
       </a:folHlink>
     </a:clrScheme>
-    <a:fontScheme name="Стандартная">
+    <a:fontScheme name="Яркая">
       <a:majorFont>
-        <a:latin typeface="Calibri Light" panose="020F0302020204030204"/>
+        <a:latin typeface="Century Gothic"/>
         <a:ea typeface=""/>
         <a:cs typeface=""/>
-        <a:font script="Jpan" typeface="游ゴシック Light"/>
-        <a:font script="Hang" typeface="맑은 고딕"/>
-        <a:font script="Hans" typeface="等线 Light"/>
-        <a:font script="Hant" typeface="新細明體"/>
-        <a:font script="Arab" typeface="Times New Roman"/>
-        <a:font script="Hebr" typeface="Times New Roman"/>
-        <a:font script="Thai" typeface="Angsana New"/>
-        <a:font script="Ethi" typeface="Nyala"/>
-        <a:font script="Beng" typeface="Vrinda"/>
-        <a:font script="Gujr" typeface="Shruti"/>
-        <a:font script="Khmr" typeface="MoolBoran"/>
-        <a:font script="Knda" typeface="Tunga"/>
-        <a:font script="Guru" typeface="Raavi"/>
-        <a:font script="Cans" typeface="Euphemia"/>
-        <a:font script="Cher" typeface="Plantagenet Cherokee"/>
-        <a:font script="Yiii" typeface="Microsoft Yi Baiti"/>
-        <a:font script="Tibt" typeface="Microsoft Himalaya"/>
-        <a:font script="Thaa" typeface="MV Boli"/>
-        <a:font script="Deva" typeface="Mangal"/>
-        <a:font script="Telu" typeface="Gautami"/>
-        <a:font script="Taml" typeface="Latha"/>
-        <a:font script="Syrc" typeface="Estrangelo Edessa"/>
-        <a:font script="Orya" typeface="Kalinga"/>
-        <a:font script="Mlym" typeface="Kartika"/>
-        <a:font script="Laoo" typeface="DokChampa"/>
-        <a:font script="Sinh" typeface="Iskoola Pota"/>
-        <a:font script="Mong" typeface="Mongolian Baiti"/>
-        <a:font script="Viet" typeface="Times New Roman"/>
-        <a:font script="Uigh" typeface="Microsoft Uighur"/>
-        <a:font script="Geor" typeface="Sylfaen"/>
-        <a:font script="Armn" typeface="Arial"/>
-        <a:font script="Bugi" typeface="Leelawadee UI"/>
-        <a:font script="Bopo" typeface="Microsoft JhengHei"/>
-        <a:font script="Java" typeface="Javanese Text"/>
-        <a:font script="Lisu" typeface="Segoe UI"/>
-        <a:font script="Mymr" typeface="Myanmar Text"/>
-        <a:font script="Nkoo" typeface="Ebrima"/>
-        <a:font script="Olck" typeface="Nirmala UI"/>
-        <a:font script="Osma" typeface="Ebrima"/>
-        <a:font script="Phag" typeface="Phagspa"/>
-        <a:font script="Syrn" typeface="Estrangelo Edessa"/>
-        <a:font script="Syrj" typeface="Estrangelo Edessa"/>
-        <a:font script="Syre" typeface="Estrangelo Edessa"/>
-        <a:font script="Sora" typeface="Nirmala UI"/>
-        <a:font script="Tale" typeface="Microsoft Tai Le"/>
-        <a:font script="Talu" typeface="Microsoft New Tai Lue"/>
-        <a:font script="Tfng" typeface="Ebrima"/>
-      </a:majorFont>
-      <a:minorFont>
-        <a:latin typeface="Calibri" panose="020F0502020204030204"/>
-        <a:ea typeface=""/>
-        <a:cs typeface=""/>
-        <a:font script="Jpan" typeface="游ゴシック"/>
-        <a:font script="Hang" typeface="맑은 고딕"/>
-        <a:font script="Hans" typeface="等线"/>
-        <a:font script="Hant" typeface="新細明體"/>
-        <a:font script="Arab" typeface="Arial"/>
-        <a:font script="Hebr" typeface="Arial"/>
-        <a:font script="Thai" typeface="Cordia New"/>
+        <a:font script="Jpan" typeface="HGｺﾞｼｯｸM"/>
+        <a:font script="Hang" typeface="HY중고딕"/>
+        <a:font script="Hans" typeface="幼圆"/>
+        <a:font script="Hant" typeface="微軟正黑體"/>
+        <a:font script="Arab" typeface="Tahoma"/>
+        <a:font script="Hebr" typeface="Gisha"/>
+        <a:font script="Thai" typeface="DilleniaUPC"/>
         <a:font script="Ethi" typeface="Nyala"/>
         <a:font script="Beng" typeface="Vrinda"/>
         <a:font script="Gujr" typeface="Shruti"/>
@@ -4766,29 +4886,45 @@
         <a:font script="Laoo" typeface="DokChampa"/>
         <a:font script="Sinh" typeface="Iskoola Pota"/>
         <a:font script="Mong" typeface="Mongolian Baiti"/>
-        <a:font script="Viet" typeface="Arial"/>
+        <a:font script="Viet" typeface="Tahoma"/>
         <a:font script="Uigh" typeface="Microsoft Uighur"/>
-        <a:font script="Geor" typeface="Sylfaen"/>
-        <a:font script="Armn" typeface="Arial"/>
-        <a:font script="Bugi" typeface="Leelawadee UI"/>
-        <a:font script="Bopo" typeface="Microsoft JhengHei"/>
-        <a:font script="Java" typeface="Javanese Text"/>
-        <a:font script="Lisu" typeface="Segoe UI"/>
-        <a:font script="Mymr" typeface="Myanmar Text"/>
-        <a:font script="Nkoo" typeface="Ebrima"/>
-        <a:font script="Olck" typeface="Nirmala UI"/>
-        <a:font script="Osma" typeface="Ebrima"/>
-        <a:font script="Phag" typeface="Phagspa"/>
-        <a:font script="Syrn" typeface="Estrangelo Edessa"/>
-        <a:font script="Syrj" typeface="Estrangelo Edessa"/>
-        <a:font script="Syre" typeface="Estrangelo Edessa"/>
-        <a:font script="Sora" typeface="Nirmala UI"/>
-        <a:font script="Tale" typeface="Microsoft Tai Le"/>
-        <a:font script="Talu" typeface="Microsoft New Tai Lue"/>
-        <a:font script="Tfng" typeface="Ebrima"/>
+      </a:majorFont>
+      <a:minorFont>
+        <a:latin typeface="Century Gothic"/>
+        <a:ea typeface=""/>
+        <a:cs typeface=""/>
+        <a:font script="Jpan" typeface="ＭＳ ゴシック"/>
+        <a:font script="Hang" typeface="HY중고딕"/>
+        <a:font script="Hans" typeface="幼圆"/>
+        <a:font script="Hant" typeface="微軟正黑體"/>
+        <a:font script="Arab" typeface="Tahoma"/>
+        <a:font script="Hebr" typeface="Gisha"/>
+        <a:font script="Thai" typeface="DilleniaUPC"/>
+        <a:font script="Ethi" typeface="Nyala"/>
+        <a:font script="Beng" typeface="Vrinda"/>
+        <a:font script="Gujr" typeface="Shruti"/>
+        <a:font script="Khmr" typeface="DaunPenh"/>
+        <a:font script="Knda" typeface="Tunga"/>
+        <a:font script="Guru" typeface="Raavi"/>
+        <a:font script="Cans" typeface="Euphemia"/>
+        <a:font script="Cher" typeface="Plantagenet Cherokee"/>
+        <a:font script="Yiii" typeface="Microsoft Yi Baiti"/>
+        <a:font script="Tibt" typeface="Microsoft Himalaya"/>
+        <a:font script="Thaa" typeface="MV Boli"/>
+        <a:font script="Deva" typeface="Mangal"/>
+        <a:font script="Telu" typeface="Gautami"/>
+        <a:font script="Taml" typeface="Latha"/>
+        <a:font script="Syrc" typeface="Estrangelo Edessa"/>
+        <a:font script="Orya" typeface="Kalinga"/>
+        <a:font script="Mlym" typeface="Kartika"/>
+        <a:font script="Laoo" typeface="DokChampa"/>
+        <a:font script="Sinh" typeface="Iskoola Pota"/>
+        <a:font script="Mong" typeface="Mongolian Baiti"/>
+        <a:font script="Viet" typeface="Verdana"/>
+        <a:font script="Uigh" typeface="Microsoft Uighur"/>
       </a:minorFont>
     </a:fontScheme>
-    <a:fmtScheme name="Стандартная">
+    <a:fmtScheme name="Яркая">
       <a:fillStyleLst>
         <a:solidFill>
           <a:schemeClr val="phClr"/>
@@ -4797,141 +4933,164 @@
           <a:gsLst>
             <a:gs pos="0">
               <a:schemeClr val="phClr">
-                <a:lumMod val="110000"/>
-                <a:satMod val="105000"/>
-                <a:tint val="67000"/>
+                <a:tint val="10000"/>
+                <a:satMod val="300000"/>
               </a:schemeClr>
             </a:gs>
-            <a:gs pos="50000">
+            <a:gs pos="34000">
               <a:schemeClr val="phClr">
-                <a:lumMod val="105000"/>
-                <a:satMod val="103000"/>
-                <a:tint val="73000"/>
+                <a:tint val="13500"/>
+                <a:satMod val="250000"/>
               </a:schemeClr>
             </a:gs>
             <a:gs pos="100000">
               <a:schemeClr val="phClr">
-                <a:lumMod val="105000"/>
-                <a:satMod val="109000"/>
-                <a:tint val="81000"/>
+                <a:tint val="60000"/>
+                <a:satMod val="200000"/>
               </a:schemeClr>
             </a:gs>
           </a:gsLst>
-          <a:lin ang="5400000" scaled="0"/>
+          <a:path path="circle">
+            <a:fillToRect l="50000" t="155000" r="50000" b="-55000"/>
+          </a:path>
         </a:gradFill>
         <a:gradFill rotWithShape="1">
           <a:gsLst>
             <a:gs pos="0">
               <a:schemeClr val="phClr">
-                <a:satMod val="103000"/>
-                <a:lumMod val="102000"/>
-                <a:tint val="94000"/>
+                <a:tint val="60000"/>
+                <a:satMod val="160000"/>
               </a:schemeClr>
             </a:gs>
-            <a:gs pos="50000">
+            <a:gs pos="46000">
               <a:schemeClr val="phClr">
-                <a:satMod val="110000"/>
-                <a:lumMod val="100000"/>
-                <a:shade val="100000"/>
+                <a:tint val="86000"/>
+                <a:satMod val="160000"/>
               </a:schemeClr>
             </a:gs>
             <a:gs pos="100000">
               <a:schemeClr val="phClr">
-                <a:lumMod val="99000"/>
-                <a:satMod val="120000"/>
-                <a:shade val="78000"/>
+                <a:shade val="40000"/>
+                <a:satMod val="160000"/>
               </a:schemeClr>
             </a:gs>
           </a:gsLst>
-          <a:lin ang="5400000" scaled="0"/>
+          <a:path path="circle">
+            <a:fillToRect l="50000" t="155000" r="50000" b="-55000"/>
+          </a:path>
         </a:gradFill>
       </a:fillStyleLst>
       <a:lnStyleLst>
-        <a:ln w="6350" cap="flat" cmpd="sng" algn="ctr">
+        <a:ln w="9525" cap="flat" cmpd="sng" algn="ctr">
+          <a:solidFill>
+            <a:schemeClr val="phClr">
+              <a:satMod val="120000"/>
+            </a:schemeClr>
+          </a:solidFill>
+          <a:prstDash val="solid"/>
+        </a:ln>
+        <a:ln w="25400" cap="flat" cmpd="sng" algn="ctr">
           <a:solidFill>
             <a:schemeClr val="phClr"/>
           </a:solidFill>
           <a:prstDash val="solid"/>
-          <a:miter lim="800000"/>
         </a:ln>
-        <a:ln w="12700" cap="flat" cmpd="sng" algn="ctr">
+        <a:ln w="38100" cap="flat" cmpd="sng" algn="ctr">
           <a:solidFill>
             <a:schemeClr val="phClr"/>
           </a:solidFill>
           <a:prstDash val="solid"/>
-          <a:miter lim="800000"/>
-        </a:ln>
-        <a:ln w="19050" cap="flat" cmpd="sng" algn="ctr">
-          <a:solidFill>
-            <a:schemeClr val="phClr"/>
-          </a:solidFill>
-          <a:prstDash val="solid"/>
-          <a:miter lim="800000"/>
         </a:ln>
       </a:lnStyleLst>
       <a:effectStyleLst>
         <a:effectStyle>
-          <a:effectLst/>
-        </a:effectStyle>
-        <a:effectStyle>
-          <a:effectLst/>
+          <a:effectLst>
+            <a:outerShdw blurRad="63500" dist="25400" dir="14700000" algn="t" rotWithShape="0">
+              <a:srgbClr val="000000">
+                <a:alpha val="50000"/>
+              </a:srgbClr>
+            </a:outerShdw>
+          </a:effectLst>
         </a:effectStyle>
         <a:effectStyle>
           <a:effectLst>
-            <a:outerShdw blurRad="57150" dist="19050" dir="5400000" algn="ctr" rotWithShape="0">
+            <a:outerShdw blurRad="50800" dist="38100" dir="14700000" algn="t" rotWithShape="0">
               <a:srgbClr val="000000">
-                <a:alpha val="63000"/>
+                <a:alpha val="60000"/>
               </a:srgbClr>
             </a:outerShdw>
           </a:effectLst>
+        </a:effectStyle>
+        <a:effectStyle>
+          <a:effectLst>
+            <a:outerShdw blurRad="50800" dist="38100" dir="14700000" algn="t" rotWithShape="0">
+              <a:srgbClr val="000000">
+                <a:alpha val="60000"/>
+              </a:srgbClr>
+            </a:outerShdw>
+          </a:effectLst>
+          <a:scene3d>
+            <a:camera prst="orthographicFront" fov="0">
+              <a:rot lat="0" lon="0" rev="0"/>
+            </a:camera>
+            <a:lightRig rig="contrasting" dir="t">
+              <a:rot lat="0" lon="0" rev="3600000"/>
+            </a:lightRig>
+          </a:scene3d>
+          <a:sp3d prstMaterial="plastic">
+            <a:bevelT w="127000" h="38200" prst="relaxedInset"/>
+            <a:contourClr>
+              <a:schemeClr val="phClr"/>
+            </a:contourClr>
+          </a:sp3d>
         </a:effectStyle>
       </a:effectStyleLst>
       <a:bgFillStyleLst>
         <a:solidFill>
           <a:schemeClr val="phClr"/>
         </a:solidFill>
-        <a:solidFill>
-          <a:schemeClr val="phClr">
-            <a:tint val="95000"/>
-            <a:satMod val="170000"/>
-          </a:schemeClr>
-        </a:solidFill>
         <a:gradFill rotWithShape="1">
           <a:gsLst>
             <a:gs pos="0">
               <a:schemeClr val="phClr">
-                <a:tint val="93000"/>
-                <a:satMod val="150000"/>
-                <a:shade val="98000"/>
-                <a:lumMod val="102000"/>
+                <a:shade val="48000"/>
+                <a:satMod val="230000"/>
               </a:schemeClr>
             </a:gs>
-            <a:gs pos="50000">
+            <a:gs pos="60000">
               <a:schemeClr val="phClr">
-                <a:tint val="98000"/>
-                <a:satMod val="130000"/>
-                <a:shade val="90000"/>
-                <a:lumMod val="103000"/>
+                <a:shade val="92000"/>
+                <a:satMod val="230000"/>
               </a:schemeClr>
             </a:gs>
             <a:gs pos="100000">
               <a:schemeClr val="phClr">
-                <a:shade val="63000"/>
-                <a:satMod val="120000"/>
+                <a:tint val="85000"/>
+                <a:satMod val="400000"/>
               </a:schemeClr>
             </a:gs>
           </a:gsLst>
           <a:lin ang="5400000" scaled="0"/>
         </a:gradFill>
+        <a:blipFill>
+          <a:blip xmlns:r="http://schemas.openxmlformats.org/officeDocument/2006/relationships" r:embed="rId1">
+            <a:duotone>
+              <a:schemeClr val="phClr">
+                <a:shade val="1200"/>
+                <a:satMod val="150000"/>
+              </a:schemeClr>
+              <a:schemeClr val="phClr">
+                <a:tint val="90000"/>
+                <a:satMod val="150000"/>
+              </a:schemeClr>
+            </a:duotone>
+          </a:blip>
+          <a:tile tx="0" ty="0" sx="70000" sy="70000" flip="none" algn="tl"/>
+        </a:blipFill>
       </a:bgFillStyleLst>
     </a:fmtScheme>
   </a:themeElements>
   <a:objectDefaults/>
   <a:extraClrSchemeLst/>
-  <a:extLst>
-    <a:ext uri="{05A4C25C-085E-4340-85A3-A5531E510DB2}">
-      <thm15:themeFamily xmlns:thm15="http://schemas.microsoft.com/office/thememl/2012/main" name="Office Theme" id="{62F939B6-93AF-4DB8-9C6B-D6C7DFDC589F}" vid="{4A3C46E8-61CC-4603-A589-7422A47A8E4A}"/>
-    </a:ext>
-  </a:extLst>
 </a:theme>
 </file>